--- a/materials/スタート画面.pptx
+++ b/materials/スタート画面.pptx
@@ -2,7 +2,7 @@
 <file path=ppt/presentation.xml><?xml version="1.0" encoding="utf-8"?>
 <p:presentation xmlns:a="http://schemas.openxmlformats.org/drawingml/2006/main" xmlns:r="http://schemas.openxmlformats.org/officeDocument/2006/relationships" xmlns:p="http://schemas.openxmlformats.org/presentationml/2006/main" saveSubsetFonts="1">
   <p:sldMasterIdLst>
-    <p:sldMasterId id="2147483648" r:id="rId1"/>
+    <p:sldMasterId id="2147483870" r:id="rId1"/>
   </p:sldMasterIdLst>
   <p:sldIdLst>
     <p:sldId id="257" r:id="rId2"/>
@@ -11,10 +11,10 @@
   <p:notesSz cx="6858000" cy="9144000"/>
   <p:defaultTextStyle>
     <a:defPPr>
-      <a:defRPr lang="ja-JP"/>
+      <a:defRPr lang="en-US"/>
     </a:defPPr>
-    <a:lvl1pPr marL="0" algn="l" defTabSz="914400" rtl="0" eaLnBrk="1" latinLnBrk="0" hangingPunct="1">
-      <a:defRPr kumimoji="1" sz="1800" kern="1200">
+    <a:lvl1pPr marL="0" algn="l" defTabSz="457200" rtl="0" eaLnBrk="1" latinLnBrk="0" hangingPunct="1">
+      <a:defRPr sz="1800" kern="1200">
         <a:solidFill>
           <a:schemeClr val="tx1"/>
         </a:solidFill>
@@ -23,8 +23,8 @@
         <a:cs typeface="+mn-cs"/>
       </a:defRPr>
     </a:lvl1pPr>
-    <a:lvl2pPr marL="457200" algn="l" defTabSz="914400" rtl="0" eaLnBrk="1" latinLnBrk="0" hangingPunct="1">
-      <a:defRPr kumimoji="1" sz="1800" kern="1200">
+    <a:lvl2pPr marL="457200" algn="l" defTabSz="457200" rtl="0" eaLnBrk="1" latinLnBrk="0" hangingPunct="1">
+      <a:defRPr sz="1800" kern="1200">
         <a:solidFill>
           <a:schemeClr val="tx1"/>
         </a:solidFill>
@@ -33,8 +33,8 @@
         <a:cs typeface="+mn-cs"/>
       </a:defRPr>
     </a:lvl2pPr>
-    <a:lvl3pPr marL="914400" algn="l" defTabSz="914400" rtl="0" eaLnBrk="1" latinLnBrk="0" hangingPunct="1">
-      <a:defRPr kumimoji="1" sz="1800" kern="1200">
+    <a:lvl3pPr marL="914400" algn="l" defTabSz="457200" rtl="0" eaLnBrk="1" latinLnBrk="0" hangingPunct="1">
+      <a:defRPr sz="1800" kern="1200">
         <a:solidFill>
           <a:schemeClr val="tx1"/>
         </a:solidFill>
@@ -43,8 +43,8 @@
         <a:cs typeface="+mn-cs"/>
       </a:defRPr>
     </a:lvl3pPr>
-    <a:lvl4pPr marL="1371600" algn="l" defTabSz="914400" rtl="0" eaLnBrk="1" latinLnBrk="0" hangingPunct="1">
-      <a:defRPr kumimoji="1" sz="1800" kern="1200">
+    <a:lvl4pPr marL="1371600" algn="l" defTabSz="457200" rtl="0" eaLnBrk="1" latinLnBrk="0" hangingPunct="1">
+      <a:defRPr sz="1800" kern="1200">
         <a:solidFill>
           <a:schemeClr val="tx1"/>
         </a:solidFill>
@@ -53,8 +53,8 @@
         <a:cs typeface="+mn-cs"/>
       </a:defRPr>
     </a:lvl4pPr>
-    <a:lvl5pPr marL="1828800" algn="l" defTabSz="914400" rtl="0" eaLnBrk="1" latinLnBrk="0" hangingPunct="1">
-      <a:defRPr kumimoji="1" sz="1800" kern="1200">
+    <a:lvl5pPr marL="1828800" algn="l" defTabSz="457200" rtl="0" eaLnBrk="1" latinLnBrk="0" hangingPunct="1">
+      <a:defRPr sz="1800" kern="1200">
         <a:solidFill>
           <a:schemeClr val="tx1"/>
         </a:solidFill>
@@ -63,8 +63,8 @@
         <a:cs typeface="+mn-cs"/>
       </a:defRPr>
     </a:lvl5pPr>
-    <a:lvl6pPr marL="2286000" algn="l" defTabSz="914400" rtl="0" eaLnBrk="1" latinLnBrk="0" hangingPunct="1">
-      <a:defRPr kumimoji="1" sz="1800" kern="1200">
+    <a:lvl6pPr marL="2286000" algn="l" defTabSz="457200" rtl="0" eaLnBrk="1" latinLnBrk="0" hangingPunct="1">
+      <a:defRPr sz="1800" kern="1200">
         <a:solidFill>
           <a:schemeClr val="tx1"/>
         </a:solidFill>
@@ -73,8 +73,8 @@
         <a:cs typeface="+mn-cs"/>
       </a:defRPr>
     </a:lvl6pPr>
-    <a:lvl7pPr marL="2743200" algn="l" defTabSz="914400" rtl="0" eaLnBrk="1" latinLnBrk="0" hangingPunct="1">
-      <a:defRPr kumimoji="1" sz="1800" kern="1200">
+    <a:lvl7pPr marL="2743200" algn="l" defTabSz="457200" rtl="0" eaLnBrk="1" latinLnBrk="0" hangingPunct="1">
+      <a:defRPr sz="1800" kern="1200">
         <a:solidFill>
           <a:schemeClr val="tx1"/>
         </a:solidFill>
@@ -83,8 +83,8 @@
         <a:cs typeface="+mn-cs"/>
       </a:defRPr>
     </a:lvl7pPr>
-    <a:lvl8pPr marL="3200400" algn="l" defTabSz="914400" rtl="0" eaLnBrk="1" latinLnBrk="0" hangingPunct="1">
-      <a:defRPr kumimoji="1" sz="1800" kern="1200">
+    <a:lvl8pPr marL="3200400" algn="l" defTabSz="457200" rtl="0" eaLnBrk="1" latinLnBrk="0" hangingPunct="1">
+      <a:defRPr sz="1800" kern="1200">
         <a:solidFill>
           <a:schemeClr val="tx1"/>
         </a:solidFill>
@@ -93,8 +93,8 @@
         <a:cs typeface="+mn-cs"/>
       </a:defRPr>
     </a:lvl8pPr>
-    <a:lvl9pPr marL="3657600" algn="l" defTabSz="914400" rtl="0" eaLnBrk="1" latinLnBrk="0" hangingPunct="1">
-      <a:defRPr kumimoji="1" sz="1800" kern="1200">
+    <a:lvl9pPr marL="3657600" algn="l" defTabSz="457200" rtl="0" eaLnBrk="1" latinLnBrk="0" hangingPunct="1">
+      <a:defRPr sz="1800" kern="1200">
         <a:solidFill>
           <a:schemeClr val="tx1"/>
         </a:solidFill>
@@ -104,7 +104,201 @@
       </a:defRPr>
     </a:lvl9pPr>
   </p:defaultTextStyle>
+  <p:extLst>
+    <p:ext uri="{EFAFB233-063F-42B5-8137-9DF3F51BA10A}">
+      <p15:sldGuideLst xmlns:p15="http://schemas.microsoft.com/office/powerpoint/2012/main"/>
+    </p:ext>
+  </p:extLst>
 </p:presentation>
+</file>
+
+<file path=ppt/revisionInfo.xml><?xml version="1.0" encoding="utf-8"?>
+<p1510:revInfo xmlns:a="http://schemas.openxmlformats.org/drawingml/2006/main" xmlns:r="http://schemas.openxmlformats.org/officeDocument/2006/relationships" xmlns:p1510="http://schemas.microsoft.com/office/powerpoint/2015/10/main">
+  <p1510:revLst>
+    <p1510:client id="{1D59924E-8F43-4EAC-9B5C-41CA40A29843}" v="18" dt="2026-07-06T05:53:58.054"/>
+  </p1510:revLst>
+</p1510:revInfo>
+</file>
+
+<file path=ppt/changesInfos/changesInfo1.xml><?xml version="1.0" encoding="utf-8"?>
+<pc:chgInfo xmlns:a="http://schemas.openxmlformats.org/drawingml/2006/main" xmlns:r="http://schemas.openxmlformats.org/officeDocument/2006/relationships" xmlns:ac="http://schemas.microsoft.com/office/drawing/2013/main/command" xmlns:pc="http://schemas.microsoft.com/office/powerpoint/2013/main/command">
+  <pc:docChgLst>
+    <pc:chgData name="春樹 寺谷" userId="273275a70e5237a3" providerId="LiveId" clId="{A7346177-5A59-47E4-BD9A-CD90ECDD0E43}"/>
+    <pc:docChg chg="undo custSel modSld">
+      <pc:chgData name="春樹 寺谷" userId="273275a70e5237a3" providerId="LiveId" clId="{A7346177-5A59-47E4-BD9A-CD90ECDD0E43}" dt="2026-07-06T05:54:49.027" v="84" actId="20577"/>
+      <pc:docMkLst>
+        <pc:docMk/>
+      </pc:docMkLst>
+      <pc:sldChg chg="addSp delSp modSp mod">
+        <pc:chgData name="春樹 寺谷" userId="273275a70e5237a3" providerId="LiveId" clId="{A7346177-5A59-47E4-BD9A-CD90ECDD0E43}" dt="2026-07-06T05:54:49.027" v="84" actId="20577"/>
+        <pc:sldMkLst>
+          <pc:docMk/>
+          <pc:sldMk cId="1116214111" sldId="257"/>
+        </pc:sldMkLst>
+        <pc:spChg chg="mod">
+          <ac:chgData name="春樹 寺谷" userId="273275a70e5237a3" providerId="LiveId" clId="{A7346177-5A59-47E4-BD9A-CD90ECDD0E43}" dt="2026-07-06T05:46:23.097" v="6" actId="1076"/>
+          <ac:spMkLst>
+            <pc:docMk/>
+            <pc:sldMk cId="1116214111" sldId="257"/>
+            <ac:spMk id="2" creationId="{374927F0-AE0F-5365-4B43-1B5D7B3F5F28}"/>
+          </ac:spMkLst>
+        </pc:spChg>
+        <pc:spChg chg="add del">
+          <ac:chgData name="春樹 寺谷" userId="273275a70e5237a3" providerId="LiveId" clId="{A7346177-5A59-47E4-BD9A-CD90ECDD0E43}" dt="2026-07-06T05:49:17.253" v="35" actId="478"/>
+          <ac:spMkLst>
+            <pc:docMk/>
+            <pc:sldMk cId="1116214111" sldId="257"/>
+            <ac:spMk id="4" creationId="{C973119B-46FD-5D99-6E05-4F62011658A3}"/>
+          </ac:spMkLst>
+        </pc:spChg>
+        <pc:spChg chg="del">
+          <ac:chgData name="春樹 寺谷" userId="273275a70e5237a3" providerId="LiveId" clId="{A7346177-5A59-47E4-BD9A-CD90ECDD0E43}" dt="2026-07-06T05:48:54.993" v="24" actId="478"/>
+          <ac:spMkLst>
+            <pc:docMk/>
+            <pc:sldMk cId="1116214111" sldId="257"/>
+            <ac:spMk id="7" creationId="{F6506060-383E-D578-36D0-27FBA0A940EA}"/>
+          </ac:spMkLst>
+        </pc:spChg>
+        <pc:spChg chg="add mod">
+          <ac:chgData name="春樹 寺谷" userId="273275a70e5237a3" providerId="LiveId" clId="{A7346177-5A59-47E4-BD9A-CD90ECDD0E43}" dt="2026-07-06T05:54:11.853" v="73" actId="207"/>
+          <ac:spMkLst>
+            <pc:docMk/>
+            <pc:sldMk cId="1116214111" sldId="257"/>
+            <ac:spMk id="8" creationId="{D11133AF-68B9-B2C9-D536-5BAE166658A7}"/>
+          </ac:spMkLst>
+        </pc:spChg>
+        <pc:spChg chg="mod">
+          <ac:chgData name="春樹 寺谷" userId="273275a70e5237a3" providerId="LiveId" clId="{A7346177-5A59-47E4-BD9A-CD90ECDD0E43}" dt="2026-07-06T05:54:49.027" v="84" actId="20577"/>
+          <ac:spMkLst>
+            <pc:docMk/>
+            <pc:sldMk cId="1116214111" sldId="257"/>
+            <ac:spMk id="9" creationId="{9E80743D-38DB-1063-E48B-564267F68BD9}"/>
+          </ac:spMkLst>
+        </pc:spChg>
+        <pc:spChg chg="del mod">
+          <ac:chgData name="春樹 寺谷" userId="273275a70e5237a3" providerId="LiveId" clId="{A7346177-5A59-47E4-BD9A-CD90ECDD0E43}" dt="2026-07-06T05:48:26.428" v="21" actId="478"/>
+          <ac:spMkLst>
+            <pc:docMk/>
+            <pc:sldMk cId="1116214111" sldId="257"/>
+            <ac:spMk id="10" creationId="{D034C81B-E7AD-AD8D-D2C2-C4A13C84C602}"/>
+          </ac:spMkLst>
+        </pc:spChg>
+        <pc:spChg chg="add mod">
+          <ac:chgData name="春樹 寺谷" userId="273275a70e5237a3" providerId="LiveId" clId="{A7346177-5A59-47E4-BD9A-CD90ECDD0E43}" dt="2026-07-06T05:54:20.958" v="75" actId="207"/>
+          <ac:spMkLst>
+            <pc:docMk/>
+            <pc:sldMk cId="1116214111" sldId="257"/>
+            <ac:spMk id="12" creationId="{86FC2446-AC3E-35B5-F435-8335A89088E5}"/>
+          </ac:spMkLst>
+        </pc:spChg>
+        <pc:spChg chg="add mod">
+          <ac:chgData name="春樹 寺谷" userId="273275a70e5237a3" providerId="LiveId" clId="{A7346177-5A59-47E4-BD9A-CD90ECDD0E43}" dt="2026-07-06T05:54:25.461" v="76" actId="207"/>
+          <ac:spMkLst>
+            <pc:docMk/>
+            <pc:sldMk cId="1116214111" sldId="257"/>
+            <ac:spMk id="14" creationId="{045FDE0A-1B5E-5E05-1208-7BA8BD57B68F}"/>
+          </ac:spMkLst>
+        </pc:spChg>
+        <pc:spChg chg="add mod">
+          <ac:chgData name="春樹 寺谷" userId="273275a70e5237a3" providerId="LiveId" clId="{A7346177-5A59-47E4-BD9A-CD90ECDD0E43}" dt="2026-07-06T05:54:31.464" v="77" actId="207"/>
+          <ac:spMkLst>
+            <pc:docMk/>
+            <pc:sldMk cId="1116214111" sldId="257"/>
+            <ac:spMk id="16" creationId="{93869010-6539-11AA-402A-9E8989EB186C}"/>
+          </ac:spMkLst>
+        </pc:spChg>
+        <pc:spChg chg="add mod">
+          <ac:chgData name="春樹 寺谷" userId="273275a70e5237a3" providerId="LiveId" clId="{A7346177-5A59-47E4-BD9A-CD90ECDD0E43}" dt="2026-07-06T05:50:25.038" v="43" actId="207"/>
+          <ac:spMkLst>
+            <pc:docMk/>
+            <pc:sldMk cId="1116214111" sldId="257"/>
+            <ac:spMk id="18" creationId="{D1CEB488-1A22-B841-8372-E5DE266F2307}"/>
+          </ac:spMkLst>
+        </pc:spChg>
+        <pc:spChg chg="add mod">
+          <ac:chgData name="春樹 寺谷" userId="273275a70e5237a3" providerId="LiveId" clId="{A7346177-5A59-47E4-BD9A-CD90ECDD0E43}" dt="2026-07-06T05:51:55.196" v="72" actId="1076"/>
+          <ac:spMkLst>
+            <pc:docMk/>
+            <pc:sldMk cId="1116214111" sldId="257"/>
+            <ac:spMk id="19" creationId="{5D5AD0C7-639D-C9AC-231B-D0AE65E07B4D}"/>
+          </ac:spMkLst>
+        </pc:spChg>
+        <pc:spChg chg="add del">
+          <ac:chgData name="春樹 寺谷" userId="273275a70e5237a3" providerId="LiveId" clId="{A7346177-5A59-47E4-BD9A-CD90ECDD0E43}" dt="2026-07-06T05:51:17.765" v="62" actId="22"/>
+          <ac:spMkLst>
+            <pc:docMk/>
+            <pc:sldMk cId="1116214111" sldId="257"/>
+            <ac:spMk id="21" creationId="{6CB2613F-2219-0FCB-BD2A-2E3889C75028}"/>
+          </ac:spMkLst>
+        </pc:spChg>
+        <pc:spChg chg="add del">
+          <ac:chgData name="春樹 寺谷" userId="273275a70e5237a3" providerId="LiveId" clId="{A7346177-5A59-47E4-BD9A-CD90ECDD0E43}" dt="2026-07-06T05:51:17.356" v="61" actId="22"/>
+          <ac:spMkLst>
+            <pc:docMk/>
+            <pc:sldMk cId="1116214111" sldId="257"/>
+            <ac:spMk id="23" creationId="{F53468A4-15AA-9567-0E92-C27BAADFE6F0}"/>
+          </ac:spMkLst>
+        </pc:spChg>
+        <pc:spChg chg="add del">
+          <ac:chgData name="春樹 寺谷" userId="273275a70e5237a3" providerId="LiveId" clId="{A7346177-5A59-47E4-BD9A-CD90ECDD0E43}" dt="2026-07-06T05:51:17.133" v="60" actId="22"/>
+          <ac:spMkLst>
+            <pc:docMk/>
+            <pc:sldMk cId="1116214111" sldId="257"/>
+            <ac:spMk id="25" creationId="{2E26B284-BAD0-83F3-1033-8E8BC0112F6A}"/>
+          </ac:spMkLst>
+        </pc:spChg>
+        <pc:spChg chg="add del mod">
+          <ac:chgData name="春樹 寺谷" userId="273275a70e5237a3" providerId="LiveId" clId="{A7346177-5A59-47E4-BD9A-CD90ECDD0E43}" dt="2026-07-06T05:51:16.910" v="59" actId="22"/>
+          <ac:spMkLst>
+            <pc:docMk/>
+            <pc:sldMk cId="1116214111" sldId="257"/>
+            <ac:spMk id="27" creationId="{2E6C9083-FF42-4CAE-EC91-52C88E714493}"/>
+          </ac:spMkLst>
+        </pc:spChg>
+        <pc:spChg chg="add del mod">
+          <ac:chgData name="春樹 寺谷" userId="273275a70e5237a3" providerId="LiveId" clId="{A7346177-5A59-47E4-BD9A-CD90ECDD0E43}" dt="2026-07-06T05:51:16.724" v="58" actId="22"/>
+          <ac:spMkLst>
+            <pc:docMk/>
+            <pc:sldMk cId="1116214111" sldId="257"/>
+            <ac:spMk id="29" creationId="{37CA139A-01BF-445F-3BE5-1E3C7A4BB640}"/>
+          </ac:spMkLst>
+        </pc:spChg>
+        <pc:spChg chg="add mod">
+          <ac:chgData name="春樹 寺谷" userId="273275a70e5237a3" providerId="LiveId" clId="{A7346177-5A59-47E4-BD9A-CD90ECDD0E43}" dt="2026-07-06T05:51:50.246" v="71" actId="1076"/>
+          <ac:spMkLst>
+            <pc:docMk/>
+            <pc:sldMk cId="1116214111" sldId="257"/>
+            <ac:spMk id="31" creationId="{187A2745-89EF-4D23-823A-33B2865C4DA6}"/>
+          </ac:spMkLst>
+        </pc:spChg>
+        <pc:spChg chg="add mod">
+          <ac:chgData name="春樹 寺谷" userId="273275a70e5237a3" providerId="LiveId" clId="{A7346177-5A59-47E4-BD9A-CD90ECDD0E43}" dt="2026-07-06T05:51:44.115" v="70" actId="1076"/>
+          <ac:spMkLst>
+            <pc:docMk/>
+            <pc:sldMk cId="1116214111" sldId="257"/>
+            <ac:spMk id="33" creationId="{E3CB6116-2B47-F324-EDEC-14E23365DB77}"/>
+          </ac:spMkLst>
+        </pc:spChg>
+        <pc:spChg chg="add mod">
+          <ac:chgData name="春樹 寺谷" userId="273275a70e5237a3" providerId="LiveId" clId="{A7346177-5A59-47E4-BD9A-CD90ECDD0E43}" dt="2026-07-06T05:51:38.334" v="69" actId="1076"/>
+          <ac:spMkLst>
+            <pc:docMk/>
+            <pc:sldMk cId="1116214111" sldId="257"/>
+            <ac:spMk id="35" creationId="{0EC99A99-4DAC-0728-15EE-DD3A760437C0}"/>
+          </ac:spMkLst>
+        </pc:spChg>
+        <pc:spChg chg="add mod">
+          <ac:chgData name="春樹 寺谷" userId="273275a70e5237a3" providerId="LiveId" clId="{A7346177-5A59-47E4-BD9A-CD90ECDD0E43}" dt="2026-07-06T05:51:34.489" v="68" actId="1076"/>
+          <ac:spMkLst>
+            <pc:docMk/>
+            <pc:sldMk cId="1116214111" sldId="257"/>
+            <ac:spMk id="37" creationId="{44A3374D-198B-544E-16A6-985D5A2C441F}"/>
+          </ac:spMkLst>
+        </pc:spChg>
+      </pc:sldChg>
+    </pc:docChg>
+  </pc:docChgLst>
+</pc:chgInfo>
 </file>
 
 <file path=ppt/slideLayouts/slideLayout1.xml><?xml version="1.0" encoding="utf-8"?>
@@ -126,13 +320,7 @@
       </p:grpSpPr>
       <p:sp>
         <p:nvSpPr>
-          <p:cNvPr id="2" name="タイトル 1">
-            <a:extLst>
-              <a:ext uri="{FF2B5EF4-FFF2-40B4-BE49-F238E27FC236}">
-                <a16:creationId xmlns:a16="http://schemas.microsoft.com/office/drawing/2014/main" id="{CF39FD78-ED49-F76E-1D01-B0432F1768E9}"/>
-              </a:ext>
-            </a:extLst>
-          </p:cNvPr>
+          <p:cNvPr id="2" name="Title 1"/>
           <p:cNvSpPr>
             <a:spLocks noGrp="1"/>
           </p:cNvSpPr>
@@ -142,34 +330,46 @@
         </p:nvSpPr>
         <p:spPr>
           <a:xfrm>
-            <a:off x="1524000" y="1122363"/>
-            <a:ext cx="9144000" cy="2387600"/>
+            <a:off x="1751012" y="609601"/>
+            <a:ext cx="8676222" cy="3200400"/>
           </a:xfrm>
         </p:spPr>
         <p:txBody>
-          <a:bodyPr anchor="b"/>
+          <a:bodyPr anchor="b">
+            <a:normAutofit/>
+          </a:bodyPr>
           <a:lstStyle>
             <a:lvl1pPr algn="ctr">
-              <a:defRPr sz="6000"/>
+              <a:defRPr sz="4800">
+                <a:effectLst>
+                  <a:glow rad="38100">
+                    <a:schemeClr val="bg1">
+                      <a:lumMod val="65000"/>
+                      <a:lumOff val="35000"/>
+                      <a:alpha val="50000"/>
+                    </a:schemeClr>
+                  </a:glow>
+                  <a:outerShdw blurRad="28575" dist="31750" dir="13200000" algn="tl" rotWithShape="0">
+                    <a:srgbClr val="000000">
+                      <a:alpha val="25000"/>
+                    </a:srgbClr>
+                  </a:outerShdw>
+                </a:effectLst>
+              </a:defRPr>
             </a:lvl1pPr>
           </a:lstStyle>
           <a:p>
             <a:r>
-              <a:rPr kumimoji="1" lang="ja-JP" altLang="en-US"/>
+              <a:rPr lang="ja-JP" altLang="en-US"/>
               <a:t>マスター タイトルの書式設定</a:t>
             </a:r>
-          </a:p>
-        </p:txBody>
-      </p:sp>
-      <p:sp>
-        <p:nvSpPr>
-          <p:cNvPr id="3" name="字幕 2">
-            <a:extLst>
-              <a:ext uri="{FF2B5EF4-FFF2-40B4-BE49-F238E27FC236}">
-                <a16:creationId xmlns:a16="http://schemas.microsoft.com/office/drawing/2014/main" id="{4E71B782-1C3E-56B3-10B5-89648BC9A558}"/>
-              </a:ext>
-            </a:extLst>
-          </p:cNvPr>
+            <a:endParaRPr lang="en-US" dirty="0"/>
+          </a:p>
+        </p:txBody>
+      </p:sp>
+      <p:sp>
+        <p:nvSpPr>
+          <p:cNvPr id="3" name="Subtitle 2"/>
           <p:cNvSpPr>
             <a:spLocks noGrp="1"/>
           </p:cNvSpPr>
@@ -179,67 +379,127 @@
         </p:nvSpPr>
         <p:spPr>
           <a:xfrm>
-            <a:off x="1524000" y="3602038"/>
-            <a:ext cx="9144000" cy="1655762"/>
+            <a:off x="1751012" y="3886200"/>
+            <a:ext cx="8676222" cy="1905000"/>
           </a:xfrm>
         </p:spPr>
         <p:txBody>
-          <a:bodyPr/>
+          <a:bodyPr anchor="t">
+            <a:normAutofit/>
+          </a:bodyPr>
           <a:lstStyle>
             <a:lvl1pPr marL="0" indent="0" algn="ctr">
               <a:buNone/>
-              <a:defRPr sz="2400"/>
+              <a:defRPr sz="2100">
+                <a:gradFill flip="none" rotWithShape="1">
+                  <a:gsLst>
+                    <a:gs pos="0">
+                      <a:schemeClr val="tx1"/>
+                    </a:gs>
+                    <a:gs pos="100000">
+                      <a:schemeClr val="tx1">
+                        <a:lumMod val="75000"/>
+                      </a:schemeClr>
+                    </a:gs>
+                  </a:gsLst>
+                  <a:lin ang="5400000" scaled="0"/>
+                  <a:tileRect/>
+                </a:gradFill>
+              </a:defRPr>
             </a:lvl1pPr>
             <a:lvl2pPr marL="457200" indent="0" algn="ctr">
               <a:buNone/>
-              <a:defRPr sz="2000"/>
+              <a:defRPr>
+                <a:solidFill>
+                  <a:schemeClr val="tx1">
+                    <a:tint val="75000"/>
+                  </a:schemeClr>
+                </a:solidFill>
+              </a:defRPr>
             </a:lvl2pPr>
             <a:lvl3pPr marL="914400" indent="0" algn="ctr">
               <a:buNone/>
-              <a:defRPr sz="1800"/>
+              <a:defRPr>
+                <a:solidFill>
+                  <a:schemeClr val="tx1">
+                    <a:tint val="75000"/>
+                  </a:schemeClr>
+                </a:solidFill>
+              </a:defRPr>
             </a:lvl3pPr>
             <a:lvl4pPr marL="1371600" indent="0" algn="ctr">
               <a:buNone/>
-              <a:defRPr sz="1600"/>
+              <a:defRPr>
+                <a:solidFill>
+                  <a:schemeClr val="tx1">
+                    <a:tint val="75000"/>
+                  </a:schemeClr>
+                </a:solidFill>
+              </a:defRPr>
             </a:lvl4pPr>
             <a:lvl5pPr marL="1828800" indent="0" algn="ctr">
               <a:buNone/>
-              <a:defRPr sz="1600"/>
+              <a:defRPr>
+                <a:solidFill>
+                  <a:schemeClr val="tx1">
+                    <a:tint val="75000"/>
+                  </a:schemeClr>
+                </a:solidFill>
+              </a:defRPr>
             </a:lvl5pPr>
             <a:lvl6pPr marL="2286000" indent="0" algn="ctr">
               <a:buNone/>
-              <a:defRPr sz="1600"/>
+              <a:defRPr>
+                <a:solidFill>
+                  <a:schemeClr val="tx1">
+                    <a:tint val="75000"/>
+                  </a:schemeClr>
+                </a:solidFill>
+              </a:defRPr>
             </a:lvl6pPr>
             <a:lvl7pPr marL="2743200" indent="0" algn="ctr">
               <a:buNone/>
-              <a:defRPr sz="1600"/>
+              <a:defRPr>
+                <a:solidFill>
+                  <a:schemeClr val="tx1">
+                    <a:tint val="75000"/>
+                  </a:schemeClr>
+                </a:solidFill>
+              </a:defRPr>
             </a:lvl7pPr>
             <a:lvl8pPr marL="3200400" indent="0" algn="ctr">
               <a:buNone/>
-              <a:defRPr sz="1600"/>
+              <a:defRPr>
+                <a:solidFill>
+                  <a:schemeClr val="tx1">
+                    <a:tint val="75000"/>
+                  </a:schemeClr>
+                </a:solidFill>
+              </a:defRPr>
             </a:lvl8pPr>
             <a:lvl9pPr marL="3657600" indent="0" algn="ctr">
               <a:buNone/>
-              <a:defRPr sz="1600"/>
+              <a:defRPr>
+                <a:solidFill>
+                  <a:schemeClr val="tx1">
+                    <a:tint val="75000"/>
+                  </a:schemeClr>
+                </a:solidFill>
+              </a:defRPr>
             </a:lvl9pPr>
           </a:lstStyle>
           <a:p>
             <a:r>
-              <a:rPr kumimoji="1" lang="ja-JP" altLang="en-US"/>
+              <a:rPr lang="ja-JP" altLang="en-US"/>
               <a:t>マスター サブタイトルの書式設定</a:t>
             </a:r>
-          </a:p>
-        </p:txBody>
-      </p:sp>
-      <p:sp>
-        <p:nvSpPr>
-          <p:cNvPr id="4" name="日付プレースホルダー 3">
-            <a:extLst>
-              <a:ext uri="{FF2B5EF4-FFF2-40B4-BE49-F238E27FC236}">
-                <a16:creationId xmlns:a16="http://schemas.microsoft.com/office/drawing/2014/main" id="{A74FF245-A5F3-8CC8-939F-5FCB5C974F21}"/>
-              </a:ext>
-            </a:extLst>
-          </p:cNvPr>
+            <a:endParaRPr lang="en-US" dirty="0"/>
+          </a:p>
+        </p:txBody>
+      </p:sp>
+      <p:sp>
+        <p:nvSpPr>
+          <p:cNvPr id="4" name="Date Placeholder 3"/>
           <p:cNvSpPr>
             <a:spLocks noGrp="1"/>
           </p:cNvSpPr>
@@ -254,7 +514,7 @@
           <a:p>
             <a:fld id="{F7C697B7-400A-462C-9925-7DE4B9466D5A}" type="datetimeFigureOut">
               <a:rPr kumimoji="1" lang="ja-JP" altLang="en-US" smtClean="0"/>
-              <a:t>2026/7/1</a:t>
+              <a:t>2026/7/6</a:t>
             </a:fld>
             <a:endParaRPr kumimoji="1" lang="ja-JP" altLang="en-US"/>
           </a:p>
@@ -262,13 +522,7 @@
       </p:sp>
       <p:sp>
         <p:nvSpPr>
-          <p:cNvPr id="5" name="フッター プレースホルダー 4">
-            <a:extLst>
-              <a:ext uri="{FF2B5EF4-FFF2-40B4-BE49-F238E27FC236}">
-                <a16:creationId xmlns:a16="http://schemas.microsoft.com/office/drawing/2014/main" id="{D0559B3C-C6A5-2ABE-27EB-999D95CB013B}"/>
-              </a:ext>
-            </a:extLst>
-          </p:cNvPr>
+          <p:cNvPr id="5" name="Footer Placeholder 4"/>
           <p:cNvSpPr>
             <a:spLocks noGrp="1"/>
           </p:cNvSpPr>
@@ -287,13 +541,7 @@
       </p:sp>
       <p:sp>
         <p:nvSpPr>
-          <p:cNvPr id="6" name="スライド番号プレースホルダー 5">
-            <a:extLst>
-              <a:ext uri="{FF2B5EF4-FFF2-40B4-BE49-F238E27FC236}">
-                <a16:creationId xmlns:a16="http://schemas.microsoft.com/office/drawing/2014/main" id="{3D785EFB-FFBE-DFC8-9410-4DC8001FA077}"/>
-              </a:ext>
-            </a:extLst>
-          </p:cNvPr>
+          <p:cNvPr id="6" name="Slide Number Placeholder 5"/>
           <p:cNvSpPr>
             <a:spLocks noGrp="1"/>
           </p:cNvSpPr>
@@ -317,7 +565,7 @@
     </p:spTree>
     <p:extLst>
       <p:ext uri="{BB962C8B-B14F-4D97-AF65-F5344CB8AC3E}">
-        <p14:creationId xmlns:p14="http://schemas.microsoft.com/office/powerpoint/2010/main" val="2361492120"/>
+        <p14:creationId xmlns:p14="http://schemas.microsoft.com/office/powerpoint/2010/main" val="3183934291"/>
       </p:ext>
     </p:extLst>
   </p:cSld>
@@ -328,6 +576,2113 @@
 </file>
 
 <file path=ppt/slideLayouts/slideLayout10.xml><?xml version="1.0" encoding="utf-8"?>
+<p:sldLayout xmlns:a="http://schemas.openxmlformats.org/drawingml/2006/main" xmlns:r="http://schemas.openxmlformats.org/officeDocument/2006/relationships" xmlns:p="http://schemas.openxmlformats.org/presentationml/2006/main" preserve="1">
+  <p:cSld name="パノラマ写真 (キャプション付き)">
+    <p:spTree>
+      <p:nvGrpSpPr>
+        <p:cNvPr id="1" name=""/>
+        <p:cNvGrpSpPr/>
+        <p:nvPr/>
+      </p:nvGrpSpPr>
+      <p:grpSpPr>
+        <a:xfrm>
+          <a:off x="0" y="0"/>
+          <a:ext cx="0" cy="0"/>
+          <a:chOff x="0" y="0"/>
+          <a:chExt cx="0" cy="0"/>
+        </a:xfrm>
+      </p:grpSpPr>
+      <p:sp>
+        <p:nvSpPr>
+          <p:cNvPr id="2" name="Title 1"/>
+          <p:cNvSpPr>
+            <a:spLocks noGrp="1"/>
+          </p:cNvSpPr>
+          <p:nvPr>
+            <p:ph type="title"/>
+          </p:nvPr>
+        </p:nvSpPr>
+        <p:spPr>
+          <a:xfrm>
+            <a:off x="1141413" y="4732865"/>
+            <a:ext cx="9906000" cy="566738"/>
+          </a:xfrm>
+        </p:spPr>
+        <p:txBody>
+          <a:bodyPr anchor="b">
+            <a:normAutofit/>
+          </a:bodyPr>
+          <a:lstStyle>
+            <a:lvl1pPr algn="l">
+              <a:defRPr sz="2400" b="0"/>
+            </a:lvl1pPr>
+          </a:lstStyle>
+          <a:p>
+            <a:r>
+              <a:rPr lang="ja-JP" altLang="en-US"/>
+              <a:t>マスター タイトルの書式設定</a:t>
+            </a:r>
+            <a:endParaRPr lang="en-US" dirty="0"/>
+          </a:p>
+        </p:txBody>
+      </p:sp>
+      <p:sp>
+        <p:nvSpPr>
+          <p:cNvPr id="3" name="Picture Placeholder 2"/>
+          <p:cNvSpPr>
+            <a:spLocks noGrp="1" noChangeAspect="1"/>
+          </p:cNvSpPr>
+          <p:nvPr>
+            <p:ph type="pic" idx="1"/>
+          </p:nvPr>
+        </p:nvSpPr>
+        <p:spPr>
+          <a:xfrm>
+            <a:off x="1979612" y="932112"/>
+            <a:ext cx="8225944" cy="3164976"/>
+          </a:xfrm>
+          <a:prstGeom prst="roundRect">
+            <a:avLst>
+              <a:gd name="adj" fmla="val 4380"/>
+            </a:avLst>
+          </a:prstGeom>
+          <a:ln w="38100">
+            <a:gradFill flip="none" rotWithShape="1">
+              <a:gsLst>
+                <a:gs pos="0">
+                  <a:schemeClr val="bg2"/>
+                </a:gs>
+                <a:gs pos="100000">
+                  <a:schemeClr val="bg2">
+                    <a:lumMod val="75000"/>
+                  </a:schemeClr>
+                </a:gs>
+              </a:gsLst>
+              <a:lin ang="5400000" scaled="0"/>
+              <a:tileRect/>
+            </a:gradFill>
+          </a:ln>
+          <a:effectLst>
+            <a:innerShdw blurRad="57150" dist="38100" dir="14460000">
+              <a:srgbClr val="000000">
+                <a:alpha val="70000"/>
+              </a:srgbClr>
+            </a:innerShdw>
+          </a:effectLst>
+        </p:spPr>
+        <p:txBody>
+          <a:bodyPr anchor="t">
+            <a:normAutofit/>
+          </a:bodyPr>
+          <a:lstStyle>
+            <a:lvl1pPr marL="0" indent="0" algn="ctr">
+              <a:buNone/>
+              <a:defRPr sz="1600"/>
+            </a:lvl1pPr>
+            <a:lvl2pPr marL="457200" indent="0">
+              <a:buNone/>
+              <a:defRPr sz="1600"/>
+            </a:lvl2pPr>
+            <a:lvl3pPr marL="914400" indent="0">
+              <a:buNone/>
+              <a:defRPr sz="1600"/>
+            </a:lvl3pPr>
+            <a:lvl4pPr marL="1371600" indent="0">
+              <a:buNone/>
+              <a:defRPr sz="1600"/>
+            </a:lvl4pPr>
+            <a:lvl5pPr marL="1828800" indent="0">
+              <a:buNone/>
+              <a:defRPr sz="1600"/>
+            </a:lvl5pPr>
+            <a:lvl6pPr marL="2286000" indent="0">
+              <a:buNone/>
+              <a:defRPr sz="1600"/>
+            </a:lvl6pPr>
+            <a:lvl7pPr marL="2743200" indent="0">
+              <a:buNone/>
+              <a:defRPr sz="1600"/>
+            </a:lvl7pPr>
+            <a:lvl8pPr marL="3200400" indent="0">
+              <a:buNone/>
+              <a:defRPr sz="1600"/>
+            </a:lvl8pPr>
+            <a:lvl9pPr marL="3657600" indent="0">
+              <a:buNone/>
+              <a:defRPr sz="1600"/>
+            </a:lvl9pPr>
+          </a:lstStyle>
+          <a:p>
+            <a:r>
+              <a:rPr lang="ja-JP" altLang="en-US"/>
+              <a:t>アイコンをクリックして図を追加</a:t>
+            </a:r>
+            <a:endParaRPr lang="en-US" dirty="0"/>
+          </a:p>
+        </p:txBody>
+      </p:sp>
+      <p:sp>
+        <p:nvSpPr>
+          <p:cNvPr id="4" name="Text Placeholder 3"/>
+          <p:cNvSpPr>
+            <a:spLocks noGrp="1"/>
+          </p:cNvSpPr>
+          <p:nvPr>
+            <p:ph type="body" sz="half" idx="2"/>
+          </p:nvPr>
+        </p:nvSpPr>
+        <p:spPr>
+          <a:xfrm>
+            <a:off x="1141413" y="5299603"/>
+            <a:ext cx="9906000" cy="493712"/>
+          </a:xfrm>
+        </p:spPr>
+        <p:txBody>
+          <a:bodyPr>
+            <a:normAutofit/>
+          </a:bodyPr>
+          <a:lstStyle>
+            <a:lvl1pPr marL="0" indent="0">
+              <a:buNone/>
+              <a:defRPr sz="1400"/>
+            </a:lvl1pPr>
+            <a:lvl2pPr marL="457200" indent="0">
+              <a:buNone/>
+              <a:defRPr sz="1200"/>
+            </a:lvl2pPr>
+            <a:lvl3pPr marL="914400" indent="0">
+              <a:buNone/>
+              <a:defRPr sz="1000"/>
+            </a:lvl3pPr>
+            <a:lvl4pPr marL="1371600" indent="0">
+              <a:buNone/>
+              <a:defRPr sz="900"/>
+            </a:lvl4pPr>
+            <a:lvl5pPr marL="1828800" indent="0">
+              <a:buNone/>
+              <a:defRPr sz="900"/>
+            </a:lvl5pPr>
+            <a:lvl6pPr marL="2286000" indent="0">
+              <a:buNone/>
+              <a:defRPr sz="900"/>
+            </a:lvl6pPr>
+            <a:lvl7pPr marL="2743200" indent="0">
+              <a:buNone/>
+              <a:defRPr sz="900"/>
+            </a:lvl7pPr>
+            <a:lvl8pPr marL="3200400" indent="0">
+              <a:buNone/>
+              <a:defRPr sz="900"/>
+            </a:lvl8pPr>
+            <a:lvl9pPr marL="3657600" indent="0">
+              <a:buNone/>
+              <a:defRPr sz="900"/>
+            </a:lvl9pPr>
+          </a:lstStyle>
+          <a:p>
+            <a:pPr lvl="0"/>
+            <a:r>
+              <a:rPr lang="ja-JP" altLang="en-US"/>
+              <a:t>マスター テキストの書式設定</a:t>
+            </a:r>
+          </a:p>
+        </p:txBody>
+      </p:sp>
+      <p:sp>
+        <p:nvSpPr>
+          <p:cNvPr id="5" name="Date Placeholder 4"/>
+          <p:cNvSpPr>
+            <a:spLocks noGrp="1"/>
+          </p:cNvSpPr>
+          <p:nvPr>
+            <p:ph type="dt" sz="half" idx="10"/>
+          </p:nvPr>
+        </p:nvSpPr>
+        <p:spPr/>
+        <p:txBody>
+          <a:bodyPr/>
+          <a:lstStyle/>
+          <a:p>
+            <a:fld id="{F7C697B7-400A-462C-9925-7DE4B9466D5A}" type="datetimeFigureOut">
+              <a:rPr kumimoji="1" lang="ja-JP" altLang="en-US" smtClean="0"/>
+              <a:t>2026/7/6</a:t>
+            </a:fld>
+            <a:endParaRPr kumimoji="1" lang="ja-JP" altLang="en-US"/>
+          </a:p>
+        </p:txBody>
+      </p:sp>
+      <p:sp>
+        <p:nvSpPr>
+          <p:cNvPr id="6" name="Footer Placeholder 5"/>
+          <p:cNvSpPr>
+            <a:spLocks noGrp="1"/>
+          </p:cNvSpPr>
+          <p:nvPr>
+            <p:ph type="ftr" sz="quarter" idx="11"/>
+          </p:nvPr>
+        </p:nvSpPr>
+        <p:spPr/>
+        <p:txBody>
+          <a:bodyPr/>
+          <a:lstStyle/>
+          <a:p>
+            <a:endParaRPr kumimoji="1" lang="ja-JP" altLang="en-US"/>
+          </a:p>
+        </p:txBody>
+      </p:sp>
+      <p:sp>
+        <p:nvSpPr>
+          <p:cNvPr id="7" name="Slide Number Placeholder 6"/>
+          <p:cNvSpPr>
+            <a:spLocks noGrp="1"/>
+          </p:cNvSpPr>
+          <p:nvPr>
+            <p:ph type="sldNum" sz="quarter" idx="12"/>
+          </p:nvPr>
+        </p:nvSpPr>
+        <p:spPr/>
+        <p:txBody>
+          <a:bodyPr/>
+          <a:lstStyle/>
+          <a:p>
+            <a:fld id="{5E1B29A0-3D28-4701-9C89-0524393896F3}" type="slidenum">
+              <a:rPr kumimoji="1" lang="ja-JP" altLang="en-US" smtClean="0"/>
+              <a:t>‹#›</a:t>
+            </a:fld>
+            <a:endParaRPr kumimoji="1" lang="ja-JP" altLang="en-US"/>
+          </a:p>
+        </p:txBody>
+      </p:sp>
+    </p:spTree>
+    <p:extLst>
+      <p:ext uri="{BB962C8B-B14F-4D97-AF65-F5344CB8AC3E}">
+        <p14:creationId xmlns:p14="http://schemas.microsoft.com/office/powerpoint/2010/main" val="2018756056"/>
+      </p:ext>
+    </p:extLst>
+  </p:cSld>
+  <p:clrMapOvr>
+    <a:masterClrMapping/>
+  </p:clrMapOvr>
+</p:sldLayout>
+</file>
+
+<file path=ppt/slideLayouts/slideLayout11.xml><?xml version="1.0" encoding="utf-8"?>
+<p:sldLayout xmlns:a="http://schemas.openxmlformats.org/drawingml/2006/main" xmlns:r="http://schemas.openxmlformats.org/officeDocument/2006/relationships" xmlns:p="http://schemas.openxmlformats.org/presentationml/2006/main" preserve="1">
+  <p:cSld name="タイトルとキャプション">
+    <p:spTree>
+      <p:nvGrpSpPr>
+        <p:cNvPr id="1" name=""/>
+        <p:cNvGrpSpPr/>
+        <p:nvPr/>
+      </p:nvGrpSpPr>
+      <p:grpSpPr>
+        <a:xfrm>
+          <a:off x="0" y="0"/>
+          <a:ext cx="0" cy="0"/>
+          <a:chOff x="0" y="0"/>
+          <a:chExt cx="0" cy="0"/>
+        </a:xfrm>
+      </p:grpSpPr>
+      <p:sp>
+        <p:nvSpPr>
+          <p:cNvPr id="2" name="Title 1"/>
+          <p:cNvSpPr>
+            <a:spLocks noGrp="1"/>
+          </p:cNvSpPr>
+          <p:nvPr>
+            <p:ph type="title"/>
+          </p:nvPr>
+        </p:nvSpPr>
+        <p:spPr>
+          <a:xfrm>
+            <a:off x="1141412" y="609601"/>
+            <a:ext cx="9905999" cy="3124199"/>
+          </a:xfrm>
+        </p:spPr>
+        <p:txBody>
+          <a:bodyPr anchor="ctr">
+            <a:normAutofit/>
+          </a:bodyPr>
+          <a:lstStyle>
+            <a:lvl1pPr algn="l">
+              <a:defRPr sz="3200" b="0" cap="all"/>
+            </a:lvl1pPr>
+          </a:lstStyle>
+          <a:p>
+            <a:r>
+              <a:rPr lang="ja-JP" altLang="en-US"/>
+              <a:t>マスター タイトルの書式設定</a:t>
+            </a:r>
+            <a:endParaRPr lang="en-US" dirty="0"/>
+          </a:p>
+        </p:txBody>
+      </p:sp>
+      <p:sp>
+        <p:nvSpPr>
+          <p:cNvPr id="3" name="Text Placeholder 2"/>
+          <p:cNvSpPr>
+            <a:spLocks noGrp="1"/>
+          </p:cNvSpPr>
+          <p:nvPr>
+            <p:ph type="body" idx="1"/>
+          </p:nvPr>
+        </p:nvSpPr>
+        <p:spPr>
+          <a:xfrm>
+            <a:off x="1141411" y="4343400"/>
+            <a:ext cx="9906000" cy="1447800"/>
+          </a:xfrm>
+        </p:spPr>
+        <p:txBody>
+          <a:bodyPr anchor="ctr">
+            <a:normAutofit/>
+          </a:bodyPr>
+          <a:lstStyle>
+            <a:lvl1pPr marL="0" indent="0" algn="l">
+              <a:buNone/>
+              <a:defRPr sz="2000">
+                <a:gradFill flip="none" rotWithShape="1">
+                  <a:gsLst>
+                    <a:gs pos="0">
+                      <a:schemeClr val="tx1"/>
+                    </a:gs>
+                    <a:gs pos="100000">
+                      <a:schemeClr val="tx1">
+                        <a:lumMod val="75000"/>
+                      </a:schemeClr>
+                    </a:gs>
+                  </a:gsLst>
+                  <a:lin ang="5400000" scaled="0"/>
+                  <a:tileRect/>
+                </a:gradFill>
+              </a:defRPr>
+            </a:lvl1pPr>
+            <a:lvl2pPr marL="457200" indent="0">
+              <a:buNone/>
+              <a:defRPr sz="1800">
+                <a:solidFill>
+                  <a:schemeClr val="tx1">
+                    <a:tint val="75000"/>
+                  </a:schemeClr>
+                </a:solidFill>
+              </a:defRPr>
+            </a:lvl2pPr>
+            <a:lvl3pPr marL="914400" indent="0">
+              <a:buNone/>
+              <a:defRPr sz="1600">
+                <a:solidFill>
+                  <a:schemeClr val="tx1">
+                    <a:tint val="75000"/>
+                  </a:schemeClr>
+                </a:solidFill>
+              </a:defRPr>
+            </a:lvl3pPr>
+            <a:lvl4pPr marL="1371600" indent="0">
+              <a:buNone/>
+              <a:defRPr sz="1400">
+                <a:solidFill>
+                  <a:schemeClr val="tx1">
+                    <a:tint val="75000"/>
+                  </a:schemeClr>
+                </a:solidFill>
+              </a:defRPr>
+            </a:lvl4pPr>
+            <a:lvl5pPr marL="1828800" indent="0">
+              <a:buNone/>
+              <a:defRPr sz="1400">
+                <a:solidFill>
+                  <a:schemeClr val="tx1">
+                    <a:tint val="75000"/>
+                  </a:schemeClr>
+                </a:solidFill>
+              </a:defRPr>
+            </a:lvl5pPr>
+            <a:lvl6pPr marL="2286000" indent="0">
+              <a:buNone/>
+              <a:defRPr sz="1400">
+                <a:solidFill>
+                  <a:schemeClr val="tx1">
+                    <a:tint val="75000"/>
+                  </a:schemeClr>
+                </a:solidFill>
+              </a:defRPr>
+            </a:lvl6pPr>
+            <a:lvl7pPr marL="2743200" indent="0">
+              <a:buNone/>
+              <a:defRPr sz="1400">
+                <a:solidFill>
+                  <a:schemeClr val="tx1">
+                    <a:tint val="75000"/>
+                  </a:schemeClr>
+                </a:solidFill>
+              </a:defRPr>
+            </a:lvl7pPr>
+            <a:lvl8pPr marL="3200400" indent="0">
+              <a:buNone/>
+              <a:defRPr sz="1400">
+                <a:solidFill>
+                  <a:schemeClr val="tx1">
+                    <a:tint val="75000"/>
+                  </a:schemeClr>
+                </a:solidFill>
+              </a:defRPr>
+            </a:lvl8pPr>
+            <a:lvl9pPr marL="3657600" indent="0">
+              <a:buNone/>
+              <a:defRPr sz="1400">
+                <a:solidFill>
+                  <a:schemeClr val="tx1">
+                    <a:tint val="75000"/>
+                  </a:schemeClr>
+                </a:solidFill>
+              </a:defRPr>
+            </a:lvl9pPr>
+          </a:lstStyle>
+          <a:p>
+            <a:pPr lvl="0"/>
+            <a:r>
+              <a:rPr lang="ja-JP" altLang="en-US"/>
+              <a:t>マスター テキストの書式設定</a:t>
+            </a:r>
+          </a:p>
+        </p:txBody>
+      </p:sp>
+      <p:sp>
+        <p:nvSpPr>
+          <p:cNvPr id="4" name="Date Placeholder 3"/>
+          <p:cNvSpPr>
+            <a:spLocks noGrp="1"/>
+          </p:cNvSpPr>
+          <p:nvPr>
+            <p:ph type="dt" sz="half" idx="10"/>
+          </p:nvPr>
+        </p:nvSpPr>
+        <p:spPr/>
+        <p:txBody>
+          <a:bodyPr/>
+          <a:lstStyle/>
+          <a:p>
+            <a:fld id="{F7C697B7-400A-462C-9925-7DE4B9466D5A}" type="datetimeFigureOut">
+              <a:rPr kumimoji="1" lang="ja-JP" altLang="en-US" smtClean="0"/>
+              <a:t>2026/7/6</a:t>
+            </a:fld>
+            <a:endParaRPr kumimoji="1" lang="ja-JP" altLang="en-US"/>
+          </a:p>
+        </p:txBody>
+      </p:sp>
+      <p:sp>
+        <p:nvSpPr>
+          <p:cNvPr id="5" name="Footer Placeholder 4"/>
+          <p:cNvSpPr>
+            <a:spLocks noGrp="1"/>
+          </p:cNvSpPr>
+          <p:nvPr>
+            <p:ph type="ftr" sz="quarter" idx="11"/>
+          </p:nvPr>
+        </p:nvSpPr>
+        <p:spPr/>
+        <p:txBody>
+          <a:bodyPr/>
+          <a:lstStyle/>
+          <a:p>
+            <a:endParaRPr kumimoji="1" lang="ja-JP" altLang="en-US"/>
+          </a:p>
+        </p:txBody>
+      </p:sp>
+      <p:sp>
+        <p:nvSpPr>
+          <p:cNvPr id="6" name="Slide Number Placeholder 5"/>
+          <p:cNvSpPr>
+            <a:spLocks noGrp="1"/>
+          </p:cNvSpPr>
+          <p:nvPr>
+            <p:ph type="sldNum" sz="quarter" idx="12"/>
+          </p:nvPr>
+        </p:nvSpPr>
+        <p:spPr/>
+        <p:txBody>
+          <a:bodyPr/>
+          <a:lstStyle/>
+          <a:p>
+            <a:fld id="{5E1B29A0-3D28-4701-9C89-0524393896F3}" type="slidenum">
+              <a:rPr kumimoji="1" lang="ja-JP" altLang="en-US" smtClean="0"/>
+              <a:t>‹#›</a:t>
+            </a:fld>
+            <a:endParaRPr kumimoji="1" lang="ja-JP" altLang="en-US"/>
+          </a:p>
+        </p:txBody>
+      </p:sp>
+    </p:spTree>
+    <p:extLst>
+      <p:ext uri="{BB962C8B-B14F-4D97-AF65-F5344CB8AC3E}">
+        <p14:creationId xmlns:p14="http://schemas.microsoft.com/office/powerpoint/2010/main" val="2793469126"/>
+      </p:ext>
+    </p:extLst>
+  </p:cSld>
+  <p:clrMapOvr>
+    <a:masterClrMapping/>
+  </p:clrMapOvr>
+</p:sldLayout>
+</file>
+
+<file path=ppt/slideLayouts/slideLayout12.xml><?xml version="1.0" encoding="utf-8"?>
+<p:sldLayout xmlns:a="http://schemas.openxmlformats.org/drawingml/2006/main" xmlns:r="http://schemas.openxmlformats.org/officeDocument/2006/relationships" xmlns:p="http://schemas.openxmlformats.org/presentationml/2006/main" preserve="1">
+  <p:cSld name="引用 (キャプション付き)">
+    <p:spTree>
+      <p:nvGrpSpPr>
+        <p:cNvPr id="1" name=""/>
+        <p:cNvGrpSpPr/>
+        <p:nvPr/>
+      </p:nvGrpSpPr>
+      <p:grpSpPr>
+        <a:xfrm>
+          <a:off x="0" y="0"/>
+          <a:ext cx="0" cy="0"/>
+          <a:chOff x="0" y="0"/>
+          <a:chExt cx="0" cy="0"/>
+        </a:xfrm>
+      </p:grpSpPr>
+      <p:sp>
+        <p:nvSpPr>
+          <p:cNvPr id="14" name="TextBox 13"/>
+          <p:cNvSpPr txBox="1"/>
+          <p:nvPr/>
+        </p:nvSpPr>
+        <p:spPr>
+          <a:xfrm>
+            <a:off x="836612" y="786824"/>
+            <a:ext cx="609600" cy="584776"/>
+          </a:xfrm>
+          <a:prstGeom prst="rect">
+            <a:avLst/>
+          </a:prstGeom>
+        </p:spPr>
+        <p:txBody>
+          <a:bodyPr vert="horz" lIns="91440" tIns="45720" rIns="91440" bIns="45720" rtlCol="0" anchor="ctr">
+            <a:noAutofit/>
+          </a:bodyPr>
+          <a:lstStyle>
+            <a:lvl1pPr>
+              <a:spcBef>
+                <a:spcPct val="0"/>
+              </a:spcBef>
+              <a:buNone/>
+              <a:defRPr sz="3200" b="0" cap="all">
+                <a:ln w="3175" cmpd="sng">
+                  <a:noFill/>
+                </a:ln>
+                <a:effectLst>
+                  <a:glow rad="38100">
+                    <a:schemeClr val="bg1">
+                      <a:lumMod val="65000"/>
+                      <a:lumOff val="35000"/>
+                      <a:alpha val="40000"/>
+                    </a:schemeClr>
+                  </a:glow>
+                  <a:outerShdw blurRad="28575" dist="38100" dir="14040000" algn="tl" rotWithShape="0">
+                    <a:srgbClr val="000000">
+                      <a:alpha val="25000"/>
+                    </a:srgbClr>
+                  </a:outerShdw>
+                </a:effectLst>
+              </a:defRPr>
+            </a:lvl1pPr>
+            <a:lvl2pPr>
+              <a:defRPr>
+                <a:solidFill>
+                  <a:schemeClr val="tx2"/>
+                </a:solidFill>
+              </a:defRPr>
+            </a:lvl2pPr>
+            <a:lvl3pPr>
+              <a:defRPr>
+                <a:solidFill>
+                  <a:schemeClr val="tx2"/>
+                </a:solidFill>
+              </a:defRPr>
+            </a:lvl3pPr>
+            <a:lvl4pPr>
+              <a:defRPr>
+                <a:solidFill>
+                  <a:schemeClr val="tx2"/>
+                </a:solidFill>
+              </a:defRPr>
+            </a:lvl4pPr>
+            <a:lvl5pPr>
+              <a:defRPr>
+                <a:solidFill>
+                  <a:schemeClr val="tx2"/>
+                </a:solidFill>
+              </a:defRPr>
+            </a:lvl5pPr>
+            <a:lvl6pPr>
+              <a:defRPr>
+                <a:solidFill>
+                  <a:schemeClr val="tx2"/>
+                </a:solidFill>
+              </a:defRPr>
+            </a:lvl6pPr>
+            <a:lvl7pPr>
+              <a:defRPr>
+                <a:solidFill>
+                  <a:schemeClr val="tx2"/>
+                </a:solidFill>
+              </a:defRPr>
+            </a:lvl7pPr>
+            <a:lvl8pPr>
+              <a:defRPr>
+                <a:solidFill>
+                  <a:schemeClr val="tx2"/>
+                </a:solidFill>
+              </a:defRPr>
+            </a:lvl8pPr>
+            <a:lvl9pPr>
+              <a:defRPr>
+                <a:solidFill>
+                  <a:schemeClr val="tx2"/>
+                </a:solidFill>
+              </a:defRPr>
+            </a:lvl9pPr>
+          </a:lstStyle>
+          <a:p>
+            <a:pPr lvl="0"/>
+            <a:r>
+              <a:rPr lang="en-US" sz="8000" dirty="0">
+                <a:solidFill>
+                  <a:schemeClr val="accent1"/>
+                </a:solidFill>
+              </a:rPr>
+              <a:t>“</a:t>
+            </a:r>
+          </a:p>
+        </p:txBody>
+      </p:sp>
+      <p:sp>
+        <p:nvSpPr>
+          <p:cNvPr id="15" name="TextBox 14"/>
+          <p:cNvSpPr txBox="1"/>
+          <p:nvPr/>
+        </p:nvSpPr>
+        <p:spPr>
+          <a:xfrm>
+            <a:off x="10437812" y="2743200"/>
+            <a:ext cx="609600" cy="584776"/>
+          </a:xfrm>
+          <a:prstGeom prst="rect">
+            <a:avLst/>
+          </a:prstGeom>
+        </p:spPr>
+        <p:txBody>
+          <a:bodyPr vert="horz" lIns="91440" tIns="45720" rIns="91440" bIns="45720" rtlCol="0" anchor="ctr">
+            <a:noAutofit/>
+          </a:bodyPr>
+          <a:lstStyle>
+            <a:lvl1pPr>
+              <a:spcBef>
+                <a:spcPct val="0"/>
+              </a:spcBef>
+              <a:buNone/>
+              <a:defRPr sz="3200" b="0" cap="all">
+                <a:ln w="3175" cmpd="sng">
+                  <a:noFill/>
+                </a:ln>
+                <a:effectLst>
+                  <a:glow rad="38100">
+                    <a:schemeClr val="bg1">
+                      <a:lumMod val="65000"/>
+                      <a:lumOff val="35000"/>
+                      <a:alpha val="40000"/>
+                    </a:schemeClr>
+                  </a:glow>
+                  <a:outerShdw blurRad="28575" dist="38100" dir="14040000" algn="tl" rotWithShape="0">
+                    <a:srgbClr val="000000">
+                      <a:alpha val="25000"/>
+                    </a:srgbClr>
+                  </a:outerShdw>
+                </a:effectLst>
+              </a:defRPr>
+            </a:lvl1pPr>
+            <a:lvl2pPr>
+              <a:defRPr>
+                <a:solidFill>
+                  <a:schemeClr val="tx2"/>
+                </a:solidFill>
+              </a:defRPr>
+            </a:lvl2pPr>
+            <a:lvl3pPr>
+              <a:defRPr>
+                <a:solidFill>
+                  <a:schemeClr val="tx2"/>
+                </a:solidFill>
+              </a:defRPr>
+            </a:lvl3pPr>
+            <a:lvl4pPr>
+              <a:defRPr>
+                <a:solidFill>
+                  <a:schemeClr val="tx2"/>
+                </a:solidFill>
+              </a:defRPr>
+            </a:lvl4pPr>
+            <a:lvl5pPr>
+              <a:defRPr>
+                <a:solidFill>
+                  <a:schemeClr val="tx2"/>
+                </a:solidFill>
+              </a:defRPr>
+            </a:lvl5pPr>
+            <a:lvl6pPr>
+              <a:defRPr>
+                <a:solidFill>
+                  <a:schemeClr val="tx2"/>
+                </a:solidFill>
+              </a:defRPr>
+            </a:lvl6pPr>
+            <a:lvl7pPr>
+              <a:defRPr>
+                <a:solidFill>
+                  <a:schemeClr val="tx2"/>
+                </a:solidFill>
+              </a:defRPr>
+            </a:lvl7pPr>
+            <a:lvl8pPr>
+              <a:defRPr>
+                <a:solidFill>
+                  <a:schemeClr val="tx2"/>
+                </a:solidFill>
+              </a:defRPr>
+            </a:lvl8pPr>
+            <a:lvl9pPr>
+              <a:defRPr>
+                <a:solidFill>
+                  <a:schemeClr val="tx2"/>
+                </a:solidFill>
+              </a:defRPr>
+            </a:lvl9pPr>
+          </a:lstStyle>
+          <a:p>
+            <a:pPr lvl="0" algn="r"/>
+            <a:r>
+              <a:rPr lang="en-US" sz="8000" dirty="0">
+                <a:solidFill>
+                  <a:schemeClr val="accent1"/>
+                </a:solidFill>
+              </a:rPr>
+              <a:t>”</a:t>
+            </a:r>
+          </a:p>
+        </p:txBody>
+      </p:sp>
+      <p:sp>
+        <p:nvSpPr>
+          <p:cNvPr id="2" name="Title 1"/>
+          <p:cNvSpPr>
+            <a:spLocks noGrp="1"/>
+          </p:cNvSpPr>
+          <p:nvPr>
+            <p:ph type="title"/>
+          </p:nvPr>
+        </p:nvSpPr>
+        <p:spPr>
+          <a:xfrm>
+            <a:off x="1446213" y="609601"/>
+            <a:ext cx="9296398" cy="2743199"/>
+          </a:xfrm>
+        </p:spPr>
+        <p:txBody>
+          <a:bodyPr anchor="ctr">
+            <a:normAutofit/>
+          </a:bodyPr>
+          <a:lstStyle>
+            <a:lvl1pPr algn="l">
+              <a:defRPr sz="3200" b="0" cap="all">
+                <a:solidFill>
+                  <a:schemeClr val="tx1"/>
+                </a:solidFill>
+              </a:defRPr>
+            </a:lvl1pPr>
+          </a:lstStyle>
+          <a:p>
+            <a:r>
+              <a:rPr lang="ja-JP" altLang="en-US"/>
+              <a:t>マスター タイトルの書式設定</a:t>
+            </a:r>
+            <a:endParaRPr lang="en-US" dirty="0"/>
+          </a:p>
+        </p:txBody>
+      </p:sp>
+      <p:sp>
+        <p:nvSpPr>
+          <p:cNvPr id="10" name="Text Placeholder 9"/>
+          <p:cNvSpPr>
+            <a:spLocks noGrp="1"/>
+          </p:cNvSpPr>
+          <p:nvPr>
+            <p:ph type="body" sz="quarter" idx="13"/>
+          </p:nvPr>
+        </p:nvSpPr>
+        <p:spPr>
+          <a:xfrm>
+            <a:off x="1674812" y="3352800"/>
+            <a:ext cx="8839202" cy="381000"/>
+          </a:xfrm>
+        </p:spPr>
+        <p:txBody>
+          <a:bodyPr anchor="ctr"/>
+          <a:lstStyle>
+            <a:lvl1pPr marL="0" indent="0">
+              <a:buFontTx/>
+              <a:buNone/>
+              <a:defRPr/>
+            </a:lvl1pPr>
+            <a:lvl2pPr marL="457200" indent="0">
+              <a:buFontTx/>
+              <a:buNone/>
+              <a:defRPr/>
+            </a:lvl2pPr>
+            <a:lvl3pPr marL="914400" indent="0">
+              <a:buFontTx/>
+              <a:buNone/>
+              <a:defRPr/>
+            </a:lvl3pPr>
+            <a:lvl4pPr marL="1371600" indent="0">
+              <a:buFontTx/>
+              <a:buNone/>
+              <a:defRPr/>
+            </a:lvl4pPr>
+            <a:lvl5pPr marL="1828800" indent="0">
+              <a:buFontTx/>
+              <a:buNone/>
+              <a:defRPr/>
+            </a:lvl5pPr>
+          </a:lstStyle>
+          <a:p>
+            <a:pPr lvl="0"/>
+            <a:r>
+              <a:rPr lang="ja-JP" altLang="en-US"/>
+              <a:t>マスター テキストの書式設定</a:t>
+            </a:r>
+          </a:p>
+        </p:txBody>
+      </p:sp>
+      <p:sp>
+        <p:nvSpPr>
+          <p:cNvPr id="3" name="Text Placeholder 2"/>
+          <p:cNvSpPr>
+            <a:spLocks noGrp="1"/>
+          </p:cNvSpPr>
+          <p:nvPr>
+            <p:ph type="body" idx="1"/>
+          </p:nvPr>
+        </p:nvSpPr>
+        <p:spPr>
+          <a:xfrm>
+            <a:off x="1141411" y="4343400"/>
+            <a:ext cx="9906000" cy="1447800"/>
+          </a:xfrm>
+        </p:spPr>
+        <p:txBody>
+          <a:bodyPr vert="horz" lIns="91440" tIns="45720" rIns="91440" bIns="45720" rtlCol="0" anchor="ctr">
+            <a:normAutofit/>
+          </a:bodyPr>
+          <a:lstStyle>
+            <a:lvl1pPr>
+              <a:buNone/>
+              <a:defRPr lang="en-US" sz="2000">
+                <a:gradFill flip="none" rotWithShape="1">
+                  <a:gsLst>
+                    <a:gs pos="0">
+                      <a:schemeClr val="tx1"/>
+                    </a:gs>
+                    <a:gs pos="100000">
+                      <a:schemeClr val="tx1">
+                        <a:lumMod val="75000"/>
+                      </a:schemeClr>
+                    </a:gs>
+                  </a:gsLst>
+                  <a:lin ang="5400000" scaled="0"/>
+                  <a:tileRect/>
+                </a:gradFill>
+              </a:defRPr>
+            </a:lvl1pPr>
+          </a:lstStyle>
+          <a:p>
+            <a:pPr marL="0" lvl="0" indent="0">
+              <a:buNone/>
+            </a:pPr>
+            <a:r>
+              <a:rPr lang="ja-JP" altLang="en-US"/>
+              <a:t>マスター テキストの書式設定</a:t>
+            </a:r>
+          </a:p>
+        </p:txBody>
+      </p:sp>
+      <p:sp>
+        <p:nvSpPr>
+          <p:cNvPr id="4" name="Date Placeholder 3"/>
+          <p:cNvSpPr>
+            <a:spLocks noGrp="1"/>
+          </p:cNvSpPr>
+          <p:nvPr>
+            <p:ph type="dt" sz="half" idx="10"/>
+          </p:nvPr>
+        </p:nvSpPr>
+        <p:spPr/>
+        <p:txBody>
+          <a:bodyPr/>
+          <a:lstStyle/>
+          <a:p>
+            <a:fld id="{F7C697B7-400A-462C-9925-7DE4B9466D5A}" type="datetimeFigureOut">
+              <a:rPr kumimoji="1" lang="ja-JP" altLang="en-US" smtClean="0"/>
+              <a:t>2026/7/6</a:t>
+            </a:fld>
+            <a:endParaRPr kumimoji="1" lang="ja-JP" altLang="en-US"/>
+          </a:p>
+        </p:txBody>
+      </p:sp>
+      <p:sp>
+        <p:nvSpPr>
+          <p:cNvPr id="5" name="Footer Placeholder 4"/>
+          <p:cNvSpPr>
+            <a:spLocks noGrp="1"/>
+          </p:cNvSpPr>
+          <p:nvPr>
+            <p:ph type="ftr" sz="quarter" idx="11"/>
+          </p:nvPr>
+        </p:nvSpPr>
+        <p:spPr/>
+        <p:txBody>
+          <a:bodyPr/>
+          <a:lstStyle/>
+          <a:p>
+            <a:endParaRPr kumimoji="1" lang="ja-JP" altLang="en-US"/>
+          </a:p>
+        </p:txBody>
+      </p:sp>
+      <p:sp>
+        <p:nvSpPr>
+          <p:cNvPr id="6" name="Slide Number Placeholder 5"/>
+          <p:cNvSpPr>
+            <a:spLocks noGrp="1"/>
+          </p:cNvSpPr>
+          <p:nvPr>
+            <p:ph type="sldNum" sz="quarter" idx="12"/>
+          </p:nvPr>
+        </p:nvSpPr>
+        <p:spPr/>
+        <p:txBody>
+          <a:bodyPr/>
+          <a:lstStyle/>
+          <a:p>
+            <a:fld id="{5E1B29A0-3D28-4701-9C89-0524393896F3}" type="slidenum">
+              <a:rPr kumimoji="1" lang="ja-JP" altLang="en-US" smtClean="0"/>
+              <a:t>‹#›</a:t>
+            </a:fld>
+            <a:endParaRPr kumimoji="1" lang="ja-JP" altLang="en-US"/>
+          </a:p>
+        </p:txBody>
+      </p:sp>
+    </p:spTree>
+    <p:extLst>
+      <p:ext uri="{BB962C8B-B14F-4D97-AF65-F5344CB8AC3E}">
+        <p14:creationId xmlns:p14="http://schemas.microsoft.com/office/powerpoint/2010/main" val="4257227367"/>
+      </p:ext>
+    </p:extLst>
+  </p:cSld>
+  <p:clrMapOvr>
+    <a:masterClrMapping/>
+  </p:clrMapOvr>
+</p:sldLayout>
+</file>
+
+<file path=ppt/slideLayouts/slideLayout13.xml><?xml version="1.0" encoding="utf-8"?>
+<p:sldLayout xmlns:a="http://schemas.openxmlformats.org/drawingml/2006/main" xmlns:r="http://schemas.openxmlformats.org/officeDocument/2006/relationships" xmlns:p="http://schemas.openxmlformats.org/presentationml/2006/main" preserve="1">
+  <p:cSld name="名札">
+    <p:spTree>
+      <p:nvGrpSpPr>
+        <p:cNvPr id="1" name=""/>
+        <p:cNvGrpSpPr/>
+        <p:nvPr/>
+      </p:nvGrpSpPr>
+      <p:grpSpPr>
+        <a:xfrm>
+          <a:off x="0" y="0"/>
+          <a:ext cx="0" cy="0"/>
+          <a:chOff x="0" y="0"/>
+          <a:chExt cx="0" cy="0"/>
+        </a:xfrm>
+      </p:grpSpPr>
+      <p:sp>
+        <p:nvSpPr>
+          <p:cNvPr id="2" name="Title 1"/>
+          <p:cNvSpPr>
+            <a:spLocks noGrp="1"/>
+          </p:cNvSpPr>
+          <p:nvPr>
+            <p:ph type="title"/>
+          </p:nvPr>
+        </p:nvSpPr>
+        <p:spPr>
+          <a:xfrm>
+            <a:off x="1141412" y="3308581"/>
+            <a:ext cx="9906000" cy="1468800"/>
+          </a:xfrm>
+        </p:spPr>
+        <p:txBody>
+          <a:bodyPr anchor="b">
+            <a:normAutofit/>
+          </a:bodyPr>
+          <a:lstStyle>
+            <a:lvl1pPr algn="l">
+              <a:defRPr sz="3200" b="0" cap="all"/>
+            </a:lvl1pPr>
+          </a:lstStyle>
+          <a:p>
+            <a:r>
+              <a:rPr lang="ja-JP" altLang="en-US"/>
+              <a:t>マスター タイトルの書式設定</a:t>
+            </a:r>
+            <a:endParaRPr lang="en-US" dirty="0"/>
+          </a:p>
+        </p:txBody>
+      </p:sp>
+      <p:sp>
+        <p:nvSpPr>
+          <p:cNvPr id="3" name="Text Placeholder 2"/>
+          <p:cNvSpPr>
+            <a:spLocks noGrp="1"/>
+          </p:cNvSpPr>
+          <p:nvPr>
+            <p:ph type="body" idx="1"/>
+          </p:nvPr>
+        </p:nvSpPr>
+        <p:spPr>
+          <a:xfrm>
+            <a:off x="1141410" y="4777381"/>
+            <a:ext cx="9906001" cy="860400"/>
+          </a:xfrm>
+        </p:spPr>
+        <p:txBody>
+          <a:bodyPr vert="horz" lIns="91440" tIns="45720" rIns="91440" bIns="45720" rtlCol="0" anchor="t">
+            <a:normAutofit/>
+          </a:bodyPr>
+          <a:lstStyle>
+            <a:lvl1pPr>
+              <a:defRPr lang="en-US" sz="2000">
+                <a:gradFill flip="none" rotWithShape="1">
+                  <a:gsLst>
+                    <a:gs pos="0">
+                      <a:schemeClr val="tx1"/>
+                    </a:gs>
+                    <a:gs pos="100000">
+                      <a:schemeClr val="tx1">
+                        <a:lumMod val="75000"/>
+                      </a:schemeClr>
+                    </a:gs>
+                  </a:gsLst>
+                  <a:lin ang="5400000" scaled="0"/>
+                  <a:tileRect/>
+                </a:gradFill>
+              </a:defRPr>
+            </a:lvl1pPr>
+          </a:lstStyle>
+          <a:p>
+            <a:pPr marL="0" lvl="0" indent="0">
+              <a:buNone/>
+            </a:pPr>
+            <a:r>
+              <a:rPr lang="ja-JP" altLang="en-US"/>
+              <a:t>マスター テキストの書式設定</a:t>
+            </a:r>
+          </a:p>
+        </p:txBody>
+      </p:sp>
+      <p:sp>
+        <p:nvSpPr>
+          <p:cNvPr id="4" name="Date Placeholder 3"/>
+          <p:cNvSpPr>
+            <a:spLocks noGrp="1"/>
+          </p:cNvSpPr>
+          <p:nvPr>
+            <p:ph type="dt" sz="half" idx="10"/>
+          </p:nvPr>
+        </p:nvSpPr>
+        <p:spPr/>
+        <p:txBody>
+          <a:bodyPr/>
+          <a:lstStyle/>
+          <a:p>
+            <a:fld id="{F7C697B7-400A-462C-9925-7DE4B9466D5A}" type="datetimeFigureOut">
+              <a:rPr kumimoji="1" lang="ja-JP" altLang="en-US" smtClean="0"/>
+              <a:t>2026/7/6</a:t>
+            </a:fld>
+            <a:endParaRPr kumimoji="1" lang="ja-JP" altLang="en-US"/>
+          </a:p>
+        </p:txBody>
+      </p:sp>
+      <p:sp>
+        <p:nvSpPr>
+          <p:cNvPr id="5" name="Footer Placeholder 4"/>
+          <p:cNvSpPr>
+            <a:spLocks noGrp="1"/>
+          </p:cNvSpPr>
+          <p:nvPr>
+            <p:ph type="ftr" sz="quarter" idx="11"/>
+          </p:nvPr>
+        </p:nvSpPr>
+        <p:spPr/>
+        <p:txBody>
+          <a:bodyPr/>
+          <a:lstStyle/>
+          <a:p>
+            <a:endParaRPr kumimoji="1" lang="ja-JP" altLang="en-US"/>
+          </a:p>
+        </p:txBody>
+      </p:sp>
+      <p:sp>
+        <p:nvSpPr>
+          <p:cNvPr id="6" name="Slide Number Placeholder 5"/>
+          <p:cNvSpPr>
+            <a:spLocks noGrp="1"/>
+          </p:cNvSpPr>
+          <p:nvPr>
+            <p:ph type="sldNum" sz="quarter" idx="12"/>
+          </p:nvPr>
+        </p:nvSpPr>
+        <p:spPr/>
+        <p:txBody>
+          <a:bodyPr/>
+          <a:lstStyle/>
+          <a:p>
+            <a:fld id="{5E1B29A0-3D28-4701-9C89-0524393896F3}" type="slidenum">
+              <a:rPr kumimoji="1" lang="ja-JP" altLang="en-US" smtClean="0"/>
+              <a:t>‹#›</a:t>
+            </a:fld>
+            <a:endParaRPr kumimoji="1" lang="ja-JP" altLang="en-US"/>
+          </a:p>
+        </p:txBody>
+      </p:sp>
+    </p:spTree>
+    <p:extLst>
+      <p:ext uri="{BB962C8B-B14F-4D97-AF65-F5344CB8AC3E}">
+        <p14:creationId xmlns:p14="http://schemas.microsoft.com/office/powerpoint/2010/main" val="3742177210"/>
+      </p:ext>
+    </p:extLst>
+  </p:cSld>
+  <p:clrMapOvr>
+    <a:masterClrMapping/>
+  </p:clrMapOvr>
+</p:sldLayout>
+</file>
+
+<file path=ppt/slideLayouts/slideLayout14.xml><?xml version="1.0" encoding="utf-8"?>
+<p:sldLayout xmlns:a="http://schemas.openxmlformats.org/drawingml/2006/main" xmlns:r="http://schemas.openxmlformats.org/officeDocument/2006/relationships" xmlns:p="http://schemas.openxmlformats.org/presentationml/2006/main" preserve="1">
+  <p:cSld name="引用付きの名札">
+    <p:spTree>
+      <p:nvGrpSpPr>
+        <p:cNvPr id="1" name=""/>
+        <p:cNvGrpSpPr/>
+        <p:nvPr/>
+      </p:nvGrpSpPr>
+      <p:grpSpPr>
+        <a:xfrm>
+          <a:off x="0" y="0"/>
+          <a:ext cx="0" cy="0"/>
+          <a:chOff x="0" y="0"/>
+          <a:chExt cx="0" cy="0"/>
+        </a:xfrm>
+      </p:grpSpPr>
+      <p:sp>
+        <p:nvSpPr>
+          <p:cNvPr id="14" name="TextBox 13"/>
+          <p:cNvSpPr txBox="1"/>
+          <p:nvPr/>
+        </p:nvSpPr>
+        <p:spPr>
+          <a:xfrm>
+            <a:off x="836612" y="786824"/>
+            <a:ext cx="609600" cy="584776"/>
+          </a:xfrm>
+          <a:prstGeom prst="rect">
+            <a:avLst/>
+          </a:prstGeom>
+        </p:spPr>
+        <p:txBody>
+          <a:bodyPr vert="horz" lIns="91440" tIns="45720" rIns="91440" bIns="45720" rtlCol="0" anchor="ctr">
+            <a:noAutofit/>
+          </a:bodyPr>
+          <a:lstStyle>
+            <a:lvl1pPr>
+              <a:spcBef>
+                <a:spcPct val="0"/>
+              </a:spcBef>
+              <a:buNone/>
+              <a:defRPr sz="3200" b="0" cap="all">
+                <a:ln w="3175" cmpd="sng">
+                  <a:noFill/>
+                </a:ln>
+                <a:effectLst>
+                  <a:glow rad="38100">
+                    <a:schemeClr val="bg1">
+                      <a:lumMod val="65000"/>
+                      <a:lumOff val="35000"/>
+                      <a:alpha val="40000"/>
+                    </a:schemeClr>
+                  </a:glow>
+                  <a:outerShdw blurRad="28575" dist="38100" dir="14040000" algn="tl" rotWithShape="0">
+                    <a:srgbClr val="000000">
+                      <a:alpha val="25000"/>
+                    </a:srgbClr>
+                  </a:outerShdw>
+                </a:effectLst>
+              </a:defRPr>
+            </a:lvl1pPr>
+            <a:lvl2pPr>
+              <a:defRPr>
+                <a:solidFill>
+                  <a:schemeClr val="tx2"/>
+                </a:solidFill>
+              </a:defRPr>
+            </a:lvl2pPr>
+            <a:lvl3pPr>
+              <a:defRPr>
+                <a:solidFill>
+                  <a:schemeClr val="tx2"/>
+                </a:solidFill>
+              </a:defRPr>
+            </a:lvl3pPr>
+            <a:lvl4pPr>
+              <a:defRPr>
+                <a:solidFill>
+                  <a:schemeClr val="tx2"/>
+                </a:solidFill>
+              </a:defRPr>
+            </a:lvl4pPr>
+            <a:lvl5pPr>
+              <a:defRPr>
+                <a:solidFill>
+                  <a:schemeClr val="tx2"/>
+                </a:solidFill>
+              </a:defRPr>
+            </a:lvl5pPr>
+            <a:lvl6pPr>
+              <a:defRPr>
+                <a:solidFill>
+                  <a:schemeClr val="tx2"/>
+                </a:solidFill>
+              </a:defRPr>
+            </a:lvl6pPr>
+            <a:lvl7pPr>
+              <a:defRPr>
+                <a:solidFill>
+                  <a:schemeClr val="tx2"/>
+                </a:solidFill>
+              </a:defRPr>
+            </a:lvl7pPr>
+            <a:lvl8pPr>
+              <a:defRPr>
+                <a:solidFill>
+                  <a:schemeClr val="tx2"/>
+                </a:solidFill>
+              </a:defRPr>
+            </a:lvl8pPr>
+            <a:lvl9pPr>
+              <a:defRPr>
+                <a:solidFill>
+                  <a:schemeClr val="tx2"/>
+                </a:solidFill>
+              </a:defRPr>
+            </a:lvl9pPr>
+          </a:lstStyle>
+          <a:p>
+            <a:pPr lvl="0"/>
+            <a:r>
+              <a:rPr lang="en-US" sz="8000" dirty="0">
+                <a:solidFill>
+                  <a:schemeClr val="accent1"/>
+                </a:solidFill>
+              </a:rPr>
+              <a:t>“</a:t>
+            </a:r>
+          </a:p>
+        </p:txBody>
+      </p:sp>
+      <p:sp>
+        <p:nvSpPr>
+          <p:cNvPr id="15" name="TextBox 14"/>
+          <p:cNvSpPr txBox="1"/>
+          <p:nvPr/>
+        </p:nvSpPr>
+        <p:spPr>
+          <a:xfrm>
+            <a:off x="10437812" y="2743200"/>
+            <a:ext cx="609600" cy="584776"/>
+          </a:xfrm>
+          <a:prstGeom prst="rect">
+            <a:avLst/>
+          </a:prstGeom>
+        </p:spPr>
+        <p:txBody>
+          <a:bodyPr vert="horz" lIns="91440" tIns="45720" rIns="91440" bIns="45720" rtlCol="0" anchor="ctr">
+            <a:noAutofit/>
+          </a:bodyPr>
+          <a:lstStyle>
+            <a:lvl1pPr>
+              <a:spcBef>
+                <a:spcPct val="0"/>
+              </a:spcBef>
+              <a:buNone/>
+              <a:defRPr sz="3200" b="0" cap="all">
+                <a:ln w="3175" cmpd="sng">
+                  <a:noFill/>
+                </a:ln>
+                <a:effectLst>
+                  <a:glow rad="38100">
+                    <a:schemeClr val="bg1">
+                      <a:lumMod val="65000"/>
+                      <a:lumOff val="35000"/>
+                      <a:alpha val="40000"/>
+                    </a:schemeClr>
+                  </a:glow>
+                  <a:outerShdw blurRad="28575" dist="38100" dir="14040000" algn="tl" rotWithShape="0">
+                    <a:srgbClr val="000000">
+                      <a:alpha val="25000"/>
+                    </a:srgbClr>
+                  </a:outerShdw>
+                </a:effectLst>
+              </a:defRPr>
+            </a:lvl1pPr>
+            <a:lvl2pPr>
+              <a:defRPr>
+                <a:solidFill>
+                  <a:schemeClr val="tx2"/>
+                </a:solidFill>
+              </a:defRPr>
+            </a:lvl2pPr>
+            <a:lvl3pPr>
+              <a:defRPr>
+                <a:solidFill>
+                  <a:schemeClr val="tx2"/>
+                </a:solidFill>
+              </a:defRPr>
+            </a:lvl3pPr>
+            <a:lvl4pPr>
+              <a:defRPr>
+                <a:solidFill>
+                  <a:schemeClr val="tx2"/>
+                </a:solidFill>
+              </a:defRPr>
+            </a:lvl4pPr>
+            <a:lvl5pPr>
+              <a:defRPr>
+                <a:solidFill>
+                  <a:schemeClr val="tx2"/>
+                </a:solidFill>
+              </a:defRPr>
+            </a:lvl5pPr>
+            <a:lvl6pPr>
+              <a:defRPr>
+                <a:solidFill>
+                  <a:schemeClr val="tx2"/>
+                </a:solidFill>
+              </a:defRPr>
+            </a:lvl6pPr>
+            <a:lvl7pPr>
+              <a:defRPr>
+                <a:solidFill>
+                  <a:schemeClr val="tx2"/>
+                </a:solidFill>
+              </a:defRPr>
+            </a:lvl7pPr>
+            <a:lvl8pPr>
+              <a:defRPr>
+                <a:solidFill>
+                  <a:schemeClr val="tx2"/>
+                </a:solidFill>
+              </a:defRPr>
+            </a:lvl8pPr>
+            <a:lvl9pPr>
+              <a:defRPr>
+                <a:solidFill>
+                  <a:schemeClr val="tx2"/>
+                </a:solidFill>
+              </a:defRPr>
+            </a:lvl9pPr>
+          </a:lstStyle>
+          <a:p>
+            <a:pPr lvl="0" algn="r"/>
+            <a:r>
+              <a:rPr lang="en-US" sz="8000" dirty="0">
+                <a:solidFill>
+                  <a:schemeClr val="accent1"/>
+                </a:solidFill>
+              </a:rPr>
+              <a:t>”</a:t>
+            </a:r>
+          </a:p>
+        </p:txBody>
+      </p:sp>
+      <p:sp>
+        <p:nvSpPr>
+          <p:cNvPr id="2" name="Title 1"/>
+          <p:cNvSpPr>
+            <a:spLocks noGrp="1"/>
+          </p:cNvSpPr>
+          <p:nvPr>
+            <p:ph type="title"/>
+          </p:nvPr>
+        </p:nvSpPr>
+        <p:spPr>
+          <a:xfrm>
+            <a:off x="1446213" y="609601"/>
+            <a:ext cx="9296398" cy="2743199"/>
+          </a:xfrm>
+        </p:spPr>
+        <p:txBody>
+          <a:bodyPr anchor="ctr">
+            <a:normAutofit/>
+          </a:bodyPr>
+          <a:lstStyle>
+            <a:lvl1pPr algn="l">
+              <a:defRPr sz="3200" b="0" cap="all">
+                <a:gradFill flip="none" rotWithShape="1">
+                  <a:gsLst>
+                    <a:gs pos="0">
+                      <a:schemeClr val="tx1"/>
+                    </a:gs>
+                    <a:gs pos="100000">
+                      <a:schemeClr val="tx1">
+                        <a:lumMod val="75000"/>
+                      </a:schemeClr>
+                    </a:gs>
+                  </a:gsLst>
+                  <a:lin ang="5400000" scaled="0"/>
+                  <a:tileRect/>
+                </a:gradFill>
+              </a:defRPr>
+            </a:lvl1pPr>
+          </a:lstStyle>
+          <a:p>
+            <a:r>
+              <a:rPr lang="ja-JP" altLang="en-US"/>
+              <a:t>マスター タイトルの書式設定</a:t>
+            </a:r>
+            <a:endParaRPr lang="en-US" dirty="0"/>
+          </a:p>
+        </p:txBody>
+      </p:sp>
+      <p:sp>
+        <p:nvSpPr>
+          <p:cNvPr id="10" name="Text Placeholder 9"/>
+          <p:cNvSpPr>
+            <a:spLocks noGrp="1"/>
+          </p:cNvSpPr>
+          <p:nvPr>
+            <p:ph type="body" sz="quarter" idx="13"/>
+          </p:nvPr>
+        </p:nvSpPr>
+        <p:spPr>
+          <a:xfrm>
+            <a:off x="1141412" y="3886200"/>
+            <a:ext cx="9906000" cy="889000"/>
+          </a:xfrm>
+        </p:spPr>
+        <p:txBody>
+          <a:bodyPr vert="horz" lIns="91440" tIns="45720" rIns="91440" bIns="45720" rtlCol="0" anchor="b">
+            <a:normAutofit/>
+          </a:bodyPr>
+          <a:lstStyle>
+            <a:lvl1pPr>
+              <a:buNone/>
+              <a:defRPr lang="en-US" sz="2400" b="0" cap="all" dirty="0">
+                <a:ln w="3175" cmpd="sng">
+                  <a:noFill/>
+                </a:ln>
+                <a:gradFill flip="none" rotWithShape="1">
+                  <a:gsLst>
+                    <a:gs pos="0">
+                      <a:schemeClr val="tx1"/>
+                    </a:gs>
+                    <a:gs pos="100000">
+                      <a:schemeClr val="tx1">
+                        <a:lumMod val="75000"/>
+                      </a:schemeClr>
+                    </a:gs>
+                  </a:gsLst>
+                  <a:lin ang="5400000" scaled="0"/>
+                  <a:tileRect/>
+                </a:gradFill>
+                <a:effectLst>
+                  <a:glow rad="38100">
+                    <a:schemeClr val="bg1">
+                      <a:lumMod val="65000"/>
+                      <a:lumOff val="35000"/>
+                      <a:alpha val="40000"/>
+                    </a:schemeClr>
+                  </a:glow>
+                  <a:outerShdw blurRad="28575" dist="38100" dir="14040000" algn="tl" rotWithShape="0">
+                    <a:srgbClr val="000000">
+                      <a:alpha val="25000"/>
+                    </a:srgbClr>
+                  </a:outerShdw>
+                </a:effectLst>
+              </a:defRPr>
+            </a:lvl1pPr>
+          </a:lstStyle>
+          <a:p>
+            <a:pPr marL="0" lvl="0">
+              <a:spcBef>
+                <a:spcPct val="0"/>
+              </a:spcBef>
+              <a:buNone/>
+            </a:pPr>
+            <a:r>
+              <a:rPr lang="ja-JP" altLang="en-US"/>
+              <a:t>マスター テキストの書式設定</a:t>
+            </a:r>
+          </a:p>
+        </p:txBody>
+      </p:sp>
+      <p:sp>
+        <p:nvSpPr>
+          <p:cNvPr id="3" name="Text Placeholder 2"/>
+          <p:cNvSpPr>
+            <a:spLocks noGrp="1"/>
+          </p:cNvSpPr>
+          <p:nvPr>
+            <p:ph type="body" idx="1"/>
+          </p:nvPr>
+        </p:nvSpPr>
+        <p:spPr>
+          <a:xfrm>
+            <a:off x="1141411" y="4775200"/>
+            <a:ext cx="9906000" cy="1016000"/>
+          </a:xfrm>
+        </p:spPr>
+        <p:txBody>
+          <a:bodyPr anchor="t">
+            <a:normAutofit/>
+          </a:bodyPr>
+          <a:lstStyle>
+            <a:lvl1pPr marL="0" indent="0" algn="l">
+              <a:buNone/>
+              <a:defRPr sz="1800">
+                <a:gradFill flip="none" rotWithShape="1">
+                  <a:gsLst>
+                    <a:gs pos="0">
+                      <a:schemeClr val="tx1"/>
+                    </a:gs>
+                    <a:gs pos="100000">
+                      <a:schemeClr val="tx1">
+                        <a:lumMod val="75000"/>
+                      </a:schemeClr>
+                    </a:gs>
+                  </a:gsLst>
+                  <a:lin ang="5400000" scaled="0"/>
+                  <a:tileRect/>
+                </a:gradFill>
+              </a:defRPr>
+            </a:lvl1pPr>
+            <a:lvl2pPr marL="457200" indent="0">
+              <a:buNone/>
+              <a:defRPr sz="1800">
+                <a:solidFill>
+                  <a:schemeClr val="tx1">
+                    <a:tint val="75000"/>
+                  </a:schemeClr>
+                </a:solidFill>
+              </a:defRPr>
+            </a:lvl2pPr>
+            <a:lvl3pPr marL="914400" indent="0">
+              <a:buNone/>
+              <a:defRPr sz="1600">
+                <a:solidFill>
+                  <a:schemeClr val="tx1">
+                    <a:tint val="75000"/>
+                  </a:schemeClr>
+                </a:solidFill>
+              </a:defRPr>
+            </a:lvl3pPr>
+            <a:lvl4pPr marL="1371600" indent="0">
+              <a:buNone/>
+              <a:defRPr sz="1400">
+                <a:solidFill>
+                  <a:schemeClr val="tx1">
+                    <a:tint val="75000"/>
+                  </a:schemeClr>
+                </a:solidFill>
+              </a:defRPr>
+            </a:lvl4pPr>
+            <a:lvl5pPr marL="1828800" indent="0">
+              <a:buNone/>
+              <a:defRPr sz="1400">
+                <a:solidFill>
+                  <a:schemeClr val="tx1">
+                    <a:tint val="75000"/>
+                  </a:schemeClr>
+                </a:solidFill>
+              </a:defRPr>
+            </a:lvl5pPr>
+            <a:lvl6pPr marL="2286000" indent="0">
+              <a:buNone/>
+              <a:defRPr sz="1400">
+                <a:solidFill>
+                  <a:schemeClr val="tx1">
+                    <a:tint val="75000"/>
+                  </a:schemeClr>
+                </a:solidFill>
+              </a:defRPr>
+            </a:lvl6pPr>
+            <a:lvl7pPr marL="2743200" indent="0">
+              <a:buNone/>
+              <a:defRPr sz="1400">
+                <a:solidFill>
+                  <a:schemeClr val="tx1">
+                    <a:tint val="75000"/>
+                  </a:schemeClr>
+                </a:solidFill>
+              </a:defRPr>
+            </a:lvl7pPr>
+            <a:lvl8pPr marL="3200400" indent="0">
+              <a:buNone/>
+              <a:defRPr sz="1400">
+                <a:solidFill>
+                  <a:schemeClr val="tx1">
+                    <a:tint val="75000"/>
+                  </a:schemeClr>
+                </a:solidFill>
+              </a:defRPr>
+            </a:lvl8pPr>
+            <a:lvl9pPr marL="3657600" indent="0">
+              <a:buNone/>
+              <a:defRPr sz="1400">
+                <a:solidFill>
+                  <a:schemeClr val="tx1">
+                    <a:tint val="75000"/>
+                  </a:schemeClr>
+                </a:solidFill>
+              </a:defRPr>
+            </a:lvl9pPr>
+          </a:lstStyle>
+          <a:p>
+            <a:pPr lvl="0"/>
+            <a:r>
+              <a:rPr lang="ja-JP" altLang="en-US"/>
+              <a:t>マスター テキストの書式設定</a:t>
+            </a:r>
+          </a:p>
+        </p:txBody>
+      </p:sp>
+      <p:sp>
+        <p:nvSpPr>
+          <p:cNvPr id="4" name="Date Placeholder 3"/>
+          <p:cNvSpPr>
+            <a:spLocks noGrp="1"/>
+          </p:cNvSpPr>
+          <p:nvPr>
+            <p:ph type="dt" sz="half" idx="10"/>
+          </p:nvPr>
+        </p:nvSpPr>
+        <p:spPr/>
+        <p:txBody>
+          <a:bodyPr/>
+          <a:lstStyle/>
+          <a:p>
+            <a:fld id="{F7C697B7-400A-462C-9925-7DE4B9466D5A}" type="datetimeFigureOut">
+              <a:rPr kumimoji="1" lang="ja-JP" altLang="en-US" smtClean="0"/>
+              <a:t>2026/7/6</a:t>
+            </a:fld>
+            <a:endParaRPr kumimoji="1" lang="ja-JP" altLang="en-US"/>
+          </a:p>
+        </p:txBody>
+      </p:sp>
+      <p:sp>
+        <p:nvSpPr>
+          <p:cNvPr id="5" name="Footer Placeholder 4"/>
+          <p:cNvSpPr>
+            <a:spLocks noGrp="1"/>
+          </p:cNvSpPr>
+          <p:nvPr>
+            <p:ph type="ftr" sz="quarter" idx="11"/>
+          </p:nvPr>
+        </p:nvSpPr>
+        <p:spPr/>
+        <p:txBody>
+          <a:bodyPr/>
+          <a:lstStyle/>
+          <a:p>
+            <a:endParaRPr kumimoji="1" lang="ja-JP" altLang="en-US"/>
+          </a:p>
+        </p:txBody>
+      </p:sp>
+      <p:sp>
+        <p:nvSpPr>
+          <p:cNvPr id="6" name="Slide Number Placeholder 5"/>
+          <p:cNvSpPr>
+            <a:spLocks noGrp="1"/>
+          </p:cNvSpPr>
+          <p:nvPr>
+            <p:ph type="sldNum" sz="quarter" idx="12"/>
+          </p:nvPr>
+        </p:nvSpPr>
+        <p:spPr/>
+        <p:txBody>
+          <a:bodyPr/>
+          <a:lstStyle/>
+          <a:p>
+            <a:fld id="{5E1B29A0-3D28-4701-9C89-0524393896F3}" type="slidenum">
+              <a:rPr kumimoji="1" lang="ja-JP" altLang="en-US" smtClean="0"/>
+              <a:t>‹#›</a:t>
+            </a:fld>
+            <a:endParaRPr kumimoji="1" lang="ja-JP" altLang="en-US"/>
+          </a:p>
+        </p:txBody>
+      </p:sp>
+    </p:spTree>
+    <p:extLst>
+      <p:ext uri="{BB962C8B-B14F-4D97-AF65-F5344CB8AC3E}">
+        <p14:creationId xmlns:p14="http://schemas.microsoft.com/office/powerpoint/2010/main" val="1526078257"/>
+      </p:ext>
+    </p:extLst>
+  </p:cSld>
+  <p:clrMapOvr>
+    <a:masterClrMapping/>
+  </p:clrMapOvr>
+</p:sldLayout>
+</file>
+
+<file path=ppt/slideLayouts/slideLayout15.xml><?xml version="1.0" encoding="utf-8"?>
+<p:sldLayout xmlns:a="http://schemas.openxmlformats.org/drawingml/2006/main" xmlns:r="http://schemas.openxmlformats.org/officeDocument/2006/relationships" xmlns:p="http://schemas.openxmlformats.org/presentationml/2006/main" preserve="1">
+  <p:cSld name="真または偽">
+    <p:spTree>
+      <p:nvGrpSpPr>
+        <p:cNvPr id="1" name=""/>
+        <p:cNvGrpSpPr/>
+        <p:nvPr/>
+      </p:nvGrpSpPr>
+      <p:grpSpPr>
+        <a:xfrm>
+          <a:off x="0" y="0"/>
+          <a:ext cx="0" cy="0"/>
+          <a:chOff x="0" y="0"/>
+          <a:chExt cx="0" cy="0"/>
+        </a:xfrm>
+      </p:grpSpPr>
+      <p:sp>
+        <p:nvSpPr>
+          <p:cNvPr id="2" name="Title 1"/>
+          <p:cNvSpPr>
+            <a:spLocks noGrp="1"/>
+          </p:cNvSpPr>
+          <p:nvPr>
+            <p:ph type="title"/>
+          </p:nvPr>
+        </p:nvSpPr>
+        <p:spPr>
+          <a:xfrm>
+            <a:off x="1141412" y="609601"/>
+            <a:ext cx="9905999" cy="2743199"/>
+          </a:xfrm>
+        </p:spPr>
+        <p:txBody>
+          <a:bodyPr vert="horz" lIns="91440" tIns="45720" rIns="91440" bIns="45720" rtlCol="0" anchor="ctr">
+            <a:normAutofit/>
+          </a:bodyPr>
+          <a:lstStyle>
+            <a:lvl1pPr>
+              <a:defRPr lang="en-US" b="0" dirty="0"/>
+            </a:lvl1pPr>
+          </a:lstStyle>
+          <a:p>
+            <a:pPr marL="0" lvl="0"/>
+            <a:r>
+              <a:rPr lang="ja-JP" altLang="en-US"/>
+              <a:t>マスター タイトルの書式設定</a:t>
+            </a:r>
+            <a:endParaRPr lang="en-US" dirty="0"/>
+          </a:p>
+        </p:txBody>
+      </p:sp>
+      <p:sp>
+        <p:nvSpPr>
+          <p:cNvPr id="10" name="Text Placeholder 9"/>
+          <p:cNvSpPr>
+            <a:spLocks noGrp="1"/>
+          </p:cNvSpPr>
+          <p:nvPr>
+            <p:ph type="body" sz="quarter" idx="13"/>
+          </p:nvPr>
+        </p:nvSpPr>
+        <p:spPr>
+          <a:xfrm>
+            <a:off x="1141412" y="3505200"/>
+            <a:ext cx="9906000" cy="838200"/>
+          </a:xfrm>
+        </p:spPr>
+        <p:txBody>
+          <a:bodyPr vert="horz" lIns="91440" tIns="45720" rIns="91440" bIns="45720" rtlCol="0" anchor="b">
+            <a:normAutofit/>
+          </a:bodyPr>
+          <a:lstStyle>
+            <a:lvl1pPr>
+              <a:buNone/>
+              <a:defRPr lang="en-US" sz="2800" b="0" cap="all" dirty="0">
+                <a:ln w="3175" cmpd="sng">
+                  <a:noFill/>
+                </a:ln>
+                <a:gradFill flip="none" rotWithShape="1">
+                  <a:gsLst>
+                    <a:gs pos="0">
+                      <a:schemeClr val="tx1"/>
+                    </a:gs>
+                    <a:gs pos="100000">
+                      <a:schemeClr val="tx1">
+                        <a:lumMod val="75000"/>
+                      </a:schemeClr>
+                    </a:gs>
+                  </a:gsLst>
+                  <a:lin ang="5400000" scaled="0"/>
+                  <a:tileRect/>
+                </a:gradFill>
+                <a:effectLst>
+                  <a:glow rad="38100">
+                    <a:schemeClr val="bg1">
+                      <a:lumMod val="65000"/>
+                      <a:lumOff val="35000"/>
+                      <a:alpha val="40000"/>
+                    </a:schemeClr>
+                  </a:glow>
+                  <a:outerShdw blurRad="28575" dist="38100" dir="14040000" algn="tl" rotWithShape="0">
+                    <a:srgbClr val="000000">
+                      <a:alpha val="25000"/>
+                    </a:srgbClr>
+                  </a:outerShdw>
+                </a:effectLst>
+              </a:defRPr>
+            </a:lvl1pPr>
+          </a:lstStyle>
+          <a:p>
+            <a:pPr marL="0" lvl="0">
+              <a:spcBef>
+                <a:spcPct val="0"/>
+              </a:spcBef>
+              <a:buNone/>
+            </a:pPr>
+            <a:r>
+              <a:rPr lang="ja-JP" altLang="en-US"/>
+              <a:t>マスター テキストの書式設定</a:t>
+            </a:r>
+          </a:p>
+        </p:txBody>
+      </p:sp>
+      <p:sp>
+        <p:nvSpPr>
+          <p:cNvPr id="3" name="Text Placeholder 2"/>
+          <p:cNvSpPr>
+            <a:spLocks noGrp="1"/>
+          </p:cNvSpPr>
+          <p:nvPr>
+            <p:ph type="body" idx="1"/>
+          </p:nvPr>
+        </p:nvSpPr>
+        <p:spPr>
+          <a:xfrm>
+            <a:off x="1141411" y="4343400"/>
+            <a:ext cx="9906000" cy="1447800"/>
+          </a:xfrm>
+        </p:spPr>
+        <p:txBody>
+          <a:bodyPr anchor="t">
+            <a:normAutofit/>
+          </a:bodyPr>
+          <a:lstStyle>
+            <a:lvl1pPr marL="0" indent="0" algn="l">
+              <a:buNone/>
+              <a:defRPr sz="1800">
+                <a:gradFill flip="none" rotWithShape="1">
+                  <a:gsLst>
+                    <a:gs pos="0">
+                      <a:schemeClr val="tx1"/>
+                    </a:gs>
+                    <a:gs pos="100000">
+                      <a:schemeClr val="tx1">
+                        <a:lumMod val="75000"/>
+                      </a:schemeClr>
+                    </a:gs>
+                  </a:gsLst>
+                  <a:lin ang="5400000" scaled="0"/>
+                  <a:tileRect/>
+                </a:gradFill>
+              </a:defRPr>
+            </a:lvl1pPr>
+            <a:lvl2pPr marL="457200" indent="0">
+              <a:buNone/>
+              <a:defRPr sz="1800">
+                <a:solidFill>
+                  <a:schemeClr val="tx1">
+                    <a:tint val="75000"/>
+                  </a:schemeClr>
+                </a:solidFill>
+              </a:defRPr>
+            </a:lvl2pPr>
+            <a:lvl3pPr marL="914400" indent="0">
+              <a:buNone/>
+              <a:defRPr sz="1600">
+                <a:solidFill>
+                  <a:schemeClr val="tx1">
+                    <a:tint val="75000"/>
+                  </a:schemeClr>
+                </a:solidFill>
+              </a:defRPr>
+            </a:lvl3pPr>
+            <a:lvl4pPr marL="1371600" indent="0">
+              <a:buNone/>
+              <a:defRPr sz="1400">
+                <a:solidFill>
+                  <a:schemeClr val="tx1">
+                    <a:tint val="75000"/>
+                  </a:schemeClr>
+                </a:solidFill>
+              </a:defRPr>
+            </a:lvl4pPr>
+            <a:lvl5pPr marL="1828800" indent="0">
+              <a:buNone/>
+              <a:defRPr sz="1400">
+                <a:solidFill>
+                  <a:schemeClr val="tx1">
+                    <a:tint val="75000"/>
+                  </a:schemeClr>
+                </a:solidFill>
+              </a:defRPr>
+            </a:lvl5pPr>
+            <a:lvl6pPr marL="2286000" indent="0">
+              <a:buNone/>
+              <a:defRPr sz="1400">
+                <a:solidFill>
+                  <a:schemeClr val="tx1">
+                    <a:tint val="75000"/>
+                  </a:schemeClr>
+                </a:solidFill>
+              </a:defRPr>
+            </a:lvl6pPr>
+            <a:lvl7pPr marL="2743200" indent="0">
+              <a:buNone/>
+              <a:defRPr sz="1400">
+                <a:solidFill>
+                  <a:schemeClr val="tx1">
+                    <a:tint val="75000"/>
+                  </a:schemeClr>
+                </a:solidFill>
+              </a:defRPr>
+            </a:lvl7pPr>
+            <a:lvl8pPr marL="3200400" indent="0">
+              <a:buNone/>
+              <a:defRPr sz="1400">
+                <a:solidFill>
+                  <a:schemeClr val="tx1">
+                    <a:tint val="75000"/>
+                  </a:schemeClr>
+                </a:solidFill>
+              </a:defRPr>
+            </a:lvl8pPr>
+            <a:lvl9pPr marL="3657600" indent="0">
+              <a:buNone/>
+              <a:defRPr sz="1400">
+                <a:solidFill>
+                  <a:schemeClr val="tx1">
+                    <a:tint val="75000"/>
+                  </a:schemeClr>
+                </a:solidFill>
+              </a:defRPr>
+            </a:lvl9pPr>
+          </a:lstStyle>
+          <a:p>
+            <a:pPr lvl="0"/>
+            <a:r>
+              <a:rPr lang="ja-JP" altLang="en-US"/>
+              <a:t>マスター テキストの書式設定</a:t>
+            </a:r>
+          </a:p>
+        </p:txBody>
+      </p:sp>
+      <p:sp>
+        <p:nvSpPr>
+          <p:cNvPr id="4" name="Date Placeholder 3"/>
+          <p:cNvSpPr>
+            <a:spLocks noGrp="1"/>
+          </p:cNvSpPr>
+          <p:nvPr>
+            <p:ph type="dt" sz="half" idx="10"/>
+          </p:nvPr>
+        </p:nvSpPr>
+        <p:spPr/>
+        <p:txBody>
+          <a:bodyPr/>
+          <a:lstStyle/>
+          <a:p>
+            <a:fld id="{F7C697B7-400A-462C-9925-7DE4B9466D5A}" type="datetimeFigureOut">
+              <a:rPr kumimoji="1" lang="ja-JP" altLang="en-US" smtClean="0"/>
+              <a:t>2026/7/6</a:t>
+            </a:fld>
+            <a:endParaRPr kumimoji="1" lang="ja-JP" altLang="en-US"/>
+          </a:p>
+        </p:txBody>
+      </p:sp>
+      <p:sp>
+        <p:nvSpPr>
+          <p:cNvPr id="5" name="Footer Placeholder 4"/>
+          <p:cNvSpPr>
+            <a:spLocks noGrp="1"/>
+          </p:cNvSpPr>
+          <p:nvPr>
+            <p:ph type="ftr" sz="quarter" idx="11"/>
+          </p:nvPr>
+        </p:nvSpPr>
+        <p:spPr/>
+        <p:txBody>
+          <a:bodyPr/>
+          <a:lstStyle/>
+          <a:p>
+            <a:endParaRPr kumimoji="1" lang="ja-JP" altLang="en-US"/>
+          </a:p>
+        </p:txBody>
+      </p:sp>
+      <p:sp>
+        <p:nvSpPr>
+          <p:cNvPr id="6" name="Slide Number Placeholder 5"/>
+          <p:cNvSpPr>
+            <a:spLocks noGrp="1"/>
+          </p:cNvSpPr>
+          <p:nvPr>
+            <p:ph type="sldNum" sz="quarter" idx="12"/>
+          </p:nvPr>
+        </p:nvSpPr>
+        <p:spPr/>
+        <p:txBody>
+          <a:bodyPr/>
+          <a:lstStyle/>
+          <a:p>
+            <a:fld id="{5E1B29A0-3D28-4701-9C89-0524393896F3}" type="slidenum">
+              <a:rPr kumimoji="1" lang="ja-JP" altLang="en-US" smtClean="0"/>
+              <a:t>‹#›</a:t>
+            </a:fld>
+            <a:endParaRPr kumimoji="1" lang="ja-JP" altLang="en-US"/>
+          </a:p>
+        </p:txBody>
+      </p:sp>
+    </p:spTree>
+    <p:extLst>
+      <p:ext uri="{BB962C8B-B14F-4D97-AF65-F5344CB8AC3E}">
+        <p14:creationId xmlns:p14="http://schemas.microsoft.com/office/powerpoint/2010/main" val="1905990657"/>
+      </p:ext>
+    </p:extLst>
+  </p:cSld>
+  <p:clrMapOvr>
+    <a:masterClrMapping/>
+  </p:clrMapOvr>
+</p:sldLayout>
+</file>
+
+<file path=ppt/slideLayouts/slideLayout16.xml><?xml version="1.0" encoding="utf-8"?>
 <p:sldLayout xmlns:a="http://schemas.openxmlformats.org/drawingml/2006/main" xmlns:r="http://schemas.openxmlformats.org/officeDocument/2006/relationships" xmlns:p="http://schemas.openxmlformats.org/presentationml/2006/main" type="vertTx" preserve="1">
   <p:cSld name="タイトルと縦書きテキスト">
     <p:spTree>
@@ -346,13 +2701,7 @@
       </p:grpSpPr>
       <p:sp>
         <p:nvSpPr>
-          <p:cNvPr id="2" name="タイトル 1">
-            <a:extLst>
-              <a:ext uri="{FF2B5EF4-FFF2-40B4-BE49-F238E27FC236}">
-                <a16:creationId xmlns:a16="http://schemas.microsoft.com/office/drawing/2014/main" id="{FD23C9A9-FD87-3162-DC4E-DB50ED02E872}"/>
-              </a:ext>
-            </a:extLst>
-          </p:cNvPr>
+          <p:cNvPr id="7" name="Title 1"/>
           <p:cNvSpPr>
             <a:spLocks noGrp="1"/>
           </p:cNvSpPr>
@@ -360,116 +2709,111 @@
             <p:ph type="title"/>
           </p:nvPr>
         </p:nvSpPr>
+        <p:spPr>
+          <a:xfrm>
+            <a:off x="1141413" y="609600"/>
+            <a:ext cx="9905998" cy="1905000"/>
+          </a:xfrm>
+        </p:spPr>
+        <p:txBody>
+          <a:bodyPr/>
+          <a:lstStyle/>
+          <a:p>
+            <a:r>
+              <a:rPr lang="ja-JP" altLang="en-US"/>
+              <a:t>マスター タイトルの書式設定</a:t>
+            </a:r>
+            <a:endParaRPr lang="en-US" dirty="0"/>
+          </a:p>
+        </p:txBody>
+      </p:sp>
+      <p:sp>
+        <p:nvSpPr>
+          <p:cNvPr id="3" name="Vertical Text Placeholder 2"/>
+          <p:cNvSpPr>
+            <a:spLocks noGrp="1"/>
+          </p:cNvSpPr>
+          <p:nvPr>
+            <p:ph type="body" orient="vert" idx="1"/>
+          </p:nvPr>
+        </p:nvSpPr>
         <p:spPr/>
         <p:txBody>
-          <a:bodyPr/>
-          <a:lstStyle/>
-          <a:p>
-            <a:r>
-              <a:rPr kumimoji="1" lang="ja-JP" altLang="en-US"/>
-              <a:t>マスター タイトルの書式設定</a:t>
-            </a:r>
-          </a:p>
-        </p:txBody>
-      </p:sp>
-      <p:sp>
-        <p:nvSpPr>
-          <p:cNvPr id="3" name="縦書きテキスト プレースホルダー 2">
-            <a:extLst>
-              <a:ext uri="{FF2B5EF4-FFF2-40B4-BE49-F238E27FC236}">
-                <a16:creationId xmlns:a16="http://schemas.microsoft.com/office/drawing/2014/main" id="{0E684F73-99D2-E897-37EB-E07E57B6F851}"/>
-              </a:ext>
-            </a:extLst>
-          </p:cNvPr>
-          <p:cNvSpPr>
-            <a:spLocks noGrp="1"/>
-          </p:cNvSpPr>
-          <p:nvPr>
-            <p:ph type="body" orient="vert" idx="1"/>
-          </p:nvPr>
-        </p:nvSpPr>
-        <p:spPr/>
-        <p:txBody>
-          <a:bodyPr vert="eaVert"/>
+          <a:bodyPr vert="eaVert" anchor="t"/>
           <a:lstStyle/>
           <a:p>
             <a:pPr lvl="0"/>
             <a:r>
-              <a:rPr kumimoji="1" lang="ja-JP" altLang="en-US"/>
+              <a:rPr lang="ja-JP" altLang="en-US"/>
               <a:t>マスター テキストの書式設定</a:t>
             </a:r>
           </a:p>
           <a:p>
             <a:pPr lvl="1"/>
             <a:r>
-              <a:rPr kumimoji="1" lang="ja-JP" altLang="en-US"/>
+              <a:rPr lang="ja-JP" altLang="en-US"/>
               <a:t>第 </a:t>
             </a:r>
             <a:r>
-              <a:rPr kumimoji="1" lang="en-US" altLang="ja-JP"/>
+              <a:rPr lang="en-US" altLang="ja-JP"/>
               <a:t>2 </a:t>
             </a:r>
             <a:r>
-              <a:rPr kumimoji="1" lang="ja-JP" altLang="en-US"/>
+              <a:rPr lang="ja-JP" altLang="en-US"/>
               <a:t>レベル</a:t>
             </a:r>
           </a:p>
           <a:p>
             <a:pPr lvl="2"/>
             <a:r>
-              <a:rPr kumimoji="1" lang="ja-JP" altLang="en-US"/>
+              <a:rPr lang="ja-JP" altLang="en-US"/>
               <a:t>第 </a:t>
             </a:r>
             <a:r>
-              <a:rPr kumimoji="1" lang="en-US" altLang="ja-JP"/>
+              <a:rPr lang="en-US" altLang="ja-JP"/>
               <a:t>3 </a:t>
             </a:r>
             <a:r>
-              <a:rPr kumimoji="1" lang="ja-JP" altLang="en-US"/>
+              <a:rPr lang="ja-JP" altLang="en-US"/>
               <a:t>レベル</a:t>
             </a:r>
           </a:p>
           <a:p>
             <a:pPr lvl="3"/>
             <a:r>
-              <a:rPr kumimoji="1" lang="ja-JP" altLang="en-US"/>
+              <a:rPr lang="ja-JP" altLang="en-US"/>
               <a:t>第 </a:t>
             </a:r>
             <a:r>
-              <a:rPr kumimoji="1" lang="en-US" altLang="ja-JP"/>
+              <a:rPr lang="en-US" altLang="ja-JP"/>
               <a:t>4 </a:t>
             </a:r>
             <a:r>
-              <a:rPr kumimoji="1" lang="ja-JP" altLang="en-US"/>
+              <a:rPr lang="ja-JP" altLang="en-US"/>
               <a:t>レベル</a:t>
             </a:r>
           </a:p>
           <a:p>
             <a:pPr lvl="4"/>
             <a:r>
-              <a:rPr kumimoji="1" lang="ja-JP" altLang="en-US"/>
+              <a:rPr lang="ja-JP" altLang="en-US"/>
               <a:t>第 </a:t>
             </a:r>
             <a:r>
-              <a:rPr kumimoji="1" lang="en-US" altLang="ja-JP"/>
+              <a:rPr lang="en-US" altLang="ja-JP"/>
               <a:t>5 </a:t>
             </a:r>
             <a:r>
-              <a:rPr kumimoji="1" lang="ja-JP" altLang="en-US"/>
+              <a:rPr lang="ja-JP" altLang="en-US"/>
               <a:t>レベル</a:t>
             </a:r>
-          </a:p>
-        </p:txBody>
-      </p:sp>
-      <p:sp>
-        <p:nvSpPr>
-          <p:cNvPr id="4" name="日付プレースホルダー 3">
-            <a:extLst>
-              <a:ext uri="{FF2B5EF4-FFF2-40B4-BE49-F238E27FC236}">
-                <a16:creationId xmlns:a16="http://schemas.microsoft.com/office/drawing/2014/main" id="{948F3B19-5C21-4D78-D75F-7363837AF32F}"/>
-              </a:ext>
-            </a:extLst>
-          </p:cNvPr>
+            <a:endParaRPr lang="en-US" dirty="0"/>
+          </a:p>
+        </p:txBody>
+      </p:sp>
+      <p:sp>
+        <p:nvSpPr>
+          <p:cNvPr id="4" name="Date Placeholder 3"/>
           <p:cNvSpPr>
             <a:spLocks noGrp="1"/>
           </p:cNvSpPr>
@@ -484,7 +2828,7 @@
           <a:p>
             <a:fld id="{F7C697B7-400A-462C-9925-7DE4B9466D5A}" type="datetimeFigureOut">
               <a:rPr kumimoji="1" lang="ja-JP" altLang="en-US" smtClean="0"/>
-              <a:t>2026/7/1</a:t>
+              <a:t>2026/7/6</a:t>
             </a:fld>
             <a:endParaRPr kumimoji="1" lang="ja-JP" altLang="en-US"/>
           </a:p>
@@ -492,13 +2836,7 @@
       </p:sp>
       <p:sp>
         <p:nvSpPr>
-          <p:cNvPr id="5" name="フッター プレースホルダー 4">
-            <a:extLst>
-              <a:ext uri="{FF2B5EF4-FFF2-40B4-BE49-F238E27FC236}">
-                <a16:creationId xmlns:a16="http://schemas.microsoft.com/office/drawing/2014/main" id="{4E4FBF78-FA49-CAA2-BB74-693425B4BCD8}"/>
-              </a:ext>
-            </a:extLst>
-          </p:cNvPr>
+          <p:cNvPr id="5" name="Footer Placeholder 4"/>
           <p:cNvSpPr>
             <a:spLocks noGrp="1"/>
           </p:cNvSpPr>
@@ -517,13 +2855,7 @@
       </p:sp>
       <p:sp>
         <p:nvSpPr>
-          <p:cNvPr id="6" name="スライド番号プレースホルダー 5">
-            <a:extLst>
-              <a:ext uri="{FF2B5EF4-FFF2-40B4-BE49-F238E27FC236}">
-                <a16:creationId xmlns:a16="http://schemas.microsoft.com/office/drawing/2014/main" id="{162C03D5-1777-3110-8886-D3B51AFB6030}"/>
-              </a:ext>
-            </a:extLst>
-          </p:cNvPr>
+          <p:cNvPr id="6" name="Slide Number Placeholder 5"/>
           <p:cNvSpPr>
             <a:spLocks noGrp="1"/>
           </p:cNvSpPr>
@@ -547,7 +2879,7 @@
     </p:spTree>
     <p:extLst>
       <p:ext uri="{BB962C8B-B14F-4D97-AF65-F5344CB8AC3E}">
-        <p14:creationId xmlns:p14="http://schemas.microsoft.com/office/powerpoint/2010/main" val="167152063"/>
+        <p14:creationId xmlns:p14="http://schemas.microsoft.com/office/powerpoint/2010/main" val="1470585240"/>
       </p:ext>
     </p:extLst>
   </p:cSld>
@@ -557,7 +2889,7 @@
 </p:sldLayout>
 </file>
 
-<file path=ppt/slideLayouts/slideLayout11.xml><?xml version="1.0" encoding="utf-8"?>
+<file path=ppt/slideLayouts/slideLayout17.xml><?xml version="1.0" encoding="utf-8"?>
 <p:sldLayout xmlns:a="http://schemas.openxmlformats.org/drawingml/2006/main" xmlns:r="http://schemas.openxmlformats.org/officeDocument/2006/relationships" xmlns:p="http://schemas.openxmlformats.org/presentationml/2006/main" type="vertTitleAndTx" preserve="1">
   <p:cSld name="縦書きタイトルと&#10;縦書きテキスト">
     <p:spTree>
@@ -576,13 +2908,7 @@
       </p:grpSpPr>
       <p:sp>
         <p:nvSpPr>
-          <p:cNvPr id="2" name="縦書きタイトル 1">
-            <a:extLst>
-              <a:ext uri="{FF2B5EF4-FFF2-40B4-BE49-F238E27FC236}">
-                <a16:creationId xmlns:a16="http://schemas.microsoft.com/office/drawing/2014/main" id="{F3B4C5CE-4A8B-5627-32B6-8A2C71B29FAA}"/>
-              </a:ext>
-            </a:extLst>
-          </p:cNvPr>
+          <p:cNvPr id="2" name="Vertical Title 1"/>
           <p:cNvSpPr>
             <a:spLocks noGrp="1"/>
           </p:cNvSpPr>
@@ -592,8 +2918,8 @@
         </p:nvSpPr>
         <p:spPr>
           <a:xfrm>
-            <a:off x="8724900" y="365125"/>
-            <a:ext cx="2628900" cy="5811838"/>
+            <a:off x="8836898" y="609599"/>
+            <a:ext cx="2210514" cy="5181601"/>
           </a:xfrm>
         </p:spPr>
         <p:txBody>
@@ -601,21 +2927,16 @@
           <a:lstStyle/>
           <a:p>
             <a:r>
-              <a:rPr kumimoji="1" lang="ja-JP" altLang="en-US"/>
+              <a:rPr lang="ja-JP" altLang="en-US"/>
               <a:t>マスター タイトルの書式設定</a:t>
             </a:r>
-          </a:p>
-        </p:txBody>
-      </p:sp>
-      <p:sp>
-        <p:nvSpPr>
-          <p:cNvPr id="3" name="縦書きテキスト プレースホルダー 2">
-            <a:extLst>
-              <a:ext uri="{FF2B5EF4-FFF2-40B4-BE49-F238E27FC236}">
-                <a16:creationId xmlns:a16="http://schemas.microsoft.com/office/drawing/2014/main" id="{81053C47-98D9-6D00-46F6-9343BDE7B063}"/>
-              </a:ext>
-            </a:extLst>
-          </p:cNvPr>
+            <a:endParaRPr lang="en-US" dirty="0"/>
+          </a:p>
+        </p:txBody>
+      </p:sp>
+      <p:sp>
+        <p:nvSpPr>
+          <p:cNvPr id="3" name="Vertical Text Placeholder 2"/>
           <p:cNvSpPr>
             <a:spLocks noGrp="1"/>
           </p:cNvSpPr>
@@ -625,91 +2946,86 @@
         </p:nvSpPr>
         <p:spPr>
           <a:xfrm>
-            <a:off x="838200" y="365125"/>
-            <a:ext cx="7734300" cy="5811838"/>
+            <a:off x="1141412" y="609600"/>
+            <a:ext cx="7543800" cy="5181600"/>
           </a:xfrm>
         </p:spPr>
         <p:txBody>
-          <a:bodyPr vert="eaVert"/>
+          <a:bodyPr vert="eaVert" anchor="t"/>
           <a:lstStyle/>
           <a:p>
             <a:pPr lvl="0"/>
             <a:r>
-              <a:rPr kumimoji="1" lang="ja-JP" altLang="en-US"/>
+              <a:rPr lang="ja-JP" altLang="en-US"/>
               <a:t>マスター テキストの書式設定</a:t>
             </a:r>
           </a:p>
           <a:p>
             <a:pPr lvl="1"/>
             <a:r>
-              <a:rPr kumimoji="1" lang="ja-JP" altLang="en-US"/>
+              <a:rPr lang="ja-JP" altLang="en-US"/>
               <a:t>第 </a:t>
             </a:r>
             <a:r>
-              <a:rPr kumimoji="1" lang="en-US" altLang="ja-JP"/>
+              <a:rPr lang="en-US" altLang="ja-JP"/>
               <a:t>2 </a:t>
             </a:r>
             <a:r>
-              <a:rPr kumimoji="1" lang="ja-JP" altLang="en-US"/>
+              <a:rPr lang="ja-JP" altLang="en-US"/>
               <a:t>レベル</a:t>
             </a:r>
           </a:p>
           <a:p>
             <a:pPr lvl="2"/>
             <a:r>
-              <a:rPr kumimoji="1" lang="ja-JP" altLang="en-US"/>
+              <a:rPr lang="ja-JP" altLang="en-US"/>
               <a:t>第 </a:t>
             </a:r>
             <a:r>
-              <a:rPr kumimoji="1" lang="en-US" altLang="ja-JP"/>
+              <a:rPr lang="en-US" altLang="ja-JP"/>
               <a:t>3 </a:t>
             </a:r>
             <a:r>
-              <a:rPr kumimoji="1" lang="ja-JP" altLang="en-US"/>
+              <a:rPr lang="ja-JP" altLang="en-US"/>
               <a:t>レベル</a:t>
             </a:r>
           </a:p>
           <a:p>
             <a:pPr lvl="3"/>
             <a:r>
-              <a:rPr kumimoji="1" lang="ja-JP" altLang="en-US"/>
+              <a:rPr lang="ja-JP" altLang="en-US"/>
               <a:t>第 </a:t>
             </a:r>
             <a:r>
-              <a:rPr kumimoji="1" lang="en-US" altLang="ja-JP"/>
+              <a:rPr lang="en-US" altLang="ja-JP"/>
               <a:t>4 </a:t>
             </a:r>
             <a:r>
-              <a:rPr kumimoji="1" lang="ja-JP" altLang="en-US"/>
+              <a:rPr lang="ja-JP" altLang="en-US"/>
               <a:t>レベル</a:t>
             </a:r>
           </a:p>
           <a:p>
             <a:pPr lvl="4"/>
             <a:r>
-              <a:rPr kumimoji="1" lang="ja-JP" altLang="en-US"/>
+              <a:rPr lang="ja-JP" altLang="en-US"/>
               <a:t>第 </a:t>
             </a:r>
             <a:r>
-              <a:rPr kumimoji="1" lang="en-US" altLang="ja-JP"/>
+              <a:rPr lang="en-US" altLang="ja-JP"/>
               <a:t>5 </a:t>
             </a:r>
             <a:r>
-              <a:rPr kumimoji="1" lang="ja-JP" altLang="en-US"/>
+              <a:rPr lang="ja-JP" altLang="en-US"/>
               <a:t>レベル</a:t>
             </a:r>
-          </a:p>
-        </p:txBody>
-      </p:sp>
-      <p:sp>
-        <p:nvSpPr>
-          <p:cNvPr id="4" name="日付プレースホルダー 3">
-            <a:extLst>
-              <a:ext uri="{FF2B5EF4-FFF2-40B4-BE49-F238E27FC236}">
-                <a16:creationId xmlns:a16="http://schemas.microsoft.com/office/drawing/2014/main" id="{75C093E3-EAE0-7018-7417-F2F6135815BD}"/>
-              </a:ext>
-            </a:extLst>
-          </p:cNvPr>
+            <a:endParaRPr lang="en-US" dirty="0"/>
+          </a:p>
+        </p:txBody>
+      </p:sp>
+      <p:sp>
+        <p:nvSpPr>
+          <p:cNvPr id="4" name="Date Placeholder 3"/>
           <p:cNvSpPr>
             <a:spLocks noGrp="1"/>
           </p:cNvSpPr>
@@ -724,7 +3040,7 @@
           <a:p>
             <a:fld id="{F7C697B7-400A-462C-9925-7DE4B9466D5A}" type="datetimeFigureOut">
               <a:rPr kumimoji="1" lang="ja-JP" altLang="en-US" smtClean="0"/>
-              <a:t>2026/7/1</a:t>
+              <a:t>2026/7/6</a:t>
             </a:fld>
             <a:endParaRPr kumimoji="1" lang="ja-JP" altLang="en-US"/>
           </a:p>
@@ -732,13 +3048,7 @@
       </p:sp>
       <p:sp>
         <p:nvSpPr>
-          <p:cNvPr id="5" name="フッター プレースホルダー 4">
-            <a:extLst>
-              <a:ext uri="{FF2B5EF4-FFF2-40B4-BE49-F238E27FC236}">
-                <a16:creationId xmlns:a16="http://schemas.microsoft.com/office/drawing/2014/main" id="{0550C434-79C8-0477-1119-98A1DB112BD3}"/>
-              </a:ext>
-            </a:extLst>
-          </p:cNvPr>
+          <p:cNvPr id="5" name="Footer Placeholder 4"/>
           <p:cNvSpPr>
             <a:spLocks noGrp="1"/>
           </p:cNvSpPr>
@@ -757,13 +3067,7 @@
       </p:sp>
       <p:sp>
         <p:nvSpPr>
-          <p:cNvPr id="6" name="スライド番号プレースホルダー 5">
-            <a:extLst>
-              <a:ext uri="{FF2B5EF4-FFF2-40B4-BE49-F238E27FC236}">
-                <a16:creationId xmlns:a16="http://schemas.microsoft.com/office/drawing/2014/main" id="{34A6120F-D2C2-0BB4-DA1A-C50C6C4E51F1}"/>
-              </a:ext>
-            </a:extLst>
-          </p:cNvPr>
+          <p:cNvPr id="6" name="Slide Number Placeholder 5"/>
           <p:cNvSpPr>
             <a:spLocks noGrp="1"/>
           </p:cNvSpPr>
@@ -787,7 +3091,7 @@
     </p:spTree>
     <p:extLst>
       <p:ext uri="{BB962C8B-B14F-4D97-AF65-F5344CB8AC3E}">
-        <p14:creationId xmlns:p14="http://schemas.microsoft.com/office/powerpoint/2010/main" val="2281057772"/>
+        <p14:creationId xmlns:p14="http://schemas.microsoft.com/office/powerpoint/2010/main" val="2011301913"/>
       </p:ext>
     </p:extLst>
   </p:cSld>
@@ -816,13 +3120,7 @@
       </p:grpSpPr>
       <p:sp>
         <p:nvSpPr>
-          <p:cNvPr id="2" name="タイトル 1">
-            <a:extLst>
-              <a:ext uri="{FF2B5EF4-FFF2-40B4-BE49-F238E27FC236}">
-                <a16:creationId xmlns:a16="http://schemas.microsoft.com/office/drawing/2014/main" id="{E28CFCDE-ECEE-C409-3677-BC57A85B483F}"/>
-              </a:ext>
-            </a:extLst>
-          </p:cNvPr>
+          <p:cNvPr id="2" name="Title 1"/>
           <p:cNvSpPr>
             <a:spLocks noGrp="1"/>
           </p:cNvSpPr>
@@ -836,21 +3134,16 @@
           <a:lstStyle/>
           <a:p>
             <a:r>
-              <a:rPr kumimoji="1" lang="ja-JP" altLang="en-US"/>
+              <a:rPr lang="ja-JP" altLang="en-US"/>
               <a:t>マスター タイトルの書式設定</a:t>
             </a:r>
-          </a:p>
-        </p:txBody>
-      </p:sp>
-      <p:sp>
-        <p:nvSpPr>
-          <p:cNvPr id="3" name="コンテンツ プレースホルダー 2">
-            <a:extLst>
-              <a:ext uri="{FF2B5EF4-FFF2-40B4-BE49-F238E27FC236}">
-                <a16:creationId xmlns:a16="http://schemas.microsoft.com/office/drawing/2014/main" id="{AED510A7-3F46-A0F1-6161-192982EE7B43}"/>
-              </a:ext>
-            </a:extLst>
-          </p:cNvPr>
+            <a:endParaRPr lang="en-US" dirty="0"/>
+          </a:p>
+        </p:txBody>
+      </p:sp>
+      <p:sp>
+        <p:nvSpPr>
+          <p:cNvPr id="3" name="Content Placeholder 2"/>
           <p:cNvSpPr>
             <a:spLocks noGrp="1"/>
           </p:cNvSpPr>
@@ -860,86 +3153,81 @@
         </p:nvSpPr>
         <p:spPr/>
         <p:txBody>
-          <a:bodyPr/>
+          <a:bodyPr anchor="ctr"/>
           <a:lstStyle/>
           <a:p>
             <a:pPr lvl="0"/>
             <a:r>
-              <a:rPr kumimoji="1" lang="ja-JP" altLang="en-US"/>
+              <a:rPr lang="ja-JP" altLang="en-US"/>
               <a:t>マスター テキストの書式設定</a:t>
             </a:r>
           </a:p>
           <a:p>
             <a:pPr lvl="1"/>
             <a:r>
-              <a:rPr kumimoji="1" lang="ja-JP" altLang="en-US"/>
+              <a:rPr lang="ja-JP" altLang="en-US"/>
               <a:t>第 </a:t>
             </a:r>
             <a:r>
-              <a:rPr kumimoji="1" lang="en-US" altLang="ja-JP"/>
+              <a:rPr lang="en-US" altLang="ja-JP"/>
               <a:t>2 </a:t>
             </a:r>
             <a:r>
-              <a:rPr kumimoji="1" lang="ja-JP" altLang="en-US"/>
+              <a:rPr lang="ja-JP" altLang="en-US"/>
               <a:t>レベル</a:t>
             </a:r>
           </a:p>
           <a:p>
             <a:pPr lvl="2"/>
             <a:r>
-              <a:rPr kumimoji="1" lang="ja-JP" altLang="en-US"/>
+              <a:rPr lang="ja-JP" altLang="en-US"/>
               <a:t>第 </a:t>
             </a:r>
             <a:r>
-              <a:rPr kumimoji="1" lang="en-US" altLang="ja-JP"/>
+              <a:rPr lang="en-US" altLang="ja-JP"/>
               <a:t>3 </a:t>
             </a:r>
             <a:r>
-              <a:rPr kumimoji="1" lang="ja-JP" altLang="en-US"/>
+              <a:rPr lang="ja-JP" altLang="en-US"/>
               <a:t>レベル</a:t>
             </a:r>
           </a:p>
           <a:p>
             <a:pPr lvl="3"/>
             <a:r>
-              <a:rPr kumimoji="1" lang="ja-JP" altLang="en-US"/>
+              <a:rPr lang="ja-JP" altLang="en-US"/>
               <a:t>第 </a:t>
             </a:r>
             <a:r>
-              <a:rPr kumimoji="1" lang="en-US" altLang="ja-JP"/>
+              <a:rPr lang="en-US" altLang="ja-JP"/>
               <a:t>4 </a:t>
             </a:r>
             <a:r>
-              <a:rPr kumimoji="1" lang="ja-JP" altLang="en-US"/>
+              <a:rPr lang="ja-JP" altLang="en-US"/>
               <a:t>レベル</a:t>
             </a:r>
           </a:p>
           <a:p>
             <a:pPr lvl="4"/>
             <a:r>
-              <a:rPr kumimoji="1" lang="ja-JP" altLang="en-US"/>
+              <a:rPr lang="ja-JP" altLang="en-US"/>
               <a:t>第 </a:t>
             </a:r>
             <a:r>
-              <a:rPr kumimoji="1" lang="en-US" altLang="ja-JP"/>
+              <a:rPr lang="en-US" altLang="ja-JP"/>
               <a:t>5 </a:t>
             </a:r>
             <a:r>
-              <a:rPr kumimoji="1" lang="ja-JP" altLang="en-US"/>
+              <a:rPr lang="ja-JP" altLang="en-US"/>
               <a:t>レベル</a:t>
             </a:r>
-          </a:p>
-        </p:txBody>
-      </p:sp>
-      <p:sp>
-        <p:nvSpPr>
-          <p:cNvPr id="4" name="日付プレースホルダー 3">
-            <a:extLst>
-              <a:ext uri="{FF2B5EF4-FFF2-40B4-BE49-F238E27FC236}">
-                <a16:creationId xmlns:a16="http://schemas.microsoft.com/office/drawing/2014/main" id="{558499E3-A036-368C-0DB4-36422C7CBC5E}"/>
-              </a:ext>
-            </a:extLst>
-          </p:cNvPr>
+            <a:endParaRPr lang="en-US" dirty="0"/>
+          </a:p>
+        </p:txBody>
+      </p:sp>
+      <p:sp>
+        <p:nvSpPr>
+          <p:cNvPr id="4" name="Date Placeholder 3"/>
           <p:cNvSpPr>
             <a:spLocks noGrp="1"/>
           </p:cNvSpPr>
@@ -954,7 +3242,7 @@
           <a:p>
             <a:fld id="{F7C697B7-400A-462C-9925-7DE4B9466D5A}" type="datetimeFigureOut">
               <a:rPr kumimoji="1" lang="ja-JP" altLang="en-US" smtClean="0"/>
-              <a:t>2026/7/1</a:t>
+              <a:t>2026/7/6</a:t>
             </a:fld>
             <a:endParaRPr kumimoji="1" lang="ja-JP" altLang="en-US"/>
           </a:p>
@@ -962,13 +3250,7 @@
       </p:sp>
       <p:sp>
         <p:nvSpPr>
-          <p:cNvPr id="5" name="フッター プレースホルダー 4">
-            <a:extLst>
-              <a:ext uri="{FF2B5EF4-FFF2-40B4-BE49-F238E27FC236}">
-                <a16:creationId xmlns:a16="http://schemas.microsoft.com/office/drawing/2014/main" id="{A1E9BA9B-1CC3-0D3F-6BC5-6C76199B4FF0}"/>
-              </a:ext>
-            </a:extLst>
-          </p:cNvPr>
+          <p:cNvPr id="5" name="Footer Placeholder 4"/>
           <p:cNvSpPr>
             <a:spLocks noGrp="1"/>
           </p:cNvSpPr>
@@ -987,13 +3269,7 @@
       </p:sp>
       <p:sp>
         <p:nvSpPr>
-          <p:cNvPr id="6" name="スライド番号プレースホルダー 5">
-            <a:extLst>
-              <a:ext uri="{FF2B5EF4-FFF2-40B4-BE49-F238E27FC236}">
-                <a16:creationId xmlns:a16="http://schemas.microsoft.com/office/drawing/2014/main" id="{A82EACB8-7353-CB7E-A57C-D5D68282921A}"/>
-              </a:ext>
-            </a:extLst>
-          </p:cNvPr>
+          <p:cNvPr id="6" name="Slide Number Placeholder 5"/>
           <p:cNvSpPr>
             <a:spLocks noGrp="1"/>
           </p:cNvSpPr>
@@ -1017,7 +3293,7 @@
     </p:spTree>
     <p:extLst>
       <p:ext uri="{BB962C8B-B14F-4D97-AF65-F5344CB8AC3E}">
-        <p14:creationId xmlns:p14="http://schemas.microsoft.com/office/powerpoint/2010/main" val="580820349"/>
+        <p14:creationId xmlns:p14="http://schemas.microsoft.com/office/powerpoint/2010/main" val="3018049953"/>
       </p:ext>
     </p:extLst>
   </p:cSld>
@@ -1046,13 +3322,7 @@
       </p:grpSpPr>
       <p:sp>
         <p:nvSpPr>
-          <p:cNvPr id="2" name="タイトル 1">
-            <a:extLst>
-              <a:ext uri="{FF2B5EF4-FFF2-40B4-BE49-F238E27FC236}">
-                <a16:creationId xmlns:a16="http://schemas.microsoft.com/office/drawing/2014/main" id="{94C329DC-2D73-9354-3A60-FA9888F98E25}"/>
-              </a:ext>
-            </a:extLst>
-          </p:cNvPr>
+          <p:cNvPr id="2" name="Title 1"/>
           <p:cNvSpPr>
             <a:spLocks noGrp="1"/>
           </p:cNvSpPr>
@@ -1062,34 +3332,29 @@
         </p:nvSpPr>
         <p:spPr>
           <a:xfrm>
-            <a:off x="831850" y="1709738"/>
-            <a:ext cx="10515600" cy="2852737"/>
+            <a:off x="1751013" y="3308581"/>
+            <a:ext cx="8686800" cy="1468800"/>
           </a:xfrm>
         </p:spPr>
         <p:txBody>
           <a:bodyPr anchor="b"/>
           <a:lstStyle>
-            <a:lvl1pPr>
-              <a:defRPr sz="6000"/>
+            <a:lvl1pPr algn="r">
+              <a:defRPr sz="4000" b="0" cap="all"/>
             </a:lvl1pPr>
           </a:lstStyle>
           <a:p>
             <a:r>
-              <a:rPr kumimoji="1" lang="ja-JP" altLang="en-US"/>
+              <a:rPr lang="ja-JP" altLang="en-US"/>
               <a:t>マスター タイトルの書式設定</a:t>
             </a:r>
-          </a:p>
-        </p:txBody>
-      </p:sp>
-      <p:sp>
-        <p:nvSpPr>
-          <p:cNvPr id="3" name="テキスト プレースホルダー 2">
-            <a:extLst>
-              <a:ext uri="{FF2B5EF4-FFF2-40B4-BE49-F238E27FC236}">
-                <a16:creationId xmlns:a16="http://schemas.microsoft.com/office/drawing/2014/main" id="{1C07C27C-DA32-62C9-7F98-B544344267FB}"/>
-              </a:ext>
-            </a:extLst>
-          </p:cNvPr>
+            <a:endParaRPr lang="en-US" dirty="0"/>
+          </a:p>
+        </p:txBody>
+      </p:sp>
+      <p:sp>
+        <p:nvSpPr>
+          <p:cNvPr id="3" name="Text Placeholder 2"/>
           <p:cNvSpPr>
             <a:spLocks noGrp="1"/>
           </p:cNvSpPr>
@@ -1099,99 +3364,110 @@
         </p:nvSpPr>
         <p:spPr>
           <a:xfrm>
-            <a:off x="831850" y="4589463"/>
-            <a:ext cx="10515600" cy="1500187"/>
+            <a:off x="1751011" y="4777381"/>
+            <a:ext cx="8686801" cy="860400"/>
           </a:xfrm>
         </p:spPr>
         <p:txBody>
-          <a:bodyPr/>
+          <a:bodyPr anchor="t">
+            <a:normAutofit/>
+          </a:bodyPr>
           <a:lstStyle>
-            <a:lvl1pPr marL="0" indent="0">
-              <a:buNone/>
-              <a:defRPr sz="2400">
-                <a:solidFill>
-                  <a:schemeClr val="tx1">
-                    <a:tint val="82000"/>
-                  </a:schemeClr>
-                </a:solidFill>
+            <a:lvl1pPr marL="0" indent="0" algn="r">
+              <a:buNone/>
+              <a:defRPr sz="2000">
+                <a:gradFill flip="none" rotWithShape="1">
+                  <a:gsLst>
+                    <a:gs pos="0">
+                      <a:schemeClr val="tx1"/>
+                    </a:gs>
+                    <a:gs pos="100000">
+                      <a:schemeClr val="tx1">
+                        <a:lumMod val="75000"/>
+                      </a:schemeClr>
+                    </a:gs>
+                  </a:gsLst>
+                  <a:lin ang="5400000" scaled="0"/>
+                  <a:tileRect/>
+                </a:gradFill>
               </a:defRPr>
             </a:lvl1pPr>
             <a:lvl2pPr marL="457200" indent="0">
               <a:buNone/>
-              <a:defRPr sz="2000">
+              <a:defRPr sz="1800">
                 <a:solidFill>
                   <a:schemeClr val="tx1">
-                    <a:tint val="82000"/>
+                    <a:tint val="75000"/>
                   </a:schemeClr>
                 </a:solidFill>
               </a:defRPr>
             </a:lvl2pPr>
             <a:lvl3pPr marL="914400" indent="0">
               <a:buNone/>
-              <a:defRPr sz="1800">
+              <a:defRPr sz="1600">
                 <a:solidFill>
                   <a:schemeClr val="tx1">
-                    <a:tint val="82000"/>
+                    <a:tint val="75000"/>
                   </a:schemeClr>
                 </a:solidFill>
               </a:defRPr>
             </a:lvl3pPr>
             <a:lvl4pPr marL="1371600" indent="0">
               <a:buNone/>
-              <a:defRPr sz="1600">
+              <a:defRPr sz="1400">
                 <a:solidFill>
                   <a:schemeClr val="tx1">
-                    <a:tint val="82000"/>
+                    <a:tint val="75000"/>
                   </a:schemeClr>
                 </a:solidFill>
               </a:defRPr>
             </a:lvl4pPr>
             <a:lvl5pPr marL="1828800" indent="0">
               <a:buNone/>
-              <a:defRPr sz="1600">
+              <a:defRPr sz="1400">
                 <a:solidFill>
                   <a:schemeClr val="tx1">
-                    <a:tint val="82000"/>
+                    <a:tint val="75000"/>
                   </a:schemeClr>
                 </a:solidFill>
               </a:defRPr>
             </a:lvl5pPr>
             <a:lvl6pPr marL="2286000" indent="0">
               <a:buNone/>
-              <a:defRPr sz="1600">
+              <a:defRPr sz="1400">
                 <a:solidFill>
                   <a:schemeClr val="tx1">
-                    <a:tint val="82000"/>
+                    <a:tint val="75000"/>
                   </a:schemeClr>
                 </a:solidFill>
               </a:defRPr>
             </a:lvl6pPr>
             <a:lvl7pPr marL="2743200" indent="0">
               <a:buNone/>
-              <a:defRPr sz="1600">
+              <a:defRPr sz="1400">
                 <a:solidFill>
                   <a:schemeClr val="tx1">
-                    <a:tint val="82000"/>
+                    <a:tint val="75000"/>
                   </a:schemeClr>
                 </a:solidFill>
               </a:defRPr>
             </a:lvl7pPr>
             <a:lvl8pPr marL="3200400" indent="0">
               <a:buNone/>
-              <a:defRPr sz="1600">
+              <a:defRPr sz="1400">
                 <a:solidFill>
                   <a:schemeClr val="tx1">
-                    <a:tint val="82000"/>
+                    <a:tint val="75000"/>
                   </a:schemeClr>
                 </a:solidFill>
               </a:defRPr>
             </a:lvl8pPr>
             <a:lvl9pPr marL="3657600" indent="0">
               <a:buNone/>
-              <a:defRPr sz="1600">
+              <a:defRPr sz="1400">
                 <a:solidFill>
                   <a:schemeClr val="tx1">
-                    <a:tint val="82000"/>
+                    <a:tint val="75000"/>
                   </a:schemeClr>
                 </a:solidFill>
               </a:defRPr>
@@ -1200,7 +3476,7 @@
           <a:p>
             <a:pPr lvl="0"/>
             <a:r>
-              <a:rPr kumimoji="1" lang="ja-JP" altLang="en-US"/>
+              <a:rPr lang="ja-JP" altLang="en-US"/>
               <a:t>マスター テキストの書式設定</a:t>
             </a:r>
           </a:p>
@@ -1208,13 +3484,7 @@
       </p:sp>
       <p:sp>
         <p:nvSpPr>
-          <p:cNvPr id="4" name="日付プレースホルダー 3">
-            <a:extLst>
-              <a:ext uri="{FF2B5EF4-FFF2-40B4-BE49-F238E27FC236}">
-                <a16:creationId xmlns:a16="http://schemas.microsoft.com/office/drawing/2014/main" id="{2E3E0776-A875-C6A8-9383-62C7384FEB4E}"/>
-              </a:ext>
-            </a:extLst>
-          </p:cNvPr>
+          <p:cNvPr id="4" name="Date Placeholder 3"/>
           <p:cNvSpPr>
             <a:spLocks noGrp="1"/>
           </p:cNvSpPr>
@@ -1229,7 +3499,7 @@
           <a:p>
             <a:fld id="{F7C697B7-400A-462C-9925-7DE4B9466D5A}" type="datetimeFigureOut">
               <a:rPr kumimoji="1" lang="ja-JP" altLang="en-US" smtClean="0"/>
-              <a:t>2026/7/1</a:t>
+              <a:t>2026/7/6</a:t>
             </a:fld>
             <a:endParaRPr kumimoji="1" lang="ja-JP" altLang="en-US"/>
           </a:p>
@@ -1237,13 +3507,7 @@
       </p:sp>
       <p:sp>
         <p:nvSpPr>
-          <p:cNvPr id="5" name="フッター プレースホルダー 4">
-            <a:extLst>
-              <a:ext uri="{FF2B5EF4-FFF2-40B4-BE49-F238E27FC236}">
-                <a16:creationId xmlns:a16="http://schemas.microsoft.com/office/drawing/2014/main" id="{51946AFC-A31C-8F82-8E48-6F723BE1D0AF}"/>
-              </a:ext>
-            </a:extLst>
-          </p:cNvPr>
+          <p:cNvPr id="5" name="Footer Placeholder 4"/>
           <p:cNvSpPr>
             <a:spLocks noGrp="1"/>
           </p:cNvSpPr>
@@ -1262,13 +3526,7 @@
       </p:sp>
       <p:sp>
         <p:nvSpPr>
-          <p:cNvPr id="6" name="スライド番号プレースホルダー 5">
-            <a:extLst>
-              <a:ext uri="{FF2B5EF4-FFF2-40B4-BE49-F238E27FC236}">
-                <a16:creationId xmlns:a16="http://schemas.microsoft.com/office/drawing/2014/main" id="{11E9DB4B-5B07-8863-6989-1ACCF6DFC0E7}"/>
-              </a:ext>
-            </a:extLst>
-          </p:cNvPr>
+          <p:cNvPr id="6" name="Slide Number Placeholder 5"/>
           <p:cNvSpPr>
             <a:spLocks noGrp="1"/>
           </p:cNvSpPr>
@@ -1292,7 +3550,7 @@
     </p:spTree>
     <p:extLst>
       <p:ext uri="{BB962C8B-B14F-4D97-AF65-F5344CB8AC3E}">
-        <p14:creationId xmlns:p14="http://schemas.microsoft.com/office/powerpoint/2010/main" val="142436964"/>
+        <p14:creationId xmlns:p14="http://schemas.microsoft.com/office/powerpoint/2010/main" val="590051243"/>
       </p:ext>
     </p:extLst>
   </p:cSld>
@@ -1321,13 +3579,7 @@
       </p:grpSpPr>
       <p:sp>
         <p:nvSpPr>
-          <p:cNvPr id="2" name="タイトル 1">
-            <a:extLst>
-              <a:ext uri="{FF2B5EF4-FFF2-40B4-BE49-F238E27FC236}">
-                <a16:creationId xmlns:a16="http://schemas.microsoft.com/office/drawing/2014/main" id="{280AE210-00E5-B1BE-08ED-67B171B7B621}"/>
-              </a:ext>
-            </a:extLst>
-          </p:cNvPr>
+          <p:cNvPr id="2" name="Title 1"/>
           <p:cNvSpPr>
             <a:spLocks noGrp="1"/>
           </p:cNvSpPr>
@@ -1341,21 +3593,16 @@
           <a:lstStyle/>
           <a:p>
             <a:r>
-              <a:rPr kumimoji="1" lang="ja-JP" altLang="en-US"/>
+              <a:rPr lang="ja-JP" altLang="en-US"/>
               <a:t>マスター タイトルの書式設定</a:t>
             </a:r>
-          </a:p>
-        </p:txBody>
-      </p:sp>
-      <p:sp>
-        <p:nvSpPr>
-          <p:cNvPr id="3" name="コンテンツ プレースホルダー 2">
-            <a:extLst>
-              <a:ext uri="{FF2B5EF4-FFF2-40B4-BE49-F238E27FC236}">
-                <a16:creationId xmlns:a16="http://schemas.microsoft.com/office/drawing/2014/main" id="{2423EAAC-A31A-22C5-3678-4DD686CADA40}"/>
-              </a:ext>
-            </a:extLst>
-          </p:cNvPr>
+            <a:endParaRPr lang="en-US" dirty="0"/>
+          </a:p>
+        </p:txBody>
+      </p:sp>
+      <p:sp>
+        <p:nvSpPr>
+          <p:cNvPr id="3" name="Content Placeholder 2"/>
           <p:cNvSpPr>
             <a:spLocks noGrp="1"/>
           </p:cNvSpPr>
@@ -1365,91 +3612,116 @@
         </p:nvSpPr>
         <p:spPr>
           <a:xfrm>
-            <a:off x="838200" y="1825625"/>
-            <a:ext cx="5181600" cy="4351338"/>
+            <a:off x="1141412" y="2666999"/>
+            <a:ext cx="4876800" cy="3124201"/>
           </a:xfrm>
         </p:spPr>
         <p:txBody>
-          <a:bodyPr/>
-          <a:lstStyle/>
+          <a:bodyPr>
+            <a:normAutofit/>
+          </a:bodyPr>
+          <a:lstStyle>
+            <a:lvl1pPr>
+              <a:defRPr sz="1800"/>
+            </a:lvl1pPr>
+            <a:lvl2pPr>
+              <a:defRPr sz="1600"/>
+            </a:lvl2pPr>
+            <a:lvl3pPr>
+              <a:defRPr sz="1400"/>
+            </a:lvl3pPr>
+            <a:lvl4pPr>
+              <a:defRPr sz="1200"/>
+            </a:lvl4pPr>
+            <a:lvl5pPr>
+              <a:defRPr sz="1200"/>
+            </a:lvl5pPr>
+            <a:lvl6pPr>
+              <a:defRPr sz="1200"/>
+            </a:lvl6pPr>
+            <a:lvl7pPr>
+              <a:defRPr sz="1200"/>
+            </a:lvl7pPr>
+            <a:lvl8pPr>
+              <a:defRPr sz="1200"/>
+            </a:lvl8pPr>
+            <a:lvl9pPr>
+              <a:defRPr sz="1200"/>
+            </a:lvl9pPr>
+          </a:lstStyle>
           <a:p>
             <a:pPr lvl="0"/>
             <a:r>
-              <a:rPr kumimoji="1" lang="ja-JP" altLang="en-US"/>
+              <a:rPr lang="ja-JP" altLang="en-US"/>
               <a:t>マスター テキストの書式設定</a:t>
             </a:r>
           </a:p>
           <a:p>
             <a:pPr lvl="1"/>
             <a:r>
-              <a:rPr kumimoji="1" lang="ja-JP" altLang="en-US"/>
+              <a:rPr lang="ja-JP" altLang="en-US"/>
               <a:t>第 </a:t>
             </a:r>
             <a:r>
-              <a:rPr kumimoji="1" lang="en-US" altLang="ja-JP"/>
+              <a:rPr lang="en-US" altLang="ja-JP"/>
               <a:t>2 </a:t>
             </a:r>
             <a:r>
-              <a:rPr kumimoji="1" lang="ja-JP" altLang="en-US"/>
+              <a:rPr lang="ja-JP" altLang="en-US"/>
               <a:t>レベル</a:t>
             </a:r>
           </a:p>
           <a:p>
             <a:pPr lvl="2"/>
             <a:r>
-              <a:rPr kumimoji="1" lang="ja-JP" altLang="en-US"/>
+              <a:rPr lang="ja-JP" altLang="en-US"/>
               <a:t>第 </a:t>
             </a:r>
             <a:r>
-              <a:rPr kumimoji="1" lang="en-US" altLang="ja-JP"/>
+              <a:rPr lang="en-US" altLang="ja-JP"/>
               <a:t>3 </a:t>
             </a:r>
             <a:r>
-              <a:rPr kumimoji="1" lang="ja-JP" altLang="en-US"/>
+              <a:rPr lang="ja-JP" altLang="en-US"/>
               <a:t>レベル</a:t>
             </a:r>
           </a:p>
           <a:p>
             <a:pPr lvl="3"/>
             <a:r>
-              <a:rPr kumimoji="1" lang="ja-JP" altLang="en-US"/>
+              <a:rPr lang="ja-JP" altLang="en-US"/>
               <a:t>第 </a:t>
             </a:r>
             <a:r>
-              <a:rPr kumimoji="1" lang="en-US" altLang="ja-JP"/>
+              <a:rPr lang="en-US" altLang="ja-JP"/>
               <a:t>4 </a:t>
             </a:r>
             <a:r>
-              <a:rPr kumimoji="1" lang="ja-JP" altLang="en-US"/>
+              <a:rPr lang="ja-JP" altLang="en-US"/>
               <a:t>レベル</a:t>
             </a:r>
           </a:p>
           <a:p>
             <a:pPr lvl="4"/>
             <a:r>
-              <a:rPr kumimoji="1" lang="ja-JP" altLang="en-US"/>
+              <a:rPr lang="ja-JP" altLang="en-US"/>
               <a:t>第 </a:t>
             </a:r>
             <a:r>
-              <a:rPr kumimoji="1" lang="en-US" altLang="ja-JP"/>
+              <a:rPr lang="en-US" altLang="ja-JP"/>
               <a:t>5 </a:t>
             </a:r>
             <a:r>
-              <a:rPr kumimoji="1" lang="ja-JP" altLang="en-US"/>
+              <a:rPr lang="ja-JP" altLang="en-US"/>
               <a:t>レベル</a:t>
             </a:r>
-          </a:p>
-        </p:txBody>
-      </p:sp>
-      <p:sp>
-        <p:nvSpPr>
-          <p:cNvPr id="4" name="コンテンツ プレースホルダー 3">
-            <a:extLst>
-              <a:ext uri="{FF2B5EF4-FFF2-40B4-BE49-F238E27FC236}">
-                <a16:creationId xmlns:a16="http://schemas.microsoft.com/office/drawing/2014/main" id="{D7D503AD-723F-D8A6-AC11-5EE124E0DF8E}"/>
-              </a:ext>
-            </a:extLst>
-          </p:cNvPr>
+            <a:endParaRPr lang="en-US" dirty="0"/>
+          </a:p>
+        </p:txBody>
+      </p:sp>
+      <p:sp>
+        <p:nvSpPr>
+          <p:cNvPr id="4" name="Content Placeholder 3"/>
           <p:cNvSpPr>
             <a:spLocks noGrp="1"/>
           </p:cNvSpPr>
@@ -1459,91 +3731,116 @@
         </p:nvSpPr>
         <p:spPr>
           <a:xfrm>
-            <a:off x="6172200" y="1825625"/>
-            <a:ext cx="5181600" cy="4351338"/>
+            <a:off x="6170612" y="2667000"/>
+            <a:ext cx="4876800" cy="3124200"/>
           </a:xfrm>
         </p:spPr>
         <p:txBody>
-          <a:bodyPr/>
-          <a:lstStyle/>
+          <a:bodyPr>
+            <a:normAutofit/>
+          </a:bodyPr>
+          <a:lstStyle>
+            <a:lvl1pPr>
+              <a:defRPr sz="1800"/>
+            </a:lvl1pPr>
+            <a:lvl2pPr>
+              <a:defRPr sz="1600"/>
+            </a:lvl2pPr>
+            <a:lvl3pPr>
+              <a:defRPr sz="1400"/>
+            </a:lvl3pPr>
+            <a:lvl4pPr>
+              <a:defRPr sz="1200"/>
+            </a:lvl4pPr>
+            <a:lvl5pPr>
+              <a:defRPr sz="1200"/>
+            </a:lvl5pPr>
+            <a:lvl6pPr>
+              <a:defRPr sz="1200"/>
+            </a:lvl6pPr>
+            <a:lvl7pPr>
+              <a:defRPr sz="1200"/>
+            </a:lvl7pPr>
+            <a:lvl8pPr>
+              <a:defRPr sz="1200"/>
+            </a:lvl8pPr>
+            <a:lvl9pPr>
+              <a:defRPr sz="1200"/>
+            </a:lvl9pPr>
+          </a:lstStyle>
           <a:p>
             <a:pPr lvl="0"/>
             <a:r>
-              <a:rPr kumimoji="1" lang="ja-JP" altLang="en-US"/>
+              <a:rPr lang="ja-JP" altLang="en-US"/>
               <a:t>マスター テキストの書式設定</a:t>
             </a:r>
           </a:p>
           <a:p>
             <a:pPr lvl="1"/>
             <a:r>
-              <a:rPr kumimoji="1" lang="ja-JP" altLang="en-US"/>
+              <a:rPr lang="ja-JP" altLang="en-US"/>
               <a:t>第 </a:t>
             </a:r>
             <a:r>
-              <a:rPr kumimoji="1" lang="en-US" altLang="ja-JP"/>
+              <a:rPr lang="en-US" altLang="ja-JP"/>
               <a:t>2 </a:t>
             </a:r>
             <a:r>
-              <a:rPr kumimoji="1" lang="ja-JP" altLang="en-US"/>
+              <a:rPr lang="ja-JP" altLang="en-US"/>
               <a:t>レベル</a:t>
             </a:r>
           </a:p>
           <a:p>
             <a:pPr lvl="2"/>
             <a:r>
-              <a:rPr kumimoji="1" lang="ja-JP" altLang="en-US"/>
+              <a:rPr lang="ja-JP" altLang="en-US"/>
               <a:t>第 </a:t>
             </a:r>
             <a:r>
-              <a:rPr kumimoji="1" lang="en-US" altLang="ja-JP"/>
+              <a:rPr lang="en-US" altLang="ja-JP"/>
               <a:t>3 </a:t>
             </a:r>
             <a:r>
-              <a:rPr kumimoji="1" lang="ja-JP" altLang="en-US"/>
+              <a:rPr lang="ja-JP" altLang="en-US"/>
               <a:t>レベル</a:t>
             </a:r>
           </a:p>
           <a:p>
             <a:pPr lvl="3"/>
             <a:r>
-              <a:rPr kumimoji="1" lang="ja-JP" altLang="en-US"/>
+              <a:rPr lang="ja-JP" altLang="en-US"/>
               <a:t>第 </a:t>
             </a:r>
             <a:r>
-              <a:rPr kumimoji="1" lang="en-US" altLang="ja-JP"/>
+              <a:rPr lang="en-US" altLang="ja-JP"/>
               <a:t>4 </a:t>
             </a:r>
             <a:r>
-              <a:rPr kumimoji="1" lang="ja-JP" altLang="en-US"/>
+              <a:rPr lang="ja-JP" altLang="en-US"/>
               <a:t>レベル</a:t>
             </a:r>
           </a:p>
           <a:p>
             <a:pPr lvl="4"/>
             <a:r>
-              <a:rPr kumimoji="1" lang="ja-JP" altLang="en-US"/>
+              <a:rPr lang="ja-JP" altLang="en-US"/>
               <a:t>第 </a:t>
             </a:r>
             <a:r>
-              <a:rPr kumimoji="1" lang="en-US" altLang="ja-JP"/>
+              <a:rPr lang="en-US" altLang="ja-JP"/>
               <a:t>5 </a:t>
             </a:r>
             <a:r>
-              <a:rPr kumimoji="1" lang="ja-JP" altLang="en-US"/>
+              <a:rPr lang="ja-JP" altLang="en-US"/>
               <a:t>レベル</a:t>
             </a:r>
-          </a:p>
-        </p:txBody>
-      </p:sp>
-      <p:sp>
-        <p:nvSpPr>
-          <p:cNvPr id="5" name="日付プレースホルダー 4">
-            <a:extLst>
-              <a:ext uri="{FF2B5EF4-FFF2-40B4-BE49-F238E27FC236}">
-                <a16:creationId xmlns:a16="http://schemas.microsoft.com/office/drawing/2014/main" id="{6AC042CD-8B58-6C9E-662F-E88DF42EAEB3}"/>
-              </a:ext>
-            </a:extLst>
-          </p:cNvPr>
+            <a:endParaRPr lang="en-US" dirty="0"/>
+          </a:p>
+        </p:txBody>
+      </p:sp>
+      <p:sp>
+        <p:nvSpPr>
+          <p:cNvPr id="5" name="Date Placeholder 4"/>
           <p:cNvSpPr>
             <a:spLocks noGrp="1"/>
           </p:cNvSpPr>
@@ -1558,7 +3855,7 @@
           <a:p>
             <a:fld id="{F7C697B7-400A-462C-9925-7DE4B9466D5A}" type="datetimeFigureOut">
               <a:rPr kumimoji="1" lang="ja-JP" altLang="en-US" smtClean="0"/>
-              <a:t>2026/7/1</a:t>
+              <a:t>2026/7/6</a:t>
             </a:fld>
             <a:endParaRPr kumimoji="1" lang="ja-JP" altLang="en-US"/>
           </a:p>
@@ -1566,13 +3863,7 @@
       </p:sp>
       <p:sp>
         <p:nvSpPr>
-          <p:cNvPr id="6" name="フッター プレースホルダー 5">
-            <a:extLst>
-              <a:ext uri="{FF2B5EF4-FFF2-40B4-BE49-F238E27FC236}">
-                <a16:creationId xmlns:a16="http://schemas.microsoft.com/office/drawing/2014/main" id="{E4CACB4D-16F9-3184-3BE5-6617FE976E23}"/>
-              </a:ext>
-            </a:extLst>
-          </p:cNvPr>
+          <p:cNvPr id="6" name="Footer Placeholder 5"/>
           <p:cNvSpPr>
             <a:spLocks noGrp="1"/>
           </p:cNvSpPr>
@@ -1591,13 +3882,7 @@
       </p:sp>
       <p:sp>
         <p:nvSpPr>
-          <p:cNvPr id="7" name="スライド番号プレースホルダー 6">
-            <a:extLst>
-              <a:ext uri="{FF2B5EF4-FFF2-40B4-BE49-F238E27FC236}">
-                <a16:creationId xmlns:a16="http://schemas.microsoft.com/office/drawing/2014/main" id="{B064847F-54B1-DE84-2E9B-760FBEA0DFAC}"/>
-              </a:ext>
-            </a:extLst>
-          </p:cNvPr>
+          <p:cNvPr id="7" name="Slide Number Placeholder 6"/>
           <p:cNvSpPr>
             <a:spLocks noGrp="1"/>
           </p:cNvSpPr>
@@ -1621,7 +3906,7 @@
     </p:spTree>
     <p:extLst>
       <p:ext uri="{BB962C8B-B14F-4D97-AF65-F5344CB8AC3E}">
-        <p14:creationId xmlns:p14="http://schemas.microsoft.com/office/powerpoint/2010/main" val="75284320"/>
+        <p14:creationId xmlns:p14="http://schemas.microsoft.com/office/powerpoint/2010/main" val="2203080655"/>
       </p:ext>
     </p:extLst>
   </p:cSld>
@@ -1650,65 +3935,55 @@
       </p:grpSpPr>
       <p:sp>
         <p:nvSpPr>
-          <p:cNvPr id="2" name="タイトル 1">
-            <a:extLst>
-              <a:ext uri="{FF2B5EF4-FFF2-40B4-BE49-F238E27FC236}">
-                <a16:creationId xmlns:a16="http://schemas.microsoft.com/office/drawing/2014/main" id="{4782A30F-FFAC-4D1E-23A1-699E123599FD}"/>
-              </a:ext>
-            </a:extLst>
-          </p:cNvPr>
+          <p:cNvPr id="2" name="Title 1"/>
           <p:cNvSpPr>
             <a:spLocks noGrp="1"/>
           </p:cNvSpPr>
           <p:nvPr>
             <p:ph type="title"/>
+          </p:nvPr>
+        </p:nvSpPr>
+        <p:spPr/>
+        <p:txBody>
+          <a:bodyPr/>
+          <a:lstStyle>
+            <a:lvl1pPr>
+              <a:defRPr/>
+            </a:lvl1pPr>
+          </a:lstStyle>
+          <a:p>
+            <a:r>
+              <a:rPr lang="ja-JP" altLang="en-US"/>
+              <a:t>マスター タイトルの書式設定</a:t>
+            </a:r>
+            <a:endParaRPr lang="en-US" dirty="0"/>
+          </a:p>
+        </p:txBody>
+      </p:sp>
+      <p:sp>
+        <p:nvSpPr>
+          <p:cNvPr id="3" name="Text Placeholder 2"/>
+          <p:cNvSpPr>
+            <a:spLocks noGrp="1"/>
+          </p:cNvSpPr>
+          <p:nvPr>
+            <p:ph type="body" idx="1"/>
           </p:nvPr>
         </p:nvSpPr>
         <p:spPr>
           <a:xfrm>
-            <a:off x="839788" y="365125"/>
-            <a:ext cx="10515600" cy="1325563"/>
+            <a:off x="1429280" y="2658533"/>
+            <a:ext cx="4588931" cy="576262"/>
           </a:xfrm>
         </p:spPr>
         <p:txBody>
-          <a:bodyPr/>
-          <a:lstStyle/>
-          <a:p>
-            <a:r>
-              <a:rPr kumimoji="1" lang="ja-JP" altLang="en-US"/>
-              <a:t>マスター タイトルの書式設定</a:t>
-            </a:r>
-          </a:p>
-        </p:txBody>
-      </p:sp>
-      <p:sp>
-        <p:nvSpPr>
-          <p:cNvPr id="3" name="テキスト プレースホルダー 2">
-            <a:extLst>
-              <a:ext uri="{FF2B5EF4-FFF2-40B4-BE49-F238E27FC236}">
-                <a16:creationId xmlns:a16="http://schemas.microsoft.com/office/drawing/2014/main" id="{982F0DF8-1C7F-8CA0-3931-F81F74D3553F}"/>
-              </a:ext>
-            </a:extLst>
-          </p:cNvPr>
-          <p:cNvSpPr>
-            <a:spLocks noGrp="1"/>
-          </p:cNvSpPr>
-          <p:nvPr>
-            <p:ph type="body" idx="1"/>
-          </p:nvPr>
-        </p:nvSpPr>
-        <p:spPr>
-          <a:xfrm>
-            <a:off x="839788" y="1681163"/>
-            <a:ext cx="5157787" cy="823912"/>
-          </a:xfrm>
-        </p:spPr>
-        <p:txBody>
-          <a:bodyPr anchor="b"/>
+          <a:bodyPr anchor="b">
+            <a:noAutofit/>
+          </a:bodyPr>
           <a:lstStyle>
             <a:lvl1pPr marL="0" indent="0">
               <a:buNone/>
-              <a:defRPr sz="2400" b="1"/>
+              <a:defRPr sz="2800" b="0"/>
             </a:lvl1pPr>
             <a:lvl2pPr marL="457200" indent="0">
               <a:buNone/>
@@ -1746,7 +4021,7 @@
           <a:p>
             <a:pPr lvl="0"/>
             <a:r>
-              <a:rPr kumimoji="1" lang="ja-JP" altLang="en-US"/>
+              <a:rPr lang="ja-JP" altLang="en-US"/>
               <a:t>マスター テキストの書式設定</a:t>
             </a:r>
           </a:p>
@@ -1754,13 +4029,7 @@
       </p:sp>
       <p:sp>
         <p:nvSpPr>
-          <p:cNvPr id="4" name="コンテンツ プレースホルダー 3">
-            <a:extLst>
-              <a:ext uri="{FF2B5EF4-FFF2-40B4-BE49-F238E27FC236}">
-                <a16:creationId xmlns:a16="http://schemas.microsoft.com/office/drawing/2014/main" id="{6C09625B-451C-DB20-F81F-68ABC5ADD5DE}"/>
-              </a:ext>
-            </a:extLst>
-          </p:cNvPr>
+          <p:cNvPr id="4" name="Content Placeholder 3"/>
           <p:cNvSpPr>
             <a:spLocks noGrp="1"/>
           </p:cNvSpPr>
@@ -1770,91 +4039,116 @@
         </p:nvSpPr>
         <p:spPr>
           <a:xfrm>
-            <a:off x="839788" y="2505075"/>
-            <a:ext cx="5157787" cy="3684588"/>
+            <a:off x="1141412" y="3243262"/>
+            <a:ext cx="4876800" cy="2547937"/>
           </a:xfrm>
         </p:spPr>
         <p:txBody>
-          <a:bodyPr/>
-          <a:lstStyle/>
+          <a:bodyPr anchor="t">
+            <a:normAutofit/>
+          </a:bodyPr>
+          <a:lstStyle>
+            <a:lvl1pPr>
+              <a:defRPr sz="1800"/>
+            </a:lvl1pPr>
+            <a:lvl2pPr>
+              <a:defRPr sz="1600"/>
+            </a:lvl2pPr>
+            <a:lvl3pPr>
+              <a:defRPr sz="1400"/>
+            </a:lvl3pPr>
+            <a:lvl4pPr>
+              <a:defRPr sz="1200"/>
+            </a:lvl4pPr>
+            <a:lvl5pPr>
+              <a:defRPr sz="1200"/>
+            </a:lvl5pPr>
+            <a:lvl6pPr>
+              <a:defRPr sz="1200"/>
+            </a:lvl6pPr>
+            <a:lvl7pPr>
+              <a:defRPr sz="1200"/>
+            </a:lvl7pPr>
+            <a:lvl8pPr>
+              <a:defRPr sz="1200"/>
+            </a:lvl8pPr>
+            <a:lvl9pPr>
+              <a:defRPr sz="1200"/>
+            </a:lvl9pPr>
+          </a:lstStyle>
           <a:p>
             <a:pPr lvl="0"/>
             <a:r>
-              <a:rPr kumimoji="1" lang="ja-JP" altLang="en-US"/>
+              <a:rPr lang="ja-JP" altLang="en-US"/>
               <a:t>マスター テキストの書式設定</a:t>
             </a:r>
           </a:p>
           <a:p>
             <a:pPr lvl="1"/>
             <a:r>
-              <a:rPr kumimoji="1" lang="ja-JP" altLang="en-US"/>
+              <a:rPr lang="ja-JP" altLang="en-US"/>
               <a:t>第 </a:t>
             </a:r>
             <a:r>
-              <a:rPr kumimoji="1" lang="en-US" altLang="ja-JP"/>
+              <a:rPr lang="en-US" altLang="ja-JP"/>
               <a:t>2 </a:t>
             </a:r>
             <a:r>
-              <a:rPr kumimoji="1" lang="ja-JP" altLang="en-US"/>
+              <a:rPr lang="ja-JP" altLang="en-US"/>
               <a:t>レベル</a:t>
             </a:r>
           </a:p>
           <a:p>
             <a:pPr lvl="2"/>
             <a:r>
-              <a:rPr kumimoji="1" lang="ja-JP" altLang="en-US"/>
+              <a:rPr lang="ja-JP" altLang="en-US"/>
               <a:t>第 </a:t>
             </a:r>
             <a:r>
-              <a:rPr kumimoji="1" lang="en-US" altLang="ja-JP"/>
+              <a:rPr lang="en-US" altLang="ja-JP"/>
               <a:t>3 </a:t>
             </a:r>
             <a:r>
-              <a:rPr kumimoji="1" lang="ja-JP" altLang="en-US"/>
+              <a:rPr lang="ja-JP" altLang="en-US"/>
               <a:t>レベル</a:t>
             </a:r>
           </a:p>
           <a:p>
             <a:pPr lvl="3"/>
             <a:r>
-              <a:rPr kumimoji="1" lang="ja-JP" altLang="en-US"/>
+              <a:rPr lang="ja-JP" altLang="en-US"/>
               <a:t>第 </a:t>
             </a:r>
             <a:r>
-              <a:rPr kumimoji="1" lang="en-US" altLang="ja-JP"/>
+              <a:rPr lang="en-US" altLang="ja-JP"/>
               <a:t>4 </a:t>
             </a:r>
             <a:r>
-              <a:rPr kumimoji="1" lang="ja-JP" altLang="en-US"/>
+              <a:rPr lang="ja-JP" altLang="en-US"/>
               <a:t>レベル</a:t>
             </a:r>
           </a:p>
           <a:p>
             <a:pPr lvl="4"/>
             <a:r>
-              <a:rPr kumimoji="1" lang="ja-JP" altLang="en-US"/>
+              <a:rPr lang="ja-JP" altLang="en-US"/>
               <a:t>第 </a:t>
             </a:r>
             <a:r>
-              <a:rPr kumimoji="1" lang="en-US" altLang="ja-JP"/>
+              <a:rPr lang="en-US" altLang="ja-JP"/>
               <a:t>5 </a:t>
             </a:r>
             <a:r>
-              <a:rPr kumimoji="1" lang="ja-JP" altLang="en-US"/>
+              <a:rPr lang="ja-JP" altLang="en-US"/>
               <a:t>レベル</a:t>
             </a:r>
-          </a:p>
-        </p:txBody>
-      </p:sp>
-      <p:sp>
-        <p:nvSpPr>
-          <p:cNvPr id="5" name="テキスト プレースホルダー 4">
-            <a:extLst>
-              <a:ext uri="{FF2B5EF4-FFF2-40B4-BE49-F238E27FC236}">
-                <a16:creationId xmlns:a16="http://schemas.microsoft.com/office/drawing/2014/main" id="{74107627-6D18-CFBA-63C1-58568FB8D395}"/>
-              </a:ext>
-            </a:extLst>
-          </p:cNvPr>
+            <a:endParaRPr lang="en-US" dirty="0"/>
+          </a:p>
+        </p:txBody>
+      </p:sp>
+      <p:sp>
+        <p:nvSpPr>
+          <p:cNvPr id="5" name="Text Placeholder 4"/>
           <p:cNvSpPr>
             <a:spLocks noGrp="1"/>
           </p:cNvSpPr>
@@ -1864,16 +4158,18 @@
         </p:nvSpPr>
         <p:spPr>
           <a:xfrm>
-            <a:off x="6172200" y="1681163"/>
-            <a:ext cx="5183188" cy="823912"/>
+            <a:off x="6443133" y="2667000"/>
+            <a:ext cx="4604280" cy="576262"/>
           </a:xfrm>
         </p:spPr>
         <p:txBody>
-          <a:bodyPr anchor="b"/>
+          <a:bodyPr anchor="b">
+            <a:noAutofit/>
+          </a:bodyPr>
           <a:lstStyle>
             <a:lvl1pPr marL="0" indent="0">
               <a:buNone/>
-              <a:defRPr sz="2400" b="1"/>
+              <a:defRPr sz="2800" b="0"/>
             </a:lvl1pPr>
             <a:lvl2pPr marL="457200" indent="0">
               <a:buNone/>
@@ -1911,7 +4207,7 @@
           <a:p>
             <a:pPr lvl="0"/>
             <a:r>
-              <a:rPr kumimoji="1" lang="ja-JP" altLang="en-US"/>
+              <a:rPr lang="ja-JP" altLang="en-US"/>
               <a:t>マスター テキストの書式設定</a:t>
             </a:r>
           </a:p>
@@ -1919,13 +4215,7 @@
       </p:sp>
       <p:sp>
         <p:nvSpPr>
-          <p:cNvPr id="6" name="コンテンツ プレースホルダー 5">
-            <a:extLst>
-              <a:ext uri="{FF2B5EF4-FFF2-40B4-BE49-F238E27FC236}">
-                <a16:creationId xmlns:a16="http://schemas.microsoft.com/office/drawing/2014/main" id="{B3EEE3E7-7010-81D3-382C-2A39B206C6BD}"/>
-              </a:ext>
-            </a:extLst>
-          </p:cNvPr>
+          <p:cNvPr id="6" name="Content Placeholder 5"/>
           <p:cNvSpPr>
             <a:spLocks noGrp="1"/>
           </p:cNvSpPr>
@@ -1935,91 +4225,116 @@
         </p:nvSpPr>
         <p:spPr>
           <a:xfrm>
-            <a:off x="6172200" y="2505075"/>
-            <a:ext cx="5183188" cy="3684588"/>
+            <a:off x="6170612" y="3243262"/>
+            <a:ext cx="4876801" cy="2547937"/>
           </a:xfrm>
         </p:spPr>
         <p:txBody>
-          <a:bodyPr/>
-          <a:lstStyle/>
+          <a:bodyPr anchor="t">
+            <a:normAutofit/>
+          </a:bodyPr>
+          <a:lstStyle>
+            <a:lvl1pPr>
+              <a:defRPr sz="1800"/>
+            </a:lvl1pPr>
+            <a:lvl2pPr>
+              <a:defRPr sz="1600"/>
+            </a:lvl2pPr>
+            <a:lvl3pPr>
+              <a:defRPr sz="1400"/>
+            </a:lvl3pPr>
+            <a:lvl4pPr>
+              <a:defRPr sz="1200"/>
+            </a:lvl4pPr>
+            <a:lvl5pPr>
+              <a:defRPr sz="1200"/>
+            </a:lvl5pPr>
+            <a:lvl6pPr>
+              <a:defRPr sz="1200"/>
+            </a:lvl6pPr>
+            <a:lvl7pPr>
+              <a:defRPr sz="1200"/>
+            </a:lvl7pPr>
+            <a:lvl8pPr>
+              <a:defRPr sz="1200"/>
+            </a:lvl8pPr>
+            <a:lvl9pPr>
+              <a:defRPr sz="1200"/>
+            </a:lvl9pPr>
+          </a:lstStyle>
           <a:p>
             <a:pPr lvl="0"/>
             <a:r>
-              <a:rPr kumimoji="1" lang="ja-JP" altLang="en-US"/>
+              <a:rPr lang="ja-JP" altLang="en-US"/>
               <a:t>マスター テキストの書式設定</a:t>
             </a:r>
           </a:p>
           <a:p>
             <a:pPr lvl="1"/>
             <a:r>
-              <a:rPr kumimoji="1" lang="ja-JP" altLang="en-US"/>
+              <a:rPr lang="ja-JP" altLang="en-US"/>
               <a:t>第 </a:t>
             </a:r>
             <a:r>
-              <a:rPr kumimoji="1" lang="en-US" altLang="ja-JP"/>
+              <a:rPr lang="en-US" altLang="ja-JP"/>
               <a:t>2 </a:t>
             </a:r>
             <a:r>
-              <a:rPr kumimoji="1" lang="ja-JP" altLang="en-US"/>
+              <a:rPr lang="ja-JP" altLang="en-US"/>
               <a:t>レベル</a:t>
             </a:r>
           </a:p>
           <a:p>
             <a:pPr lvl="2"/>
             <a:r>
-              <a:rPr kumimoji="1" lang="ja-JP" altLang="en-US"/>
+              <a:rPr lang="ja-JP" altLang="en-US"/>
               <a:t>第 </a:t>
             </a:r>
             <a:r>
-              <a:rPr kumimoji="1" lang="en-US" altLang="ja-JP"/>
+              <a:rPr lang="en-US" altLang="ja-JP"/>
               <a:t>3 </a:t>
             </a:r>
             <a:r>
-              <a:rPr kumimoji="1" lang="ja-JP" altLang="en-US"/>
+              <a:rPr lang="ja-JP" altLang="en-US"/>
               <a:t>レベル</a:t>
             </a:r>
           </a:p>
           <a:p>
             <a:pPr lvl="3"/>
             <a:r>
-              <a:rPr kumimoji="1" lang="ja-JP" altLang="en-US"/>
+              <a:rPr lang="ja-JP" altLang="en-US"/>
               <a:t>第 </a:t>
             </a:r>
             <a:r>
-              <a:rPr kumimoji="1" lang="en-US" altLang="ja-JP"/>
+              <a:rPr lang="en-US" altLang="ja-JP"/>
               <a:t>4 </a:t>
             </a:r>
             <a:r>
-              <a:rPr kumimoji="1" lang="ja-JP" altLang="en-US"/>
+              <a:rPr lang="ja-JP" altLang="en-US"/>
               <a:t>レベル</a:t>
             </a:r>
           </a:p>
           <a:p>
             <a:pPr lvl="4"/>
             <a:r>
-              <a:rPr kumimoji="1" lang="ja-JP" altLang="en-US"/>
+              <a:rPr lang="ja-JP" altLang="en-US"/>
               <a:t>第 </a:t>
             </a:r>
             <a:r>
-              <a:rPr kumimoji="1" lang="en-US" altLang="ja-JP"/>
+              <a:rPr lang="en-US" altLang="ja-JP"/>
               <a:t>5 </a:t>
             </a:r>
             <a:r>
-              <a:rPr kumimoji="1" lang="ja-JP" altLang="en-US"/>
+              <a:rPr lang="ja-JP" altLang="en-US"/>
               <a:t>レベル</a:t>
             </a:r>
-          </a:p>
-        </p:txBody>
-      </p:sp>
-      <p:sp>
-        <p:nvSpPr>
-          <p:cNvPr id="7" name="日付プレースホルダー 6">
-            <a:extLst>
-              <a:ext uri="{FF2B5EF4-FFF2-40B4-BE49-F238E27FC236}">
-                <a16:creationId xmlns:a16="http://schemas.microsoft.com/office/drawing/2014/main" id="{2E5344B9-A773-B2E5-09C2-B567FBC8A0DE}"/>
-              </a:ext>
-            </a:extLst>
-          </p:cNvPr>
+            <a:endParaRPr lang="en-US" dirty="0"/>
+          </a:p>
+        </p:txBody>
+      </p:sp>
+      <p:sp>
+        <p:nvSpPr>
+          <p:cNvPr id="7" name="Date Placeholder 6"/>
           <p:cNvSpPr>
             <a:spLocks noGrp="1"/>
           </p:cNvSpPr>
@@ -2034,7 +4349,7 @@
           <a:p>
             <a:fld id="{F7C697B7-400A-462C-9925-7DE4B9466D5A}" type="datetimeFigureOut">
               <a:rPr kumimoji="1" lang="ja-JP" altLang="en-US" smtClean="0"/>
-              <a:t>2026/7/1</a:t>
+              <a:t>2026/7/6</a:t>
             </a:fld>
             <a:endParaRPr kumimoji="1" lang="ja-JP" altLang="en-US"/>
           </a:p>
@@ -2042,13 +4357,7 @@
       </p:sp>
       <p:sp>
         <p:nvSpPr>
-          <p:cNvPr id="8" name="フッター プレースホルダー 7">
-            <a:extLst>
-              <a:ext uri="{FF2B5EF4-FFF2-40B4-BE49-F238E27FC236}">
-                <a16:creationId xmlns:a16="http://schemas.microsoft.com/office/drawing/2014/main" id="{711549E4-4430-0D12-E024-913A06615847}"/>
-              </a:ext>
-            </a:extLst>
-          </p:cNvPr>
+          <p:cNvPr id="8" name="Footer Placeholder 7"/>
           <p:cNvSpPr>
             <a:spLocks noGrp="1"/>
           </p:cNvSpPr>
@@ -2067,13 +4376,7 @@
       </p:sp>
       <p:sp>
         <p:nvSpPr>
-          <p:cNvPr id="9" name="スライド番号プレースホルダー 8">
-            <a:extLst>
-              <a:ext uri="{FF2B5EF4-FFF2-40B4-BE49-F238E27FC236}">
-                <a16:creationId xmlns:a16="http://schemas.microsoft.com/office/drawing/2014/main" id="{AD5C3B4E-023F-A85E-239F-79F4A74DDAFF}"/>
-              </a:ext>
-            </a:extLst>
-          </p:cNvPr>
+          <p:cNvPr id="9" name="Slide Number Placeholder 8"/>
           <p:cNvSpPr>
             <a:spLocks noGrp="1"/>
           </p:cNvSpPr>
@@ -2097,7 +4400,7 @@
     </p:spTree>
     <p:extLst>
       <p:ext uri="{BB962C8B-B14F-4D97-AF65-F5344CB8AC3E}">
-        <p14:creationId xmlns:p14="http://schemas.microsoft.com/office/powerpoint/2010/main" val="289352580"/>
+        <p14:creationId xmlns:p14="http://schemas.microsoft.com/office/powerpoint/2010/main" val="2019553470"/>
       </p:ext>
     </p:extLst>
   </p:cSld>
@@ -2126,13 +4429,7 @@
       </p:grpSpPr>
       <p:sp>
         <p:nvSpPr>
-          <p:cNvPr id="2" name="タイトル 1">
-            <a:extLst>
-              <a:ext uri="{FF2B5EF4-FFF2-40B4-BE49-F238E27FC236}">
-                <a16:creationId xmlns:a16="http://schemas.microsoft.com/office/drawing/2014/main" id="{5C929193-5211-3131-AFB0-98F2C9F72CD7}"/>
-              </a:ext>
-            </a:extLst>
-          </p:cNvPr>
+          <p:cNvPr id="2" name="Title 1"/>
           <p:cNvSpPr>
             <a:spLocks noGrp="1"/>
           </p:cNvSpPr>
@@ -2146,21 +4443,16 @@
           <a:lstStyle/>
           <a:p>
             <a:r>
-              <a:rPr kumimoji="1" lang="ja-JP" altLang="en-US"/>
+              <a:rPr lang="ja-JP" altLang="en-US"/>
               <a:t>マスター タイトルの書式設定</a:t>
             </a:r>
-          </a:p>
-        </p:txBody>
-      </p:sp>
-      <p:sp>
-        <p:nvSpPr>
-          <p:cNvPr id="3" name="日付プレースホルダー 2">
-            <a:extLst>
-              <a:ext uri="{FF2B5EF4-FFF2-40B4-BE49-F238E27FC236}">
-                <a16:creationId xmlns:a16="http://schemas.microsoft.com/office/drawing/2014/main" id="{40153AB8-D6ED-EFA4-4F6F-BA86903D7085}"/>
-              </a:ext>
-            </a:extLst>
-          </p:cNvPr>
+            <a:endParaRPr lang="en-US" dirty="0"/>
+          </a:p>
+        </p:txBody>
+      </p:sp>
+      <p:sp>
+        <p:nvSpPr>
+          <p:cNvPr id="3" name="Date Placeholder 2"/>
           <p:cNvSpPr>
             <a:spLocks noGrp="1"/>
           </p:cNvSpPr>
@@ -2175,7 +4467,7 @@
           <a:p>
             <a:fld id="{F7C697B7-400A-462C-9925-7DE4B9466D5A}" type="datetimeFigureOut">
               <a:rPr kumimoji="1" lang="ja-JP" altLang="en-US" smtClean="0"/>
-              <a:t>2026/7/1</a:t>
+              <a:t>2026/7/6</a:t>
             </a:fld>
             <a:endParaRPr kumimoji="1" lang="ja-JP" altLang="en-US"/>
           </a:p>
@@ -2183,13 +4475,7 @@
       </p:sp>
       <p:sp>
         <p:nvSpPr>
-          <p:cNvPr id="4" name="フッター プレースホルダー 3">
-            <a:extLst>
-              <a:ext uri="{FF2B5EF4-FFF2-40B4-BE49-F238E27FC236}">
-                <a16:creationId xmlns:a16="http://schemas.microsoft.com/office/drawing/2014/main" id="{5D53CBC5-DF82-24D4-1C4B-A421264F996E}"/>
-              </a:ext>
-            </a:extLst>
-          </p:cNvPr>
+          <p:cNvPr id="4" name="Footer Placeholder 3"/>
           <p:cNvSpPr>
             <a:spLocks noGrp="1"/>
           </p:cNvSpPr>
@@ -2208,13 +4494,7 @@
       </p:sp>
       <p:sp>
         <p:nvSpPr>
-          <p:cNvPr id="5" name="スライド番号プレースホルダー 4">
-            <a:extLst>
-              <a:ext uri="{FF2B5EF4-FFF2-40B4-BE49-F238E27FC236}">
-                <a16:creationId xmlns:a16="http://schemas.microsoft.com/office/drawing/2014/main" id="{40825039-EE7A-DCED-2970-00628E2FF290}"/>
-              </a:ext>
-            </a:extLst>
-          </p:cNvPr>
+          <p:cNvPr id="5" name="Slide Number Placeholder 4"/>
           <p:cNvSpPr>
             <a:spLocks noGrp="1"/>
           </p:cNvSpPr>
@@ -2238,7 +4518,7 @@
     </p:spTree>
     <p:extLst>
       <p:ext uri="{BB962C8B-B14F-4D97-AF65-F5344CB8AC3E}">
-        <p14:creationId xmlns:p14="http://schemas.microsoft.com/office/powerpoint/2010/main" val="1198142188"/>
+        <p14:creationId xmlns:p14="http://schemas.microsoft.com/office/powerpoint/2010/main" val="2452312970"/>
       </p:ext>
     </p:extLst>
   </p:cSld>
@@ -2267,13 +4547,7 @@
       </p:grpSpPr>
       <p:sp>
         <p:nvSpPr>
-          <p:cNvPr id="2" name="日付プレースホルダー 1">
-            <a:extLst>
-              <a:ext uri="{FF2B5EF4-FFF2-40B4-BE49-F238E27FC236}">
-                <a16:creationId xmlns:a16="http://schemas.microsoft.com/office/drawing/2014/main" id="{A0EC15D3-988C-8D65-EA3E-A9B66A71AA88}"/>
-              </a:ext>
-            </a:extLst>
-          </p:cNvPr>
+          <p:cNvPr id="2" name="Date Placeholder 1"/>
           <p:cNvSpPr>
             <a:spLocks noGrp="1"/>
           </p:cNvSpPr>
@@ -2288,7 +4562,7 @@
           <a:p>
             <a:fld id="{F7C697B7-400A-462C-9925-7DE4B9466D5A}" type="datetimeFigureOut">
               <a:rPr kumimoji="1" lang="ja-JP" altLang="en-US" smtClean="0"/>
-              <a:t>2026/7/1</a:t>
+              <a:t>2026/7/6</a:t>
             </a:fld>
             <a:endParaRPr kumimoji="1" lang="ja-JP" altLang="en-US"/>
           </a:p>
@@ -2296,13 +4570,7 @@
       </p:sp>
       <p:sp>
         <p:nvSpPr>
-          <p:cNvPr id="3" name="フッター プレースホルダー 2">
-            <a:extLst>
-              <a:ext uri="{FF2B5EF4-FFF2-40B4-BE49-F238E27FC236}">
-                <a16:creationId xmlns:a16="http://schemas.microsoft.com/office/drawing/2014/main" id="{73B6D1EB-8A0A-EEE4-9190-12AB23B44638}"/>
-              </a:ext>
-            </a:extLst>
-          </p:cNvPr>
+          <p:cNvPr id="3" name="Footer Placeholder 2"/>
           <p:cNvSpPr>
             <a:spLocks noGrp="1"/>
           </p:cNvSpPr>
@@ -2321,13 +4589,7 @@
       </p:sp>
       <p:sp>
         <p:nvSpPr>
-          <p:cNvPr id="4" name="スライド番号プレースホルダー 3">
-            <a:extLst>
-              <a:ext uri="{FF2B5EF4-FFF2-40B4-BE49-F238E27FC236}">
-                <a16:creationId xmlns:a16="http://schemas.microsoft.com/office/drawing/2014/main" id="{DFD23EBD-4FDD-5654-4318-C78B349EA8E4}"/>
-              </a:ext>
-            </a:extLst>
-          </p:cNvPr>
+          <p:cNvPr id="4" name="Slide Number Placeholder 3"/>
           <p:cNvSpPr>
             <a:spLocks noGrp="1"/>
           </p:cNvSpPr>
@@ -2351,7 +4613,7 @@
     </p:spTree>
     <p:extLst>
       <p:ext uri="{BB962C8B-B14F-4D97-AF65-F5344CB8AC3E}">
-        <p14:creationId xmlns:p14="http://schemas.microsoft.com/office/powerpoint/2010/main" val="1302079519"/>
+        <p14:creationId xmlns:p14="http://schemas.microsoft.com/office/powerpoint/2010/main" val="2542567577"/>
       </p:ext>
     </p:extLst>
   </p:cSld>
@@ -2380,13 +4642,7 @@
       </p:grpSpPr>
       <p:sp>
         <p:nvSpPr>
-          <p:cNvPr id="2" name="タイトル 1">
-            <a:extLst>
-              <a:ext uri="{FF2B5EF4-FFF2-40B4-BE49-F238E27FC236}">
-                <a16:creationId xmlns:a16="http://schemas.microsoft.com/office/drawing/2014/main" id="{31F189BE-122B-F8F7-CC5C-B18AC3346D19}"/>
-              </a:ext>
-            </a:extLst>
-          </p:cNvPr>
+          <p:cNvPr id="2" name="Title 1"/>
           <p:cNvSpPr>
             <a:spLocks noGrp="1"/>
           </p:cNvSpPr>
@@ -2396,171 +4652,167 @@
         </p:nvSpPr>
         <p:spPr>
           <a:xfrm>
-            <a:off x="839788" y="457200"/>
-            <a:ext cx="3932237" cy="1600200"/>
+            <a:off x="1141411" y="1600200"/>
+            <a:ext cx="3549121" cy="1371600"/>
           </a:xfrm>
         </p:spPr>
         <p:txBody>
-          <a:bodyPr anchor="b"/>
+          <a:bodyPr anchor="b">
+            <a:normAutofit/>
+          </a:bodyPr>
+          <a:lstStyle>
+            <a:lvl1pPr algn="l">
+              <a:defRPr sz="2400" b="0"/>
+            </a:lvl1pPr>
+          </a:lstStyle>
+          <a:p>
+            <a:r>
+              <a:rPr lang="ja-JP" altLang="en-US"/>
+              <a:t>マスター タイトルの書式設定</a:t>
+            </a:r>
+            <a:endParaRPr lang="en-US" dirty="0"/>
+          </a:p>
+        </p:txBody>
+      </p:sp>
+      <p:sp>
+        <p:nvSpPr>
+          <p:cNvPr id="3" name="Content Placeholder 2"/>
+          <p:cNvSpPr>
+            <a:spLocks noGrp="1"/>
+          </p:cNvSpPr>
+          <p:nvPr>
+            <p:ph idx="1"/>
+          </p:nvPr>
+        </p:nvSpPr>
+        <p:spPr>
+          <a:xfrm>
+            <a:off x="5103812" y="609601"/>
+            <a:ext cx="5943601" cy="5181600"/>
+          </a:xfrm>
+        </p:spPr>
+        <p:txBody>
+          <a:bodyPr anchor="ctr">
+            <a:normAutofit/>
+          </a:bodyPr>
           <a:lstStyle>
             <a:lvl1pPr>
-              <a:defRPr sz="3200"/>
+              <a:defRPr sz="2000"/>
             </a:lvl1pPr>
+            <a:lvl2pPr>
+              <a:defRPr sz="1800"/>
+            </a:lvl2pPr>
+            <a:lvl3pPr>
+              <a:defRPr sz="1600"/>
+            </a:lvl3pPr>
+            <a:lvl4pPr>
+              <a:defRPr sz="1400"/>
+            </a:lvl4pPr>
+            <a:lvl5pPr>
+              <a:defRPr sz="1400"/>
+            </a:lvl5pPr>
+            <a:lvl6pPr>
+              <a:defRPr sz="1400"/>
+            </a:lvl6pPr>
+            <a:lvl7pPr>
+              <a:defRPr sz="1400"/>
+            </a:lvl7pPr>
+            <a:lvl8pPr>
+              <a:defRPr sz="1400"/>
+            </a:lvl8pPr>
+            <a:lvl9pPr>
+              <a:defRPr sz="1400"/>
+            </a:lvl9pPr>
           </a:lstStyle>
           <a:p>
-            <a:r>
-              <a:rPr kumimoji="1" lang="ja-JP" altLang="en-US"/>
-              <a:t>マスター タイトルの書式設定</a:t>
-            </a:r>
-          </a:p>
-        </p:txBody>
-      </p:sp>
-      <p:sp>
-        <p:nvSpPr>
-          <p:cNvPr id="3" name="コンテンツ プレースホルダー 2">
-            <a:extLst>
-              <a:ext uri="{FF2B5EF4-FFF2-40B4-BE49-F238E27FC236}">
-                <a16:creationId xmlns:a16="http://schemas.microsoft.com/office/drawing/2014/main" id="{91A65D8D-925A-43C4-32A1-E7CAE4F5FE07}"/>
-              </a:ext>
-            </a:extLst>
-          </p:cNvPr>
-          <p:cNvSpPr>
-            <a:spLocks noGrp="1"/>
-          </p:cNvSpPr>
-          <p:nvPr>
-            <p:ph idx="1"/>
+            <a:pPr lvl="0"/>
+            <a:r>
+              <a:rPr lang="ja-JP" altLang="en-US"/>
+              <a:t>マスター テキストの書式設定</a:t>
+            </a:r>
+          </a:p>
+          <a:p>
+            <a:pPr lvl="1"/>
+            <a:r>
+              <a:rPr lang="ja-JP" altLang="en-US"/>
+              <a:t>第 </a:t>
+            </a:r>
+            <a:r>
+              <a:rPr lang="en-US" altLang="ja-JP"/>
+              <a:t>2 </a:t>
+            </a:r>
+            <a:r>
+              <a:rPr lang="ja-JP" altLang="en-US"/>
+              <a:t>レベル</a:t>
+            </a:r>
+          </a:p>
+          <a:p>
+            <a:pPr lvl="2"/>
+            <a:r>
+              <a:rPr lang="ja-JP" altLang="en-US"/>
+              <a:t>第 </a:t>
+            </a:r>
+            <a:r>
+              <a:rPr lang="en-US" altLang="ja-JP"/>
+              <a:t>3 </a:t>
+            </a:r>
+            <a:r>
+              <a:rPr lang="ja-JP" altLang="en-US"/>
+              <a:t>レベル</a:t>
+            </a:r>
+          </a:p>
+          <a:p>
+            <a:pPr lvl="3"/>
+            <a:r>
+              <a:rPr lang="ja-JP" altLang="en-US"/>
+              <a:t>第 </a:t>
+            </a:r>
+            <a:r>
+              <a:rPr lang="en-US" altLang="ja-JP"/>
+              <a:t>4 </a:t>
+            </a:r>
+            <a:r>
+              <a:rPr lang="ja-JP" altLang="en-US"/>
+              <a:t>レベル</a:t>
+            </a:r>
+          </a:p>
+          <a:p>
+            <a:pPr lvl="4"/>
+            <a:r>
+              <a:rPr lang="ja-JP" altLang="en-US"/>
+              <a:t>第 </a:t>
+            </a:r>
+            <a:r>
+              <a:rPr lang="en-US" altLang="ja-JP"/>
+              <a:t>5 </a:t>
+            </a:r>
+            <a:r>
+              <a:rPr lang="ja-JP" altLang="en-US"/>
+              <a:t>レベル</a:t>
+            </a:r>
+            <a:endParaRPr lang="en-US" dirty="0"/>
+          </a:p>
+        </p:txBody>
+      </p:sp>
+      <p:sp>
+        <p:nvSpPr>
+          <p:cNvPr id="4" name="Text Placeholder 3"/>
+          <p:cNvSpPr>
+            <a:spLocks noGrp="1"/>
+          </p:cNvSpPr>
+          <p:nvPr>
+            <p:ph type="body" sz="half" idx="2"/>
           </p:nvPr>
         </p:nvSpPr>
         <p:spPr>
           <a:xfrm>
-            <a:off x="5183188" y="987425"/>
-            <a:ext cx="6172200" cy="4873625"/>
+            <a:off x="1141411" y="2971800"/>
+            <a:ext cx="3549121" cy="1828800"/>
           </a:xfrm>
         </p:spPr>
         <p:txBody>
-          <a:bodyPr/>
-          <a:lstStyle>
-            <a:lvl1pPr>
-              <a:defRPr sz="3200"/>
-            </a:lvl1pPr>
-            <a:lvl2pPr>
-              <a:defRPr sz="2800"/>
-            </a:lvl2pPr>
-            <a:lvl3pPr>
-              <a:defRPr sz="2400"/>
-            </a:lvl3pPr>
-            <a:lvl4pPr>
-              <a:defRPr sz="2000"/>
-            </a:lvl4pPr>
-            <a:lvl5pPr>
-              <a:defRPr sz="2000"/>
-            </a:lvl5pPr>
-            <a:lvl6pPr>
-              <a:defRPr sz="2000"/>
-            </a:lvl6pPr>
-            <a:lvl7pPr>
-              <a:defRPr sz="2000"/>
-            </a:lvl7pPr>
-            <a:lvl8pPr>
-              <a:defRPr sz="2000"/>
-            </a:lvl8pPr>
-            <a:lvl9pPr>
-              <a:defRPr sz="2000"/>
-            </a:lvl9pPr>
-          </a:lstStyle>
-          <a:p>
-            <a:pPr lvl="0"/>
-            <a:r>
-              <a:rPr kumimoji="1" lang="ja-JP" altLang="en-US"/>
-              <a:t>マスター テキストの書式設定</a:t>
-            </a:r>
-          </a:p>
-          <a:p>
-            <a:pPr lvl="1"/>
-            <a:r>
-              <a:rPr kumimoji="1" lang="ja-JP" altLang="en-US"/>
-              <a:t>第 </a:t>
-            </a:r>
-            <a:r>
-              <a:rPr kumimoji="1" lang="en-US" altLang="ja-JP"/>
-              <a:t>2 </a:t>
-            </a:r>
-            <a:r>
-              <a:rPr kumimoji="1" lang="ja-JP" altLang="en-US"/>
-              <a:t>レベル</a:t>
-            </a:r>
-          </a:p>
-          <a:p>
-            <a:pPr lvl="2"/>
-            <a:r>
-              <a:rPr kumimoji="1" lang="ja-JP" altLang="en-US"/>
-              <a:t>第 </a:t>
-            </a:r>
-            <a:r>
-              <a:rPr kumimoji="1" lang="en-US" altLang="ja-JP"/>
-              <a:t>3 </a:t>
-            </a:r>
-            <a:r>
-              <a:rPr kumimoji="1" lang="ja-JP" altLang="en-US"/>
-              <a:t>レベル</a:t>
-            </a:r>
-          </a:p>
-          <a:p>
-            <a:pPr lvl="3"/>
-            <a:r>
-              <a:rPr kumimoji="1" lang="ja-JP" altLang="en-US"/>
-              <a:t>第 </a:t>
-            </a:r>
-            <a:r>
-              <a:rPr kumimoji="1" lang="en-US" altLang="ja-JP"/>
-              <a:t>4 </a:t>
-            </a:r>
-            <a:r>
-              <a:rPr kumimoji="1" lang="ja-JP" altLang="en-US"/>
-              <a:t>レベル</a:t>
-            </a:r>
-          </a:p>
-          <a:p>
-            <a:pPr lvl="4"/>
-            <a:r>
-              <a:rPr kumimoji="1" lang="ja-JP" altLang="en-US"/>
-              <a:t>第 </a:t>
-            </a:r>
-            <a:r>
-              <a:rPr kumimoji="1" lang="en-US" altLang="ja-JP"/>
-              <a:t>5 </a:t>
-            </a:r>
-            <a:r>
-              <a:rPr kumimoji="1" lang="ja-JP" altLang="en-US"/>
-              <a:t>レベル</a:t>
-            </a:r>
-          </a:p>
-        </p:txBody>
-      </p:sp>
-      <p:sp>
-        <p:nvSpPr>
-          <p:cNvPr id="4" name="テキスト プレースホルダー 3">
-            <a:extLst>
-              <a:ext uri="{FF2B5EF4-FFF2-40B4-BE49-F238E27FC236}">
-                <a16:creationId xmlns:a16="http://schemas.microsoft.com/office/drawing/2014/main" id="{6D47E406-F971-B17F-D331-E394AB52CD51}"/>
-              </a:ext>
-            </a:extLst>
-          </p:cNvPr>
-          <p:cNvSpPr>
-            <a:spLocks noGrp="1"/>
-          </p:cNvSpPr>
-          <p:nvPr>
-            <p:ph type="body" sz="half" idx="2"/>
-          </p:nvPr>
-        </p:nvSpPr>
-        <p:spPr>
-          <a:xfrm>
-            <a:off x="839788" y="2057400"/>
-            <a:ext cx="3932237" cy="3811588"/>
-          </a:xfrm>
-        </p:spPr>
-        <p:txBody>
-          <a:bodyPr/>
+          <a:bodyPr>
+            <a:normAutofit/>
+          </a:bodyPr>
           <a:lstStyle>
             <a:lvl1pPr marL="0" indent="0">
               <a:buNone/>
@@ -2568,41 +4820,41 @@
             </a:lvl1pPr>
             <a:lvl2pPr marL="457200" indent="0">
               <a:buNone/>
-              <a:defRPr sz="1400"/>
+              <a:defRPr sz="1200"/>
             </a:lvl2pPr>
             <a:lvl3pPr marL="914400" indent="0">
               <a:buNone/>
-              <a:defRPr sz="1200"/>
+              <a:defRPr sz="1000"/>
             </a:lvl3pPr>
             <a:lvl4pPr marL="1371600" indent="0">
               <a:buNone/>
-              <a:defRPr sz="1000"/>
+              <a:defRPr sz="900"/>
             </a:lvl4pPr>
             <a:lvl5pPr marL="1828800" indent="0">
               <a:buNone/>
-              <a:defRPr sz="1000"/>
+              <a:defRPr sz="900"/>
             </a:lvl5pPr>
             <a:lvl6pPr marL="2286000" indent="0">
               <a:buNone/>
-              <a:defRPr sz="1000"/>
+              <a:defRPr sz="900"/>
             </a:lvl6pPr>
             <a:lvl7pPr marL="2743200" indent="0">
               <a:buNone/>
-              <a:defRPr sz="1000"/>
+              <a:defRPr sz="900"/>
             </a:lvl7pPr>
             <a:lvl8pPr marL="3200400" indent="0">
               <a:buNone/>
-              <a:defRPr sz="1000"/>
+              <a:defRPr sz="900"/>
             </a:lvl8pPr>
             <a:lvl9pPr marL="3657600" indent="0">
               <a:buNone/>
-              <a:defRPr sz="1000"/>
+              <a:defRPr sz="900"/>
             </a:lvl9pPr>
           </a:lstStyle>
           <a:p>
             <a:pPr lvl="0"/>
             <a:r>
-              <a:rPr kumimoji="1" lang="ja-JP" altLang="en-US"/>
+              <a:rPr lang="ja-JP" altLang="en-US"/>
               <a:t>マスター テキストの書式設定</a:t>
             </a:r>
           </a:p>
@@ -2610,13 +4862,7 @@
       </p:sp>
       <p:sp>
         <p:nvSpPr>
-          <p:cNvPr id="5" name="日付プレースホルダー 4">
-            <a:extLst>
-              <a:ext uri="{FF2B5EF4-FFF2-40B4-BE49-F238E27FC236}">
-                <a16:creationId xmlns:a16="http://schemas.microsoft.com/office/drawing/2014/main" id="{588EF7A8-948E-588F-2585-341C5E464D01}"/>
-              </a:ext>
-            </a:extLst>
-          </p:cNvPr>
+          <p:cNvPr id="5" name="Date Placeholder 4"/>
           <p:cNvSpPr>
             <a:spLocks noGrp="1"/>
           </p:cNvSpPr>
@@ -2631,7 +4877,7 @@
           <a:p>
             <a:fld id="{F7C697B7-400A-462C-9925-7DE4B9466D5A}" type="datetimeFigureOut">
               <a:rPr kumimoji="1" lang="ja-JP" altLang="en-US" smtClean="0"/>
-              <a:t>2026/7/1</a:t>
+              <a:t>2026/7/6</a:t>
             </a:fld>
             <a:endParaRPr kumimoji="1" lang="ja-JP" altLang="en-US"/>
           </a:p>
@@ -2639,13 +4885,7 @@
       </p:sp>
       <p:sp>
         <p:nvSpPr>
-          <p:cNvPr id="6" name="フッター プレースホルダー 5">
-            <a:extLst>
-              <a:ext uri="{FF2B5EF4-FFF2-40B4-BE49-F238E27FC236}">
-                <a16:creationId xmlns:a16="http://schemas.microsoft.com/office/drawing/2014/main" id="{ABBA65A3-C499-D15E-07C9-B27CA81CCC14}"/>
-              </a:ext>
-            </a:extLst>
-          </p:cNvPr>
+          <p:cNvPr id="6" name="Footer Placeholder 5"/>
           <p:cNvSpPr>
             <a:spLocks noGrp="1"/>
           </p:cNvSpPr>
@@ -2664,13 +4904,7 @@
       </p:sp>
       <p:sp>
         <p:nvSpPr>
-          <p:cNvPr id="7" name="スライド番号プレースホルダー 6">
-            <a:extLst>
-              <a:ext uri="{FF2B5EF4-FFF2-40B4-BE49-F238E27FC236}">
-                <a16:creationId xmlns:a16="http://schemas.microsoft.com/office/drawing/2014/main" id="{04455971-AC75-2E09-5AD8-DAE901396574}"/>
-              </a:ext>
-            </a:extLst>
-          </p:cNvPr>
+          <p:cNvPr id="7" name="Slide Number Placeholder 6"/>
           <p:cNvSpPr>
             <a:spLocks noGrp="1"/>
           </p:cNvSpPr>
@@ -2694,7 +4928,7 @@
     </p:spTree>
     <p:extLst>
       <p:ext uri="{BB962C8B-B14F-4D97-AF65-F5344CB8AC3E}">
-        <p14:creationId xmlns:p14="http://schemas.microsoft.com/office/powerpoint/2010/main" val="609316598"/>
+        <p14:creationId xmlns:p14="http://schemas.microsoft.com/office/powerpoint/2010/main" val="2170368423"/>
       </p:ext>
     </p:extLst>
   </p:cSld>
@@ -2723,13 +4957,7 @@
       </p:grpSpPr>
       <p:sp>
         <p:nvSpPr>
-          <p:cNvPr id="2" name="タイトル 1">
-            <a:extLst>
-              <a:ext uri="{FF2B5EF4-FFF2-40B4-BE49-F238E27FC236}">
-                <a16:creationId xmlns:a16="http://schemas.microsoft.com/office/drawing/2014/main" id="{2D03B1C3-CC00-3848-E5E8-1C8BEB62D0F0}"/>
-              </a:ext>
-            </a:extLst>
-          </p:cNvPr>
+          <p:cNvPr id="2" name="Title 1"/>
           <p:cNvSpPr>
             <a:spLocks noGrp="1"/>
           </p:cNvSpPr>
@@ -2739,36 +4967,33 @@
         </p:nvSpPr>
         <p:spPr>
           <a:xfrm>
-            <a:off x="839788" y="457200"/>
-            <a:ext cx="3932237" cy="1600200"/>
+            <a:off x="1141411" y="1600200"/>
+            <a:ext cx="5334001" cy="1371600"/>
           </a:xfrm>
         </p:spPr>
         <p:txBody>
-          <a:bodyPr anchor="b"/>
+          <a:bodyPr anchor="b">
+            <a:normAutofit/>
+          </a:bodyPr>
           <a:lstStyle>
-            <a:lvl1pPr>
-              <a:defRPr sz="3200"/>
+            <a:lvl1pPr algn="l">
+              <a:defRPr sz="2800" b="0"/>
             </a:lvl1pPr>
           </a:lstStyle>
           <a:p>
             <a:r>
-              <a:rPr kumimoji="1" lang="ja-JP" altLang="en-US"/>
+              <a:rPr lang="ja-JP" altLang="en-US"/>
               <a:t>マスター タイトルの書式設定</a:t>
             </a:r>
-          </a:p>
-        </p:txBody>
-      </p:sp>
-      <p:sp>
-        <p:nvSpPr>
-          <p:cNvPr id="3" name="図プレースホルダー 2">
-            <a:extLst>
-              <a:ext uri="{FF2B5EF4-FFF2-40B4-BE49-F238E27FC236}">
-                <a16:creationId xmlns:a16="http://schemas.microsoft.com/office/drawing/2014/main" id="{89A6F8CD-D639-59C2-984B-8C7843EE7E5E}"/>
-              </a:ext>
-            </a:extLst>
-          </p:cNvPr>
-          <p:cNvSpPr>
-            <a:spLocks noGrp="1"/>
+            <a:endParaRPr lang="en-US" dirty="0"/>
+          </a:p>
+        </p:txBody>
+      </p:sp>
+      <p:sp>
+        <p:nvSpPr>
+          <p:cNvPr id="14" name="Picture Placeholder 2"/>
+          <p:cNvSpPr>
+            <a:spLocks noGrp="1" noChangeAspect="1"/>
           </p:cNvSpPr>
           <p:nvPr>
             <p:ph type="pic" idx="1"/>
@@ -2776,121 +5001,146 @@
         </p:nvSpPr>
         <p:spPr>
           <a:xfrm>
-            <a:off x="5183188" y="987425"/>
-            <a:ext cx="6172200" cy="4873625"/>
+            <a:off x="7433733" y="-18288"/>
+            <a:ext cx="3276599" cy="6903720"/>
           </a:xfrm>
+          <a:ln w="38100">
+            <a:gradFill flip="none" rotWithShape="1">
+              <a:gsLst>
+                <a:gs pos="0">
+                  <a:schemeClr val="bg2"/>
+                </a:gs>
+                <a:gs pos="100000">
+                  <a:schemeClr val="bg2">
+                    <a:lumMod val="75000"/>
+                  </a:schemeClr>
+                </a:gs>
+              </a:gsLst>
+              <a:lin ang="5400000" scaled="0"/>
+              <a:tileRect/>
+            </a:gradFill>
+          </a:ln>
+          <a:effectLst>
+            <a:innerShdw blurRad="57150" dist="38100" dir="10800000">
+              <a:srgbClr val="000000">
+                <a:alpha val="70000"/>
+              </a:srgbClr>
+            </a:innerShdw>
+          </a:effectLst>
         </p:spPr>
         <p:txBody>
-          <a:bodyPr/>
+          <a:bodyPr anchor="t">
+            <a:normAutofit/>
+          </a:bodyPr>
           <a:lstStyle>
-            <a:lvl1pPr marL="0" indent="0">
-              <a:buNone/>
-              <a:defRPr sz="3200"/>
-            </a:lvl1pPr>
-            <a:lvl2pPr marL="457200" indent="0">
-              <a:buNone/>
-              <a:defRPr sz="2800"/>
-            </a:lvl2pPr>
-            <a:lvl3pPr marL="914400" indent="0">
-              <a:buNone/>
-              <a:defRPr sz="2400"/>
-            </a:lvl3pPr>
-            <a:lvl4pPr marL="1371600" indent="0">
-              <a:buNone/>
-              <a:defRPr sz="2000"/>
-            </a:lvl4pPr>
-            <a:lvl5pPr marL="1828800" indent="0">
-              <a:buNone/>
-              <a:defRPr sz="2000"/>
-            </a:lvl5pPr>
-            <a:lvl6pPr marL="2286000" indent="0">
-              <a:buNone/>
-              <a:defRPr sz="2000"/>
-            </a:lvl6pPr>
-            <a:lvl7pPr marL="2743200" indent="0">
-              <a:buNone/>
-              <a:defRPr sz="2000"/>
-            </a:lvl7pPr>
-            <a:lvl8pPr marL="3200400" indent="0">
-              <a:buNone/>
-              <a:defRPr sz="2000"/>
-            </a:lvl8pPr>
-            <a:lvl9pPr marL="3657600" indent="0">
-              <a:buNone/>
-              <a:defRPr sz="2000"/>
-            </a:lvl9pPr>
-          </a:lstStyle>
-          <a:p>
-            <a:endParaRPr kumimoji="1" lang="ja-JP" altLang="en-US"/>
-          </a:p>
-        </p:txBody>
-      </p:sp>
-      <p:sp>
-        <p:nvSpPr>
-          <p:cNvPr id="4" name="テキスト プレースホルダー 3">
-            <a:extLst>
-              <a:ext uri="{FF2B5EF4-FFF2-40B4-BE49-F238E27FC236}">
-                <a16:creationId xmlns:a16="http://schemas.microsoft.com/office/drawing/2014/main" id="{478F1082-E587-B352-4F00-E8976DF65B8D}"/>
-              </a:ext>
-            </a:extLst>
-          </p:cNvPr>
-          <p:cNvSpPr>
-            <a:spLocks noGrp="1"/>
-          </p:cNvSpPr>
-          <p:nvPr>
-            <p:ph type="body" sz="half" idx="2"/>
-          </p:nvPr>
-        </p:nvSpPr>
-        <p:spPr>
-          <a:xfrm>
-            <a:off x="839788" y="2057400"/>
-            <a:ext cx="3932237" cy="3811588"/>
-          </a:xfrm>
-        </p:spPr>
-        <p:txBody>
-          <a:bodyPr/>
-          <a:lstStyle>
-            <a:lvl1pPr marL="0" indent="0">
+            <a:lvl1pPr marL="0" indent="0" algn="ctr">
               <a:buNone/>
               <a:defRPr sz="1600"/>
             </a:lvl1pPr>
             <a:lvl2pPr marL="457200" indent="0">
               <a:buNone/>
-              <a:defRPr sz="1400"/>
+              <a:defRPr sz="1600"/>
             </a:lvl2pPr>
             <a:lvl3pPr marL="914400" indent="0">
               <a:buNone/>
-              <a:defRPr sz="1200"/>
+              <a:defRPr sz="1600"/>
             </a:lvl3pPr>
             <a:lvl4pPr marL="1371600" indent="0">
               <a:buNone/>
-              <a:defRPr sz="1000"/>
+              <a:defRPr sz="1600"/>
             </a:lvl4pPr>
             <a:lvl5pPr marL="1828800" indent="0">
               <a:buNone/>
-              <a:defRPr sz="1000"/>
+              <a:defRPr sz="1600"/>
             </a:lvl5pPr>
             <a:lvl6pPr marL="2286000" indent="0">
               <a:buNone/>
-              <a:defRPr sz="1000"/>
+              <a:defRPr sz="1600"/>
             </a:lvl6pPr>
             <a:lvl7pPr marL="2743200" indent="0">
               <a:buNone/>
-              <a:defRPr sz="1000"/>
+              <a:defRPr sz="1600"/>
             </a:lvl7pPr>
             <a:lvl8pPr marL="3200400" indent="0">
               <a:buNone/>
-              <a:defRPr sz="1000"/>
+              <a:defRPr sz="1600"/>
             </a:lvl8pPr>
             <a:lvl9pPr marL="3657600" indent="0">
               <a:buNone/>
-              <a:defRPr sz="1000"/>
+              <a:defRPr sz="1600"/>
             </a:lvl9pPr>
           </a:lstStyle>
           <a:p>
+            <a:r>
+              <a:rPr lang="ja-JP" altLang="en-US"/>
+              <a:t>アイコンをクリックして図を追加</a:t>
+            </a:r>
+            <a:endParaRPr lang="en-US" dirty="0"/>
+          </a:p>
+        </p:txBody>
+      </p:sp>
+      <p:sp>
+        <p:nvSpPr>
+          <p:cNvPr id="4" name="Text Placeholder 3"/>
+          <p:cNvSpPr>
+            <a:spLocks noGrp="1"/>
+          </p:cNvSpPr>
+          <p:nvPr>
+            <p:ph type="body" sz="half" idx="2"/>
+          </p:nvPr>
+        </p:nvSpPr>
+        <p:spPr>
+          <a:xfrm>
+            <a:off x="1141411" y="2971800"/>
+            <a:ext cx="5334001" cy="1828800"/>
+          </a:xfrm>
+        </p:spPr>
+        <p:txBody>
+          <a:bodyPr>
+            <a:normAutofit/>
+          </a:bodyPr>
+          <a:lstStyle>
+            <a:lvl1pPr marL="0" indent="0">
+              <a:buNone/>
+              <a:defRPr sz="1800"/>
+            </a:lvl1pPr>
+            <a:lvl2pPr marL="457200" indent="0">
+              <a:buNone/>
+              <a:defRPr sz="1200"/>
+            </a:lvl2pPr>
+            <a:lvl3pPr marL="914400" indent="0">
+              <a:buNone/>
+              <a:defRPr sz="1000"/>
+            </a:lvl3pPr>
+            <a:lvl4pPr marL="1371600" indent="0">
+              <a:buNone/>
+              <a:defRPr sz="900"/>
+            </a:lvl4pPr>
+            <a:lvl5pPr marL="1828800" indent="0">
+              <a:buNone/>
+              <a:defRPr sz="900"/>
+            </a:lvl5pPr>
+            <a:lvl6pPr marL="2286000" indent="0">
+              <a:buNone/>
+              <a:defRPr sz="900"/>
+            </a:lvl6pPr>
+            <a:lvl7pPr marL="2743200" indent="0">
+              <a:buNone/>
+              <a:defRPr sz="900"/>
+            </a:lvl7pPr>
+            <a:lvl8pPr marL="3200400" indent="0">
+              <a:buNone/>
+              <a:defRPr sz="900"/>
+            </a:lvl8pPr>
+            <a:lvl9pPr marL="3657600" indent="0">
+              <a:buNone/>
+              <a:defRPr sz="900"/>
+            </a:lvl9pPr>
+          </a:lstStyle>
+          <a:p>
             <a:pPr lvl="0"/>
             <a:r>
-              <a:rPr kumimoji="1" lang="ja-JP" altLang="en-US"/>
+              <a:rPr lang="ja-JP" altLang="en-US"/>
               <a:t>マスター テキストの書式設定</a:t>
             </a:r>
           </a:p>
@@ -2898,13 +5148,7 @@
       </p:sp>
       <p:sp>
         <p:nvSpPr>
-          <p:cNvPr id="5" name="日付プレースホルダー 4">
-            <a:extLst>
-              <a:ext uri="{FF2B5EF4-FFF2-40B4-BE49-F238E27FC236}">
-                <a16:creationId xmlns:a16="http://schemas.microsoft.com/office/drawing/2014/main" id="{3D6CDE6F-9C87-1D33-9E6B-F4AD0FD2B764}"/>
-              </a:ext>
-            </a:extLst>
-          </p:cNvPr>
+          <p:cNvPr id="5" name="Date Placeholder 4"/>
           <p:cNvSpPr>
             <a:spLocks noGrp="1"/>
           </p:cNvSpPr>
@@ -2912,14 +5156,19 @@
             <p:ph type="dt" sz="half" idx="10"/>
           </p:nvPr>
         </p:nvSpPr>
-        <p:spPr/>
+        <p:spPr>
+          <a:xfrm>
+            <a:off x="6399212" y="5883275"/>
+            <a:ext cx="914400" cy="365125"/>
+          </a:xfrm>
+        </p:spPr>
         <p:txBody>
           <a:bodyPr/>
           <a:lstStyle/>
           <a:p>
             <a:fld id="{F7C697B7-400A-462C-9925-7DE4B9466D5A}" type="datetimeFigureOut">
               <a:rPr kumimoji="1" lang="ja-JP" altLang="en-US" smtClean="0"/>
-              <a:t>2026/7/1</a:t>
+              <a:t>2026/7/6</a:t>
             </a:fld>
             <a:endParaRPr kumimoji="1" lang="ja-JP" altLang="en-US"/>
           </a:p>
@@ -2927,13 +5176,7 @@
       </p:sp>
       <p:sp>
         <p:nvSpPr>
-          <p:cNvPr id="6" name="フッター プレースホルダー 5">
-            <a:extLst>
-              <a:ext uri="{FF2B5EF4-FFF2-40B4-BE49-F238E27FC236}">
-                <a16:creationId xmlns:a16="http://schemas.microsoft.com/office/drawing/2014/main" id="{44FAFD71-05B6-BEFF-7D1C-219EF5C063E6}"/>
-              </a:ext>
-            </a:extLst>
-          </p:cNvPr>
+          <p:cNvPr id="6" name="Footer Placeholder 5"/>
           <p:cNvSpPr>
             <a:spLocks noGrp="1"/>
           </p:cNvSpPr>
@@ -2941,7 +5184,12 @@
             <p:ph type="ftr" sz="quarter" idx="11"/>
           </p:nvPr>
         </p:nvSpPr>
-        <p:spPr/>
+        <p:spPr>
+          <a:xfrm>
+            <a:off x="1141412" y="5883275"/>
+            <a:ext cx="5105400" cy="365125"/>
+          </a:xfrm>
+        </p:spPr>
         <p:txBody>
           <a:bodyPr/>
           <a:lstStyle/>
@@ -2952,13 +5200,7 @@
       </p:sp>
       <p:sp>
         <p:nvSpPr>
-          <p:cNvPr id="7" name="スライド番号プレースホルダー 6">
-            <a:extLst>
-              <a:ext uri="{FF2B5EF4-FFF2-40B4-BE49-F238E27FC236}">
-                <a16:creationId xmlns:a16="http://schemas.microsoft.com/office/drawing/2014/main" id="{4AA91D5A-A264-45A6-B3FC-3265876C3AEF}"/>
-              </a:ext>
-            </a:extLst>
-          </p:cNvPr>
+          <p:cNvPr id="7" name="Slide Number Placeholder 6"/>
           <p:cNvSpPr>
             <a:spLocks noGrp="1"/>
           </p:cNvSpPr>
@@ -2966,7 +5208,12 @@
             <p:ph type="sldNum" sz="quarter" idx="12"/>
           </p:nvPr>
         </p:nvSpPr>
-        <p:spPr/>
+        <p:spPr>
+          <a:xfrm>
+            <a:off x="10742612" y="5883275"/>
+            <a:ext cx="322567" cy="365125"/>
+          </a:xfrm>
+        </p:spPr>
         <p:txBody>
           <a:bodyPr/>
           <a:lstStyle/>
@@ -2982,7 +5229,7 @@
     </p:spTree>
     <p:extLst>
       <p:ext uri="{BB962C8B-B14F-4D97-AF65-F5344CB8AC3E}">
-        <p14:creationId xmlns:p14="http://schemas.microsoft.com/office/powerpoint/2010/main" val="2840667258"/>
+        <p14:creationId xmlns:p14="http://schemas.microsoft.com/office/powerpoint/2010/main" val="546625325"/>
       </p:ext>
     </p:extLst>
   </p:cSld>
@@ -2996,8 +5243,8 @@
 <p:sldMaster xmlns:a="http://schemas.openxmlformats.org/drawingml/2006/main" xmlns:r="http://schemas.openxmlformats.org/officeDocument/2006/relationships" xmlns:p="http://schemas.openxmlformats.org/presentationml/2006/main">
   <p:cSld>
     <p:bg>
-      <p:bgRef idx="1001">
-        <a:schemeClr val="bg1"/>
+      <p:bgRef idx="1003">
+        <a:schemeClr val="bg2"/>
       </p:bgRef>
     </p:bg>
     <p:spTree>
@@ -3016,13 +5263,7 @@
       </p:grpSpPr>
       <p:sp>
         <p:nvSpPr>
-          <p:cNvPr id="2" name="タイトル プレースホルダー 1">
-            <a:extLst>
-              <a:ext uri="{FF2B5EF4-FFF2-40B4-BE49-F238E27FC236}">
-                <a16:creationId xmlns:a16="http://schemas.microsoft.com/office/drawing/2014/main" id="{67B8A0E1-21AA-A277-C719-4E8976ECE202}"/>
-              </a:ext>
-            </a:extLst>
-          </p:cNvPr>
+          <p:cNvPr id="2" name="Title Placeholder 1"/>
           <p:cNvSpPr>
             <a:spLocks noGrp="1"/>
           </p:cNvSpPr>
@@ -3032,8 +5273,8 @@
         </p:nvSpPr>
         <p:spPr>
           <a:xfrm>
-            <a:off x="838200" y="365125"/>
-            <a:ext cx="10515600" cy="1325563"/>
+            <a:off x="1141413" y="609600"/>
+            <a:ext cx="9905998" cy="1905000"/>
           </a:xfrm>
           <a:prstGeom prst="rect">
             <a:avLst/>
@@ -3046,21 +5287,16 @@
           <a:lstStyle/>
           <a:p>
             <a:r>
-              <a:rPr kumimoji="1" lang="ja-JP" altLang="en-US"/>
+              <a:rPr lang="ja-JP" altLang="en-US"/>
               <a:t>マスター タイトルの書式設定</a:t>
             </a:r>
-          </a:p>
-        </p:txBody>
-      </p:sp>
-      <p:sp>
-        <p:nvSpPr>
-          <p:cNvPr id="3" name="テキスト プレースホルダー 2">
-            <a:extLst>
-              <a:ext uri="{FF2B5EF4-FFF2-40B4-BE49-F238E27FC236}">
-                <a16:creationId xmlns:a16="http://schemas.microsoft.com/office/drawing/2014/main" id="{C1EDC7BD-6938-0E19-4D35-959573F92D69}"/>
-              </a:ext>
-            </a:extLst>
-          </p:cNvPr>
+            <a:endParaRPr lang="en-US" dirty="0"/>
+          </a:p>
+        </p:txBody>
+      </p:sp>
+      <p:sp>
+        <p:nvSpPr>
+          <p:cNvPr id="3" name="Text Placeholder 2"/>
           <p:cNvSpPr>
             <a:spLocks noGrp="1"/>
           </p:cNvSpPr>
@@ -3070,96 +5306,91 @@
         </p:nvSpPr>
         <p:spPr>
           <a:xfrm>
-            <a:off x="838200" y="1825625"/>
-            <a:ext cx="10515600" cy="4351338"/>
+            <a:off x="1141413" y="2666999"/>
+            <a:ext cx="9905998" cy="3124201"/>
           </a:xfrm>
           <a:prstGeom prst="rect">
             <a:avLst/>
           </a:prstGeom>
         </p:spPr>
         <p:txBody>
-          <a:bodyPr vert="horz" lIns="91440" tIns="45720" rIns="91440" bIns="45720" rtlCol="0">
+          <a:bodyPr vert="horz" lIns="91440" tIns="45720" rIns="91440" bIns="45720" rtlCol="0" anchor="ctr">
             <a:normAutofit/>
           </a:bodyPr>
           <a:lstStyle/>
           <a:p>
             <a:pPr lvl="0"/>
             <a:r>
-              <a:rPr kumimoji="1" lang="ja-JP" altLang="en-US"/>
+              <a:rPr lang="ja-JP" altLang="en-US"/>
               <a:t>マスター テキストの書式設定</a:t>
             </a:r>
           </a:p>
           <a:p>
             <a:pPr lvl="1"/>
             <a:r>
-              <a:rPr kumimoji="1" lang="ja-JP" altLang="en-US"/>
+              <a:rPr lang="ja-JP" altLang="en-US"/>
               <a:t>第 </a:t>
             </a:r>
             <a:r>
-              <a:rPr kumimoji="1" lang="en-US" altLang="ja-JP"/>
+              <a:rPr lang="en-US" altLang="ja-JP"/>
               <a:t>2 </a:t>
             </a:r>
             <a:r>
-              <a:rPr kumimoji="1" lang="ja-JP" altLang="en-US"/>
+              <a:rPr lang="ja-JP" altLang="en-US"/>
               <a:t>レベル</a:t>
             </a:r>
           </a:p>
           <a:p>
             <a:pPr lvl="2"/>
             <a:r>
-              <a:rPr kumimoji="1" lang="ja-JP" altLang="en-US"/>
+              <a:rPr lang="ja-JP" altLang="en-US"/>
               <a:t>第 </a:t>
             </a:r>
             <a:r>
-              <a:rPr kumimoji="1" lang="en-US" altLang="ja-JP"/>
+              <a:rPr lang="en-US" altLang="ja-JP"/>
               <a:t>3 </a:t>
             </a:r>
             <a:r>
-              <a:rPr kumimoji="1" lang="ja-JP" altLang="en-US"/>
+              <a:rPr lang="ja-JP" altLang="en-US"/>
               <a:t>レベル</a:t>
             </a:r>
           </a:p>
           <a:p>
             <a:pPr lvl="3"/>
             <a:r>
-              <a:rPr kumimoji="1" lang="ja-JP" altLang="en-US"/>
+              <a:rPr lang="ja-JP" altLang="en-US"/>
               <a:t>第 </a:t>
             </a:r>
             <a:r>
-              <a:rPr kumimoji="1" lang="en-US" altLang="ja-JP"/>
+              <a:rPr lang="en-US" altLang="ja-JP"/>
               <a:t>4 </a:t>
             </a:r>
             <a:r>
-              <a:rPr kumimoji="1" lang="ja-JP" altLang="en-US"/>
+              <a:rPr lang="ja-JP" altLang="en-US"/>
               <a:t>レベル</a:t>
             </a:r>
           </a:p>
           <a:p>
             <a:pPr lvl="4"/>
             <a:r>
-              <a:rPr kumimoji="1" lang="ja-JP" altLang="en-US"/>
+              <a:rPr lang="ja-JP" altLang="en-US"/>
               <a:t>第 </a:t>
             </a:r>
             <a:r>
-              <a:rPr kumimoji="1" lang="en-US" altLang="ja-JP"/>
+              <a:rPr lang="en-US" altLang="ja-JP"/>
               <a:t>5 </a:t>
             </a:r>
             <a:r>
-              <a:rPr kumimoji="1" lang="ja-JP" altLang="en-US"/>
+              <a:rPr lang="ja-JP" altLang="en-US"/>
               <a:t>レベル</a:t>
             </a:r>
-          </a:p>
-        </p:txBody>
-      </p:sp>
-      <p:sp>
-        <p:nvSpPr>
-          <p:cNvPr id="4" name="日付プレースホルダー 3">
-            <a:extLst>
-              <a:ext uri="{FF2B5EF4-FFF2-40B4-BE49-F238E27FC236}">
-                <a16:creationId xmlns:a16="http://schemas.microsoft.com/office/drawing/2014/main" id="{52976452-E0DF-C6E6-AFB7-79B1A0FFAF5B}"/>
-              </a:ext>
-            </a:extLst>
-          </p:cNvPr>
+            <a:endParaRPr lang="en-US" dirty="0"/>
+          </a:p>
+        </p:txBody>
+      </p:sp>
+      <p:sp>
+        <p:nvSpPr>
+          <p:cNvPr id="4" name="Date Placeholder 3"/>
           <p:cNvSpPr>
             <a:spLocks noGrp="1"/>
           </p:cNvSpPr>
@@ -3169,8 +5400,8 @@
         </p:nvSpPr>
         <p:spPr>
           <a:xfrm>
-            <a:off x="838200" y="6356350"/>
-            <a:ext cx="2743200" cy="365125"/>
+            <a:off x="8837612" y="5883275"/>
+            <a:ext cx="1600200" cy="365125"/>
           </a:xfrm>
           <a:prstGeom prst="rect">
             <a:avLst/>
@@ -3179,20 +5410,28 @@
         <p:txBody>
           <a:bodyPr vert="horz" lIns="91440" tIns="45720" rIns="91440" bIns="45720" rtlCol="0" anchor="ctr"/>
           <a:lstStyle>
-            <a:lvl1pPr algn="l">
-              <a:defRPr sz="1200">
+            <a:lvl1pPr algn="r">
+              <a:defRPr sz="900" b="1" i="0">
                 <a:solidFill>
                   <a:schemeClr val="tx1">
-                    <a:tint val="82000"/>
+                    <a:lumMod val="75000"/>
                   </a:schemeClr>
                 </a:solidFill>
+                <a:effectLst>
+                  <a:outerShdw blurRad="50800" dist="38100" dir="2700000" algn="tl" rotWithShape="0">
+                    <a:srgbClr val="000000">
+                      <a:alpha val="43000"/>
+                    </a:srgbClr>
+                  </a:outerShdw>
+                </a:effectLst>
+                <a:latin typeface="+mn-lt"/>
               </a:defRPr>
             </a:lvl1pPr>
           </a:lstStyle>
           <a:p>
             <a:fld id="{F7C697B7-400A-462C-9925-7DE4B9466D5A}" type="datetimeFigureOut">
               <a:rPr kumimoji="1" lang="ja-JP" altLang="en-US" smtClean="0"/>
-              <a:t>2026/7/1</a:t>
+              <a:t>2026/7/6</a:t>
             </a:fld>
             <a:endParaRPr kumimoji="1" lang="ja-JP" altLang="en-US"/>
           </a:p>
@@ -3200,13 +5439,7 @@
       </p:sp>
       <p:sp>
         <p:nvSpPr>
-          <p:cNvPr id="5" name="フッター プレースホルダー 4">
-            <a:extLst>
-              <a:ext uri="{FF2B5EF4-FFF2-40B4-BE49-F238E27FC236}">
-                <a16:creationId xmlns:a16="http://schemas.microsoft.com/office/drawing/2014/main" id="{7CB1CC0C-1545-3231-E318-0CA2271B46D4}"/>
-              </a:ext>
-            </a:extLst>
-          </p:cNvPr>
+          <p:cNvPr id="5" name="Footer Placeholder 4"/>
           <p:cNvSpPr>
             <a:spLocks noGrp="1"/>
           </p:cNvSpPr>
@@ -3216,8 +5449,8 @@
         </p:nvSpPr>
         <p:spPr>
           <a:xfrm>
-            <a:off x="4038600" y="6356350"/>
-            <a:ext cx="4114800" cy="365125"/>
+            <a:off x="1141412" y="5883275"/>
+            <a:ext cx="7543800" cy="365125"/>
           </a:xfrm>
           <a:prstGeom prst="rect">
             <a:avLst/>
@@ -3226,13 +5459,21 @@
         <p:txBody>
           <a:bodyPr vert="horz" lIns="91440" tIns="45720" rIns="91440" bIns="45720" rtlCol="0" anchor="ctr"/>
           <a:lstStyle>
-            <a:lvl1pPr algn="ctr">
-              <a:defRPr sz="1200">
+            <a:lvl1pPr algn="l">
+              <a:defRPr sz="900" b="1" i="0">
                 <a:solidFill>
                   <a:schemeClr val="tx1">
-                    <a:tint val="82000"/>
+                    <a:lumMod val="75000"/>
                   </a:schemeClr>
                 </a:solidFill>
+                <a:effectLst>
+                  <a:outerShdw blurRad="50800" dist="38100" dir="2700000" algn="tl" rotWithShape="0">
+                    <a:srgbClr val="000000">
+                      <a:alpha val="43000"/>
+                    </a:srgbClr>
+                  </a:outerShdw>
+                </a:effectLst>
+                <a:latin typeface="+mn-lt"/>
               </a:defRPr>
             </a:lvl1pPr>
           </a:lstStyle>
@@ -3243,13 +5484,7 @@
       </p:sp>
       <p:sp>
         <p:nvSpPr>
-          <p:cNvPr id="6" name="スライド番号プレースホルダー 5">
-            <a:extLst>
-              <a:ext uri="{FF2B5EF4-FFF2-40B4-BE49-F238E27FC236}">
-                <a16:creationId xmlns:a16="http://schemas.microsoft.com/office/drawing/2014/main" id="{3CA31736-B900-7B01-36FF-5B65A632510B}"/>
-              </a:ext>
-            </a:extLst>
-          </p:cNvPr>
+          <p:cNvPr id="6" name="Slide Number Placeholder 5"/>
           <p:cNvSpPr>
             <a:spLocks noGrp="1"/>
           </p:cNvSpPr>
@@ -3259,8 +5494,8 @@
         </p:nvSpPr>
         <p:spPr>
           <a:xfrm>
-            <a:off x="8610600" y="6356350"/>
-            <a:ext cx="2743200" cy="365125"/>
+            <a:off x="10514012" y="5883275"/>
+            <a:ext cx="551167" cy="365125"/>
           </a:xfrm>
           <a:prstGeom prst="rect">
             <a:avLst/>
@@ -3270,12 +5505,20 @@
           <a:bodyPr vert="horz" lIns="91440" tIns="45720" rIns="91440" bIns="45720" rtlCol="0" anchor="ctr"/>
           <a:lstStyle>
             <a:lvl1pPr algn="r">
-              <a:defRPr sz="1200">
+              <a:defRPr sz="900" b="1" i="0">
                 <a:solidFill>
                   <a:schemeClr val="tx1">
-                    <a:tint val="82000"/>
+                    <a:lumMod val="75000"/>
                   </a:schemeClr>
                 </a:solidFill>
+                <a:effectLst>
+                  <a:outerShdw blurRad="50800" dist="38100" dir="2700000" algn="tl" rotWithShape="0">
+                    <a:srgbClr val="000000">
+                      <a:alpha val="43000"/>
+                    </a:srgbClr>
+                  </a:outerShdw>
+                </a:effectLst>
+                <a:latin typeface="+mn-lt"/>
               </a:defRPr>
             </a:lvl1pPr>
           </a:lstStyle>
@@ -3291,55 +5534,562 @@
     </p:spTree>
     <p:extLst>
       <p:ext uri="{BB962C8B-B14F-4D97-AF65-F5344CB8AC3E}">
-        <p14:creationId xmlns:p14="http://schemas.microsoft.com/office/powerpoint/2010/main" val="1619352834"/>
+        <p14:creationId xmlns:p14="http://schemas.microsoft.com/office/powerpoint/2010/main" val="1199730071"/>
       </p:ext>
     </p:extLst>
   </p:cSld>
-  <p:clrMap bg1="lt1" tx1="dk1" bg2="lt2" tx2="dk2" accent1="accent1" accent2="accent2" accent3="accent3" accent4="accent4" accent5="accent5" accent6="accent6" hlink="hlink" folHlink="folHlink"/>
+  <p:clrMap bg1="dk1" tx1="lt1" bg2="dk2" tx2="lt2" accent1="accent1" accent2="accent2" accent3="accent3" accent4="accent4" accent5="accent5" accent6="accent6" hlink="hlink" folHlink="folHlink"/>
   <p:sldLayoutIdLst>
-    <p:sldLayoutId id="2147483649" r:id="rId1"/>
-    <p:sldLayoutId id="2147483650" r:id="rId2"/>
-    <p:sldLayoutId id="2147483651" r:id="rId3"/>
-    <p:sldLayoutId id="2147483652" r:id="rId4"/>
-    <p:sldLayoutId id="2147483653" r:id="rId5"/>
-    <p:sldLayoutId id="2147483654" r:id="rId6"/>
-    <p:sldLayoutId id="2147483655" r:id="rId7"/>
-    <p:sldLayoutId id="2147483656" r:id="rId8"/>
-    <p:sldLayoutId id="2147483657" r:id="rId9"/>
-    <p:sldLayoutId id="2147483658" r:id="rId10"/>
-    <p:sldLayoutId id="2147483659" r:id="rId11"/>
+    <p:sldLayoutId id="2147483871" r:id="rId1"/>
+    <p:sldLayoutId id="2147483872" r:id="rId2"/>
+    <p:sldLayoutId id="2147483873" r:id="rId3"/>
+    <p:sldLayoutId id="2147483874" r:id="rId4"/>
+    <p:sldLayoutId id="2147483875" r:id="rId5"/>
+    <p:sldLayoutId id="2147483876" r:id="rId6"/>
+    <p:sldLayoutId id="2147483877" r:id="rId7"/>
+    <p:sldLayoutId id="2147483878" r:id="rId8"/>
+    <p:sldLayoutId id="2147483879" r:id="rId9"/>
+    <p:sldLayoutId id="2147483880" r:id="rId10"/>
+    <p:sldLayoutId id="2147483881" r:id="rId11"/>
+    <p:sldLayoutId id="2147483882" r:id="rId12"/>
+    <p:sldLayoutId id="2147483883" r:id="rId13"/>
+    <p:sldLayoutId id="2147483884" r:id="rId14"/>
+    <p:sldLayoutId id="2147483885" r:id="rId15"/>
+    <p:sldLayoutId id="2147483886" r:id="rId16"/>
+    <p:sldLayoutId id="2147483887" r:id="rId17"/>
   </p:sldLayoutIdLst>
   <p:txStyles>
     <p:titleStyle>
-      <a:lvl1pPr algn="l" defTabSz="914400" rtl="0" eaLnBrk="1" latinLnBrk="0" hangingPunct="1">
-        <a:lnSpc>
-          <a:spcPct val="90000"/>
-        </a:lnSpc>
+      <a:lvl1pPr algn="l" defTabSz="457200" rtl="0" eaLnBrk="1" latinLnBrk="0" hangingPunct="1">
         <a:spcBef>
           <a:spcPct val="0"/>
         </a:spcBef>
         <a:buNone/>
-        <a:defRPr kumimoji="1" sz="4400" kern="1200">
-          <a:solidFill>
-            <a:schemeClr val="tx1"/>
-          </a:solidFill>
+        <a:defRPr kumimoji="1" sz="3200" kern="1200" cap="all">
+          <a:ln w="3175" cmpd="sng">
+            <a:noFill/>
+          </a:ln>
+          <a:gradFill flip="none" rotWithShape="1">
+            <a:gsLst>
+              <a:gs pos="0">
+                <a:schemeClr val="tx1"/>
+              </a:gs>
+              <a:gs pos="100000">
+                <a:schemeClr val="tx1">
+                  <a:lumMod val="65000"/>
+                </a:schemeClr>
+              </a:gs>
+            </a:gsLst>
+            <a:lin ang="5580000" scaled="0"/>
+            <a:tileRect/>
+          </a:gradFill>
+          <a:effectLst>
+            <a:glow rad="38100">
+              <a:schemeClr val="bg1">
+                <a:lumMod val="65000"/>
+                <a:lumOff val="35000"/>
+                <a:alpha val="40000"/>
+              </a:schemeClr>
+            </a:glow>
+            <a:outerShdw blurRad="28575" dist="38100" dir="14040000" algn="tl" rotWithShape="0">
+              <a:srgbClr val="000000">
+                <a:alpha val="25000"/>
+              </a:srgbClr>
+            </a:outerShdw>
+          </a:effectLst>
           <a:latin typeface="+mj-lt"/>
           <a:ea typeface="+mj-ea"/>
           <a:cs typeface="+mj-cs"/>
         </a:defRPr>
       </a:lvl1pPr>
+      <a:lvl2pPr eaLnBrk="1" hangingPunct="1">
+        <a:defRPr kumimoji="1">
+          <a:solidFill>
+            <a:schemeClr val="tx2"/>
+          </a:solidFill>
+        </a:defRPr>
+      </a:lvl2pPr>
+      <a:lvl3pPr eaLnBrk="1" hangingPunct="1">
+        <a:defRPr kumimoji="1">
+          <a:solidFill>
+            <a:schemeClr val="tx2"/>
+          </a:solidFill>
+        </a:defRPr>
+      </a:lvl3pPr>
+      <a:lvl4pPr eaLnBrk="1" hangingPunct="1">
+        <a:defRPr kumimoji="1">
+          <a:solidFill>
+            <a:schemeClr val="tx2"/>
+          </a:solidFill>
+        </a:defRPr>
+      </a:lvl4pPr>
+      <a:lvl5pPr eaLnBrk="1" hangingPunct="1">
+        <a:defRPr kumimoji="1">
+          <a:solidFill>
+            <a:schemeClr val="tx2"/>
+          </a:solidFill>
+        </a:defRPr>
+      </a:lvl5pPr>
+      <a:lvl6pPr eaLnBrk="1" hangingPunct="1">
+        <a:defRPr kumimoji="1">
+          <a:solidFill>
+            <a:schemeClr val="tx2"/>
+          </a:solidFill>
+        </a:defRPr>
+      </a:lvl6pPr>
+      <a:lvl7pPr eaLnBrk="1" hangingPunct="1">
+        <a:defRPr kumimoji="1">
+          <a:solidFill>
+            <a:schemeClr val="tx2"/>
+          </a:solidFill>
+        </a:defRPr>
+      </a:lvl7pPr>
+      <a:lvl8pPr eaLnBrk="1" hangingPunct="1">
+        <a:defRPr kumimoji="1">
+          <a:solidFill>
+            <a:schemeClr val="tx2"/>
+          </a:solidFill>
+        </a:defRPr>
+      </a:lvl8pPr>
+      <a:lvl9pPr eaLnBrk="1" hangingPunct="1">
+        <a:defRPr kumimoji="1">
+          <a:solidFill>
+            <a:schemeClr val="tx2"/>
+          </a:solidFill>
+        </a:defRPr>
+      </a:lvl9pPr>
     </p:titleStyle>
     <p:bodyStyle>
-      <a:lvl1pPr marL="228600" indent="-228600" algn="l" defTabSz="914400" rtl="0" eaLnBrk="1" latinLnBrk="0" hangingPunct="1">
-        <a:lnSpc>
-          <a:spcPct val="90000"/>
-        </a:lnSpc>
+      <a:lvl1pPr marL="285750" indent="-285750" algn="l" defTabSz="457200" rtl="0" eaLnBrk="1" latinLnBrk="0" hangingPunct="1">
         <a:spcBef>
-          <a:spcPts val="1000"/>
+          <a:spcPct val="20000"/>
         </a:spcBef>
-        <a:buFont typeface="Arial" panose="020B0604020202020204" pitchFamily="34" charset="0"/>
+        <a:spcAft>
+          <a:spcPts val="600"/>
+        </a:spcAft>
+        <a:buClr>
+          <a:schemeClr val="tx1"/>
+        </a:buClr>
+        <a:buSzPct val="100000"/>
+        <a:buFont typeface="Arial"/>
         <a:buChar char="•"/>
-        <a:defRPr kumimoji="1" sz="2800" kern="1200">
+        <a:defRPr kumimoji="1" sz="2000" kern="1200" cap="small">
+          <a:gradFill flip="none" rotWithShape="1">
+            <a:gsLst>
+              <a:gs pos="0">
+                <a:schemeClr val="tx1"/>
+              </a:gs>
+              <a:gs pos="100000">
+                <a:schemeClr val="tx1">
+                  <a:lumMod val="75000"/>
+                </a:schemeClr>
+              </a:gs>
+            </a:gsLst>
+            <a:lin ang="5580000" scaled="0"/>
+            <a:tileRect/>
+          </a:gradFill>
+          <a:effectLst>
+            <a:glow rad="38100">
+              <a:schemeClr val="bg1">
+                <a:lumMod val="50000"/>
+                <a:lumOff val="50000"/>
+                <a:alpha val="20000"/>
+              </a:schemeClr>
+            </a:glow>
+            <a:outerShdw blurRad="44450" dist="12700" dir="13860000" algn="tl" rotWithShape="0">
+              <a:srgbClr val="000000">
+                <a:alpha val="20000"/>
+              </a:srgbClr>
+            </a:outerShdw>
+          </a:effectLst>
+          <a:latin typeface="+mn-lt"/>
+          <a:ea typeface="+mn-ea"/>
+          <a:cs typeface="+mn-cs"/>
+        </a:defRPr>
+      </a:lvl1pPr>
+      <a:lvl2pPr marL="742950" indent="-285750" algn="l" defTabSz="457200" rtl="0" eaLnBrk="1" latinLnBrk="0" hangingPunct="1">
+        <a:spcBef>
+          <a:spcPct val="20000"/>
+        </a:spcBef>
+        <a:spcAft>
+          <a:spcPts val="600"/>
+        </a:spcAft>
+        <a:buClr>
+          <a:schemeClr val="tx1"/>
+        </a:buClr>
+        <a:buSzPct val="100000"/>
+        <a:buFont typeface="Arial"/>
+        <a:buChar char="•"/>
+        <a:defRPr kumimoji="1" sz="1800" kern="1200" cap="small">
+          <a:gradFill flip="none" rotWithShape="1">
+            <a:gsLst>
+              <a:gs pos="0">
+                <a:schemeClr val="tx1"/>
+              </a:gs>
+              <a:gs pos="100000">
+                <a:schemeClr val="tx1">
+                  <a:lumMod val="75000"/>
+                </a:schemeClr>
+              </a:gs>
+            </a:gsLst>
+            <a:lin ang="5580000" scaled="0"/>
+            <a:tileRect/>
+          </a:gradFill>
+          <a:effectLst>
+            <a:glow rad="38100">
+              <a:schemeClr val="bg1">
+                <a:lumMod val="50000"/>
+                <a:lumOff val="50000"/>
+                <a:alpha val="20000"/>
+              </a:schemeClr>
+            </a:glow>
+            <a:outerShdw blurRad="44450" dist="12700" dir="13860000" algn="tl" rotWithShape="0">
+              <a:srgbClr val="000000">
+                <a:alpha val="20000"/>
+              </a:srgbClr>
+            </a:outerShdw>
+          </a:effectLst>
+          <a:latin typeface="+mn-lt"/>
+          <a:ea typeface="+mn-ea"/>
+          <a:cs typeface="+mn-cs"/>
+        </a:defRPr>
+      </a:lvl2pPr>
+      <a:lvl3pPr marL="1200150" indent="-285750" algn="l" defTabSz="457200" rtl="0" eaLnBrk="1" latinLnBrk="0" hangingPunct="1">
+        <a:spcBef>
+          <a:spcPct val="20000"/>
+        </a:spcBef>
+        <a:spcAft>
+          <a:spcPts val="600"/>
+        </a:spcAft>
+        <a:buClr>
+          <a:schemeClr val="tx1"/>
+        </a:buClr>
+        <a:buSzPct val="100000"/>
+        <a:buFont typeface="Arial"/>
+        <a:buChar char="•"/>
+        <a:defRPr kumimoji="1" sz="1600" kern="1200" cap="small">
+          <a:gradFill flip="none" rotWithShape="1">
+            <a:gsLst>
+              <a:gs pos="0">
+                <a:schemeClr val="tx1"/>
+              </a:gs>
+              <a:gs pos="100000">
+                <a:schemeClr val="tx1">
+                  <a:lumMod val="75000"/>
+                </a:schemeClr>
+              </a:gs>
+            </a:gsLst>
+            <a:lin ang="5580000" scaled="0"/>
+            <a:tileRect/>
+          </a:gradFill>
+          <a:effectLst>
+            <a:glow rad="38100">
+              <a:schemeClr val="bg1">
+                <a:lumMod val="50000"/>
+                <a:lumOff val="50000"/>
+                <a:alpha val="20000"/>
+              </a:schemeClr>
+            </a:glow>
+            <a:outerShdw blurRad="44450" dist="12700" dir="13860000" algn="tl" rotWithShape="0">
+              <a:srgbClr val="000000">
+                <a:alpha val="20000"/>
+              </a:srgbClr>
+            </a:outerShdw>
+          </a:effectLst>
+          <a:latin typeface="+mn-lt"/>
+          <a:ea typeface="+mn-ea"/>
+          <a:cs typeface="+mn-cs"/>
+        </a:defRPr>
+      </a:lvl3pPr>
+      <a:lvl4pPr marL="1543050" indent="-171450" algn="l" defTabSz="457200" rtl="0" eaLnBrk="1" latinLnBrk="0" hangingPunct="1">
+        <a:spcBef>
+          <a:spcPct val="20000"/>
+        </a:spcBef>
+        <a:spcAft>
+          <a:spcPts val="600"/>
+        </a:spcAft>
+        <a:buClr>
+          <a:schemeClr val="tx1"/>
+        </a:buClr>
+        <a:buSzPct val="100000"/>
+        <a:buFont typeface="Arial"/>
+        <a:buChar char="•"/>
+        <a:defRPr kumimoji="1" sz="1400" kern="1200" cap="small">
+          <a:gradFill flip="none" rotWithShape="1">
+            <a:gsLst>
+              <a:gs pos="0">
+                <a:schemeClr val="tx1"/>
+              </a:gs>
+              <a:gs pos="100000">
+                <a:schemeClr val="tx1">
+                  <a:lumMod val="75000"/>
+                </a:schemeClr>
+              </a:gs>
+            </a:gsLst>
+            <a:lin ang="5580000" scaled="0"/>
+            <a:tileRect/>
+          </a:gradFill>
+          <a:effectLst>
+            <a:glow rad="38100">
+              <a:schemeClr val="bg1">
+                <a:lumMod val="50000"/>
+                <a:lumOff val="50000"/>
+                <a:alpha val="20000"/>
+              </a:schemeClr>
+            </a:glow>
+            <a:outerShdw blurRad="44450" dist="12700" dir="13860000" algn="tl" rotWithShape="0">
+              <a:srgbClr val="000000">
+                <a:alpha val="20000"/>
+              </a:srgbClr>
+            </a:outerShdw>
+          </a:effectLst>
+          <a:latin typeface="+mn-lt"/>
+          <a:ea typeface="+mn-ea"/>
+          <a:cs typeface="+mn-cs"/>
+        </a:defRPr>
+      </a:lvl4pPr>
+      <a:lvl5pPr marL="2000250" indent="-171450" algn="l" defTabSz="457200" rtl="0" eaLnBrk="1" latinLnBrk="0" hangingPunct="1">
+        <a:spcBef>
+          <a:spcPct val="20000"/>
+        </a:spcBef>
+        <a:spcAft>
+          <a:spcPts val="600"/>
+        </a:spcAft>
+        <a:buClr>
+          <a:schemeClr val="tx1"/>
+        </a:buClr>
+        <a:buSzPct val="100000"/>
+        <a:buFont typeface="Arial"/>
+        <a:buChar char="•"/>
+        <a:defRPr kumimoji="1" sz="1400" kern="1200" cap="small">
+          <a:gradFill flip="none" rotWithShape="1">
+            <a:gsLst>
+              <a:gs pos="0">
+                <a:schemeClr val="tx1"/>
+              </a:gs>
+              <a:gs pos="100000">
+                <a:schemeClr val="tx1">
+                  <a:lumMod val="75000"/>
+                </a:schemeClr>
+              </a:gs>
+            </a:gsLst>
+            <a:lin ang="5580000" scaled="0"/>
+            <a:tileRect/>
+          </a:gradFill>
+          <a:effectLst>
+            <a:glow rad="38100">
+              <a:schemeClr val="bg1">
+                <a:lumMod val="50000"/>
+                <a:lumOff val="50000"/>
+                <a:alpha val="20000"/>
+              </a:schemeClr>
+            </a:glow>
+            <a:outerShdw blurRad="44450" dist="12700" dir="13860000" algn="tl" rotWithShape="0">
+              <a:srgbClr val="000000">
+                <a:alpha val="20000"/>
+              </a:srgbClr>
+            </a:outerShdw>
+          </a:effectLst>
+          <a:latin typeface="+mn-lt"/>
+          <a:ea typeface="+mn-ea"/>
+          <a:cs typeface="+mn-cs"/>
+        </a:defRPr>
+      </a:lvl5pPr>
+      <a:lvl6pPr marL="2514600" indent="-228600" algn="l" defTabSz="457200" rtl="0" eaLnBrk="1" latinLnBrk="0" hangingPunct="1">
+        <a:spcBef>
+          <a:spcPct val="20000"/>
+        </a:spcBef>
+        <a:spcAft>
+          <a:spcPts val="600"/>
+        </a:spcAft>
+        <a:buClr>
+          <a:schemeClr val="tx1"/>
+        </a:buClr>
+        <a:buSzPct val="100000"/>
+        <a:buFont typeface="Arial"/>
+        <a:buChar char="•"/>
+        <a:defRPr kumimoji="1" sz="1200" kern="1200" cap="small">
+          <a:gradFill flip="none" rotWithShape="1">
+            <a:gsLst>
+              <a:gs pos="0">
+                <a:schemeClr val="tx1"/>
+              </a:gs>
+              <a:gs pos="100000">
+                <a:schemeClr val="tx1">
+                  <a:lumMod val="75000"/>
+                </a:schemeClr>
+              </a:gs>
+            </a:gsLst>
+            <a:lin ang="5580000" scaled="0"/>
+            <a:tileRect/>
+          </a:gradFill>
+          <a:effectLst>
+            <a:glow rad="38100">
+              <a:schemeClr val="bg1">
+                <a:lumMod val="50000"/>
+                <a:lumOff val="50000"/>
+                <a:alpha val="20000"/>
+              </a:schemeClr>
+            </a:glow>
+            <a:outerShdw blurRad="44450" dist="12700" dir="13860000" algn="tl" rotWithShape="0">
+              <a:srgbClr val="000000">
+                <a:alpha val="20000"/>
+              </a:srgbClr>
+            </a:outerShdw>
+          </a:effectLst>
+          <a:latin typeface="+mn-lt"/>
+          <a:ea typeface="+mn-ea"/>
+          <a:cs typeface="+mn-cs"/>
+        </a:defRPr>
+      </a:lvl6pPr>
+      <a:lvl7pPr marL="2971800" indent="-228600" algn="l" defTabSz="457200" rtl="0" eaLnBrk="1" latinLnBrk="0" hangingPunct="1">
+        <a:spcBef>
+          <a:spcPct val="20000"/>
+        </a:spcBef>
+        <a:spcAft>
+          <a:spcPts val="600"/>
+        </a:spcAft>
+        <a:buClr>
+          <a:schemeClr val="tx1"/>
+        </a:buClr>
+        <a:buSzPct val="100000"/>
+        <a:buFont typeface="Arial"/>
+        <a:buChar char="•"/>
+        <a:defRPr kumimoji="1" sz="1200" kern="1200" cap="small">
+          <a:gradFill flip="none" rotWithShape="1">
+            <a:gsLst>
+              <a:gs pos="0">
+                <a:schemeClr val="tx1"/>
+              </a:gs>
+              <a:gs pos="100000">
+                <a:schemeClr val="tx1">
+                  <a:lumMod val="75000"/>
+                </a:schemeClr>
+              </a:gs>
+            </a:gsLst>
+            <a:lin ang="5580000" scaled="0"/>
+            <a:tileRect/>
+          </a:gradFill>
+          <a:effectLst>
+            <a:glow rad="38100">
+              <a:schemeClr val="bg1">
+                <a:lumMod val="50000"/>
+                <a:lumOff val="50000"/>
+                <a:alpha val="20000"/>
+              </a:schemeClr>
+            </a:glow>
+            <a:outerShdw blurRad="44450" dist="12700" dir="13860000" algn="tl" rotWithShape="0">
+              <a:srgbClr val="000000">
+                <a:alpha val="20000"/>
+              </a:srgbClr>
+            </a:outerShdw>
+          </a:effectLst>
+          <a:latin typeface="+mn-lt"/>
+          <a:ea typeface="+mn-ea"/>
+          <a:cs typeface="+mn-cs"/>
+        </a:defRPr>
+      </a:lvl7pPr>
+      <a:lvl8pPr marL="3429000" indent="-228600" algn="l" defTabSz="457200" rtl="0" eaLnBrk="1" latinLnBrk="0" hangingPunct="1">
+        <a:spcBef>
+          <a:spcPct val="20000"/>
+        </a:spcBef>
+        <a:spcAft>
+          <a:spcPts val="600"/>
+        </a:spcAft>
+        <a:buClr>
+          <a:schemeClr val="tx1"/>
+        </a:buClr>
+        <a:buSzPct val="100000"/>
+        <a:buFont typeface="Arial"/>
+        <a:buChar char="•"/>
+        <a:defRPr kumimoji="1" sz="1200" kern="1200" cap="small">
+          <a:gradFill flip="none" rotWithShape="1">
+            <a:gsLst>
+              <a:gs pos="0">
+                <a:schemeClr val="tx1"/>
+              </a:gs>
+              <a:gs pos="100000">
+                <a:schemeClr val="tx1">
+                  <a:lumMod val="75000"/>
+                </a:schemeClr>
+              </a:gs>
+            </a:gsLst>
+            <a:lin ang="5580000" scaled="0"/>
+            <a:tileRect/>
+          </a:gradFill>
+          <a:effectLst>
+            <a:glow rad="38100">
+              <a:schemeClr val="bg1">
+                <a:lumMod val="50000"/>
+                <a:lumOff val="50000"/>
+                <a:alpha val="20000"/>
+              </a:schemeClr>
+            </a:glow>
+            <a:outerShdw blurRad="44450" dist="12700" dir="13860000" algn="tl" rotWithShape="0">
+              <a:srgbClr val="000000">
+                <a:alpha val="20000"/>
+              </a:srgbClr>
+            </a:outerShdw>
+          </a:effectLst>
+          <a:latin typeface="+mn-lt"/>
+          <a:ea typeface="+mn-ea"/>
+          <a:cs typeface="+mn-cs"/>
+        </a:defRPr>
+      </a:lvl8pPr>
+      <a:lvl9pPr marL="3886200" indent="-228600" algn="l" defTabSz="457200" rtl="0" eaLnBrk="1" latinLnBrk="0" hangingPunct="1">
+        <a:spcBef>
+          <a:spcPct val="20000"/>
+        </a:spcBef>
+        <a:spcAft>
+          <a:spcPts val="600"/>
+        </a:spcAft>
+        <a:buClr>
+          <a:schemeClr val="tx1"/>
+        </a:buClr>
+        <a:buSzPct val="100000"/>
+        <a:buFont typeface="Arial"/>
+        <a:buChar char="•"/>
+        <a:defRPr kumimoji="1" sz="1200" kern="1200" cap="small">
+          <a:gradFill flip="none" rotWithShape="1">
+            <a:gsLst>
+              <a:gs pos="0">
+                <a:schemeClr val="tx1"/>
+              </a:gs>
+              <a:gs pos="100000">
+                <a:schemeClr val="tx1">
+                  <a:lumMod val="75000"/>
+                </a:schemeClr>
+              </a:gs>
+            </a:gsLst>
+            <a:lin ang="5580000" scaled="0"/>
+            <a:tileRect/>
+          </a:gradFill>
+          <a:effectLst>
+            <a:glow rad="38100">
+              <a:schemeClr val="bg1">
+                <a:lumMod val="50000"/>
+                <a:lumOff val="50000"/>
+                <a:alpha val="20000"/>
+              </a:schemeClr>
+            </a:glow>
+            <a:outerShdw blurRad="44450" dist="12700" dir="13860000" algn="tl" rotWithShape="0">
+              <a:srgbClr val="000000">
+                <a:alpha val="20000"/>
+              </a:srgbClr>
+            </a:outerShdw>
+          </a:effectLst>
+          <a:latin typeface="+mn-lt"/>
+          <a:ea typeface="+mn-ea"/>
+          <a:cs typeface="+mn-cs"/>
+        </a:defRPr>
+      </a:lvl9pPr>
+    </p:bodyStyle>
+    <p:otherStyle>
+      <a:defPPr>
+        <a:defRPr lang="en-US"/>
+      </a:defPPr>
+      <a:lvl1pPr marL="0" algn="l" defTabSz="457200" rtl="0" eaLnBrk="1" latinLnBrk="0" hangingPunct="1">
+        <a:defRPr kumimoji="1" sz="1800" kern="1200">
           <a:solidFill>
             <a:schemeClr val="tx1"/>
           </a:solidFill>
@@ -3348,16 +6098,8 @@
           <a:cs typeface="+mn-cs"/>
         </a:defRPr>
       </a:lvl1pPr>
-      <a:lvl2pPr marL="685800" indent="-228600" algn="l" defTabSz="914400" rtl="0" eaLnBrk="1" latinLnBrk="0" hangingPunct="1">
-        <a:lnSpc>
-          <a:spcPct val="90000"/>
-        </a:lnSpc>
-        <a:spcBef>
-          <a:spcPts val="500"/>
-        </a:spcBef>
-        <a:buFont typeface="Arial" panose="020B0604020202020204" pitchFamily="34" charset="0"/>
-        <a:buChar char="•"/>
-        <a:defRPr kumimoji="1" sz="2400" kern="1200">
+      <a:lvl2pPr marL="457200" algn="l" defTabSz="457200" rtl="0" eaLnBrk="1" latinLnBrk="0" hangingPunct="1">
+        <a:defRPr kumimoji="1" sz="1800" kern="1200">
           <a:solidFill>
             <a:schemeClr val="tx1"/>
           </a:solidFill>
@@ -3366,16 +6108,8 @@
           <a:cs typeface="+mn-cs"/>
         </a:defRPr>
       </a:lvl2pPr>
-      <a:lvl3pPr marL="1143000" indent="-228600" algn="l" defTabSz="914400" rtl="0" eaLnBrk="1" latinLnBrk="0" hangingPunct="1">
-        <a:lnSpc>
-          <a:spcPct val="90000"/>
-        </a:lnSpc>
-        <a:spcBef>
-          <a:spcPts val="500"/>
-        </a:spcBef>
-        <a:buFont typeface="Arial" panose="020B0604020202020204" pitchFamily="34" charset="0"/>
-        <a:buChar char="•"/>
-        <a:defRPr kumimoji="1" sz="2000" kern="1200">
+      <a:lvl3pPr marL="914400" algn="l" defTabSz="457200" rtl="0" eaLnBrk="1" latinLnBrk="0" hangingPunct="1">
+        <a:defRPr kumimoji="1" sz="1800" kern="1200">
           <a:solidFill>
             <a:schemeClr val="tx1"/>
           </a:solidFill>
@@ -3384,15 +6118,7 @@
           <a:cs typeface="+mn-cs"/>
         </a:defRPr>
       </a:lvl3pPr>
-      <a:lvl4pPr marL="1600200" indent="-228600" algn="l" defTabSz="914400" rtl="0" eaLnBrk="1" latinLnBrk="0" hangingPunct="1">
-        <a:lnSpc>
-          <a:spcPct val="90000"/>
-        </a:lnSpc>
-        <a:spcBef>
-          <a:spcPts val="500"/>
-        </a:spcBef>
-        <a:buFont typeface="Arial" panose="020B0604020202020204" pitchFamily="34" charset="0"/>
-        <a:buChar char="•"/>
+      <a:lvl4pPr marL="1371600" algn="l" defTabSz="457200" rtl="0" eaLnBrk="1" latinLnBrk="0" hangingPunct="1">
         <a:defRPr kumimoji="1" sz="1800" kern="1200">
           <a:solidFill>
             <a:schemeClr val="tx1"/>
@@ -3402,15 +6128,7 @@
           <a:cs typeface="+mn-cs"/>
         </a:defRPr>
       </a:lvl4pPr>
-      <a:lvl5pPr marL="2057400" indent="-228600" algn="l" defTabSz="914400" rtl="0" eaLnBrk="1" latinLnBrk="0" hangingPunct="1">
-        <a:lnSpc>
-          <a:spcPct val="90000"/>
-        </a:lnSpc>
-        <a:spcBef>
-          <a:spcPts val="500"/>
-        </a:spcBef>
-        <a:buFont typeface="Arial" panose="020B0604020202020204" pitchFamily="34" charset="0"/>
-        <a:buChar char="•"/>
+      <a:lvl5pPr marL="1828800" algn="l" defTabSz="457200" rtl="0" eaLnBrk="1" latinLnBrk="0" hangingPunct="1">
         <a:defRPr kumimoji="1" sz="1800" kern="1200">
           <a:solidFill>
             <a:schemeClr val="tx1"/>
@@ -3420,15 +6138,7 @@
           <a:cs typeface="+mn-cs"/>
         </a:defRPr>
       </a:lvl5pPr>
-      <a:lvl6pPr marL="2514600" indent="-228600" algn="l" defTabSz="914400" rtl="0" eaLnBrk="1" latinLnBrk="0" hangingPunct="1">
-        <a:lnSpc>
-          <a:spcPct val="90000"/>
-        </a:lnSpc>
-        <a:spcBef>
-          <a:spcPts val="500"/>
-        </a:spcBef>
-        <a:buFont typeface="Arial" panose="020B0604020202020204" pitchFamily="34" charset="0"/>
-        <a:buChar char="•"/>
+      <a:lvl6pPr marL="2286000" algn="l" defTabSz="457200" rtl="0" eaLnBrk="1" latinLnBrk="0" hangingPunct="1">
         <a:defRPr kumimoji="1" sz="1800" kern="1200">
           <a:solidFill>
             <a:schemeClr val="tx1"/>
@@ -3438,15 +6148,7 @@
           <a:cs typeface="+mn-cs"/>
         </a:defRPr>
       </a:lvl6pPr>
-      <a:lvl7pPr marL="2971800" indent="-228600" algn="l" defTabSz="914400" rtl="0" eaLnBrk="1" latinLnBrk="0" hangingPunct="1">
-        <a:lnSpc>
-          <a:spcPct val="90000"/>
-        </a:lnSpc>
-        <a:spcBef>
-          <a:spcPts val="500"/>
-        </a:spcBef>
-        <a:buFont typeface="Arial" panose="020B0604020202020204" pitchFamily="34" charset="0"/>
-        <a:buChar char="•"/>
+      <a:lvl7pPr marL="2743200" algn="l" defTabSz="457200" rtl="0" eaLnBrk="1" latinLnBrk="0" hangingPunct="1">
         <a:defRPr kumimoji="1" sz="1800" kern="1200">
           <a:solidFill>
             <a:schemeClr val="tx1"/>
@@ -3456,15 +6158,7 @@
           <a:cs typeface="+mn-cs"/>
         </a:defRPr>
       </a:lvl7pPr>
-      <a:lvl8pPr marL="3429000" indent="-228600" algn="l" defTabSz="914400" rtl="0" eaLnBrk="1" latinLnBrk="0" hangingPunct="1">
-        <a:lnSpc>
-          <a:spcPct val="90000"/>
-        </a:lnSpc>
-        <a:spcBef>
-          <a:spcPts val="500"/>
-        </a:spcBef>
-        <a:buFont typeface="Arial" panose="020B0604020202020204" pitchFamily="34" charset="0"/>
-        <a:buChar char="•"/>
+      <a:lvl8pPr marL="3200400" algn="l" defTabSz="457200" rtl="0" eaLnBrk="1" latinLnBrk="0" hangingPunct="1">
         <a:defRPr kumimoji="1" sz="1800" kern="1200">
           <a:solidFill>
             <a:schemeClr val="tx1"/>
@@ -3474,110 +6168,7 @@
           <a:cs typeface="+mn-cs"/>
         </a:defRPr>
       </a:lvl8pPr>
-      <a:lvl9pPr marL="3886200" indent="-228600" algn="l" defTabSz="914400" rtl="0" eaLnBrk="1" latinLnBrk="0" hangingPunct="1">
-        <a:lnSpc>
-          <a:spcPct val="90000"/>
-        </a:lnSpc>
-        <a:spcBef>
-          <a:spcPts val="500"/>
-        </a:spcBef>
-        <a:buFont typeface="Arial" panose="020B0604020202020204" pitchFamily="34" charset="0"/>
-        <a:buChar char="•"/>
-        <a:defRPr kumimoji="1" sz="1800" kern="1200">
-          <a:solidFill>
-            <a:schemeClr val="tx1"/>
-          </a:solidFill>
-          <a:latin typeface="+mn-lt"/>
-          <a:ea typeface="+mn-ea"/>
-          <a:cs typeface="+mn-cs"/>
-        </a:defRPr>
-      </a:lvl9pPr>
-    </p:bodyStyle>
-    <p:otherStyle>
-      <a:defPPr>
-        <a:defRPr lang="ja-JP"/>
-      </a:defPPr>
-      <a:lvl1pPr marL="0" algn="l" defTabSz="914400" rtl="0" eaLnBrk="1" latinLnBrk="0" hangingPunct="1">
-        <a:defRPr kumimoji="1" sz="1800" kern="1200">
-          <a:solidFill>
-            <a:schemeClr val="tx1"/>
-          </a:solidFill>
-          <a:latin typeface="+mn-lt"/>
-          <a:ea typeface="+mn-ea"/>
-          <a:cs typeface="+mn-cs"/>
-        </a:defRPr>
-      </a:lvl1pPr>
-      <a:lvl2pPr marL="457200" algn="l" defTabSz="914400" rtl="0" eaLnBrk="1" latinLnBrk="0" hangingPunct="1">
-        <a:defRPr kumimoji="1" sz="1800" kern="1200">
-          <a:solidFill>
-            <a:schemeClr val="tx1"/>
-          </a:solidFill>
-          <a:latin typeface="+mn-lt"/>
-          <a:ea typeface="+mn-ea"/>
-          <a:cs typeface="+mn-cs"/>
-        </a:defRPr>
-      </a:lvl2pPr>
-      <a:lvl3pPr marL="914400" algn="l" defTabSz="914400" rtl="0" eaLnBrk="1" latinLnBrk="0" hangingPunct="1">
-        <a:defRPr kumimoji="1" sz="1800" kern="1200">
-          <a:solidFill>
-            <a:schemeClr val="tx1"/>
-          </a:solidFill>
-          <a:latin typeface="+mn-lt"/>
-          <a:ea typeface="+mn-ea"/>
-          <a:cs typeface="+mn-cs"/>
-        </a:defRPr>
-      </a:lvl3pPr>
-      <a:lvl4pPr marL="1371600" algn="l" defTabSz="914400" rtl="0" eaLnBrk="1" latinLnBrk="0" hangingPunct="1">
-        <a:defRPr kumimoji="1" sz="1800" kern="1200">
-          <a:solidFill>
-            <a:schemeClr val="tx1"/>
-          </a:solidFill>
-          <a:latin typeface="+mn-lt"/>
-          <a:ea typeface="+mn-ea"/>
-          <a:cs typeface="+mn-cs"/>
-        </a:defRPr>
-      </a:lvl4pPr>
-      <a:lvl5pPr marL="1828800" algn="l" defTabSz="914400" rtl="0" eaLnBrk="1" latinLnBrk="0" hangingPunct="1">
-        <a:defRPr kumimoji="1" sz="1800" kern="1200">
-          <a:solidFill>
-            <a:schemeClr val="tx1"/>
-          </a:solidFill>
-          <a:latin typeface="+mn-lt"/>
-          <a:ea typeface="+mn-ea"/>
-          <a:cs typeface="+mn-cs"/>
-        </a:defRPr>
-      </a:lvl5pPr>
-      <a:lvl6pPr marL="2286000" algn="l" defTabSz="914400" rtl="0" eaLnBrk="1" latinLnBrk="0" hangingPunct="1">
-        <a:defRPr kumimoji="1" sz="1800" kern="1200">
-          <a:solidFill>
-            <a:schemeClr val="tx1"/>
-          </a:solidFill>
-          <a:latin typeface="+mn-lt"/>
-          <a:ea typeface="+mn-ea"/>
-          <a:cs typeface="+mn-cs"/>
-        </a:defRPr>
-      </a:lvl6pPr>
-      <a:lvl7pPr marL="2743200" algn="l" defTabSz="914400" rtl="0" eaLnBrk="1" latinLnBrk="0" hangingPunct="1">
-        <a:defRPr kumimoji="1" sz="1800" kern="1200">
-          <a:solidFill>
-            <a:schemeClr val="tx1"/>
-          </a:solidFill>
-          <a:latin typeface="+mn-lt"/>
-          <a:ea typeface="+mn-ea"/>
-          <a:cs typeface="+mn-cs"/>
-        </a:defRPr>
-      </a:lvl7pPr>
-      <a:lvl8pPr marL="3200400" algn="l" defTabSz="914400" rtl="0" eaLnBrk="1" latinLnBrk="0" hangingPunct="1">
-        <a:defRPr kumimoji="1" sz="1800" kern="1200">
-          <a:solidFill>
-            <a:schemeClr val="tx1"/>
-          </a:solidFill>
-          <a:latin typeface="+mn-lt"/>
-          <a:ea typeface="+mn-ea"/>
-          <a:cs typeface="+mn-cs"/>
-        </a:defRPr>
-      </a:lvl8pPr>
-      <a:lvl9pPr marL="3657600" algn="l" defTabSz="914400" rtl="0" eaLnBrk="1" latinLnBrk="0" hangingPunct="1">
+      <a:lvl9pPr marL="3657600" algn="l" defTabSz="457200" rtl="0" eaLnBrk="1" latinLnBrk="0" hangingPunct="1">
         <a:defRPr kumimoji="1" sz="1800" kern="1200">
           <a:solidFill>
             <a:schemeClr val="tx1"/>
@@ -3623,8 +6214,8 @@
         </p:nvSpPr>
         <p:spPr>
           <a:xfrm>
-            <a:off x="3713988" y="365760"/>
-            <a:ext cx="4764024" cy="707886"/>
+            <a:off x="4751070" y="493776"/>
+            <a:ext cx="2836164" cy="707886"/>
           </a:xfrm>
           <a:prstGeom prst="rect">
             <a:avLst/>
@@ -3639,7 +6230,7 @@
           <a:p>
             <a:r>
               <a:rPr kumimoji="1" lang="ja-JP" altLang="en-US" sz="4000" b="1" dirty="0"/>
-              <a:t>いわゆる脱出ゲーム</a:t>
+              <a:t>脱出ゲーム</a:t>
             </a:r>
           </a:p>
         </p:txBody>
@@ -3710,38 +6301,6 @@
       </p:sp>
       <p:sp>
         <p:nvSpPr>
-          <p:cNvPr id="7" name="テキスト ボックス 6">
-            <a:extLst>
-              <a:ext uri="{FF2B5EF4-FFF2-40B4-BE49-F238E27FC236}">
-                <a16:creationId xmlns:a16="http://schemas.microsoft.com/office/drawing/2014/main" id="{F6506060-383E-D578-36D0-27FBA0A940EA}"/>
-              </a:ext>
-            </a:extLst>
-          </p:cNvPr>
-          <p:cNvSpPr txBox="1"/>
-          <p:nvPr/>
-        </p:nvSpPr>
-        <p:spPr>
-          <a:xfrm>
-            <a:off x="3404616" y="2651760"/>
-            <a:ext cx="2916936" cy="585216"/>
-          </a:xfrm>
-          <a:prstGeom prst="rect">
-            <a:avLst/>
-          </a:prstGeom>
-          <a:noFill/>
-        </p:spPr>
-        <p:txBody>
-          <a:bodyPr wrap="square" rtlCol="0">
-            <a:spAutoFit/>
-          </a:bodyPr>
-          <a:lstStyle/>
-          <a:p>
-            <a:endParaRPr kumimoji="1" lang="ja-JP" altLang="en-US" dirty="0"/>
-          </a:p>
-        </p:txBody>
-      </p:sp>
-      <p:sp>
-        <p:nvSpPr>
           <p:cNvPr id="9" name="テキスト ボックス 8">
             <a:extLst>
               <a:ext uri="{FF2B5EF4-FFF2-40B4-BE49-F238E27FC236}">
@@ -3754,8 +6313,8 @@
         </p:nvSpPr>
         <p:spPr>
           <a:xfrm>
-            <a:off x="5434584" y="3822192"/>
-            <a:ext cx="1773936" cy="369332"/>
+            <a:off x="5434584" y="4659642"/>
+            <a:ext cx="1880616" cy="1200329"/>
           </a:xfrm>
           <a:prstGeom prst="rect">
             <a:avLst/>
@@ -3770,53 +6329,507 @@
           <a:p>
             <a:r>
               <a:rPr kumimoji="1" lang="en-US" altLang="ja-JP" dirty="0"/>
-              <a:t>NEW</a:t>
-            </a:r>
-            <a:r>
-              <a:rPr kumimoji="1" lang="ja-JP" altLang="en-US" dirty="0"/>
-              <a:t>　</a:t>
-            </a:r>
-            <a:r>
-              <a:rPr kumimoji="1" lang="en-US" altLang="ja-JP" dirty="0"/>
-              <a:t>Game</a:t>
-            </a:r>
+              <a:t>New Game</a:t>
+            </a:r>
+          </a:p>
+          <a:p>
+            <a:endParaRPr kumimoji="1" lang="en-US" altLang="ja-JP" dirty="0"/>
+          </a:p>
+          <a:p>
+            <a:r>
+              <a:rPr lang="en-US" altLang="ja-JP" dirty="0"/>
+              <a:t>Load Game</a:t>
+            </a:r>
+            <a:endParaRPr lang="ja-JP" altLang="en-US" dirty="0"/>
+          </a:p>
+          <a:p>
             <a:endParaRPr kumimoji="1" lang="ja-JP" altLang="en-US" dirty="0"/>
           </a:p>
         </p:txBody>
       </p:sp>
       <p:sp>
         <p:nvSpPr>
-          <p:cNvPr id="10" name="テキスト ボックス 9">
+          <p:cNvPr id="8" name="正方形/長方形 7">
             <a:extLst>
               <a:ext uri="{FF2B5EF4-FFF2-40B4-BE49-F238E27FC236}">
-                <a16:creationId xmlns:a16="http://schemas.microsoft.com/office/drawing/2014/main" id="{D034C81B-E7AD-AD8D-D2C2-C4A13C84C602}"/>
+                <a16:creationId xmlns:a16="http://schemas.microsoft.com/office/drawing/2014/main" id="{D11133AF-68B9-B2C9-D536-5BAE166658A7}"/>
               </a:ext>
             </a:extLst>
           </p:cNvPr>
-          <p:cNvSpPr txBox="1"/>
+          <p:cNvSpPr/>
           <p:nvPr/>
         </p:nvSpPr>
         <p:spPr>
           <a:xfrm>
-            <a:off x="5434584" y="4264152"/>
-            <a:ext cx="1911096" cy="369332"/>
+            <a:off x="2047494" y="2014728"/>
+            <a:ext cx="1078992" cy="1920240"/>
           </a:xfrm>
           <a:prstGeom prst="rect">
             <a:avLst/>
           </a:prstGeom>
-          <a:noFill/>
+          <a:solidFill>
+            <a:schemeClr val="tx1">
+              <a:lumMod val="85000"/>
+            </a:schemeClr>
+          </a:solidFill>
         </p:spPr>
-        <p:txBody>
-          <a:bodyPr wrap="square" rtlCol="0">
-            <a:spAutoFit/>
-          </a:bodyPr>
-          <a:lstStyle/>
-          <a:p>
-            <a:r>
-              <a:rPr kumimoji="1" lang="en-US" altLang="ja-JP" dirty="0"/>
-              <a:t>Load Game</a:t>
-            </a:r>
-            <a:endParaRPr kumimoji="1" lang="ja-JP" altLang="en-US" dirty="0"/>
+        <p:style>
+          <a:lnRef idx="2">
+            <a:schemeClr val="accent1">
+              <a:shade val="15000"/>
+            </a:schemeClr>
+          </a:lnRef>
+          <a:fillRef idx="1">
+            <a:schemeClr val="accent1"/>
+          </a:fillRef>
+          <a:effectRef idx="0">
+            <a:schemeClr val="accent1"/>
+          </a:effectRef>
+          <a:fontRef idx="minor">
+            <a:schemeClr val="lt1"/>
+          </a:fontRef>
+        </p:style>
+        <p:txBody>
+          <a:bodyPr rtlCol="0" anchor="ctr"/>
+          <a:lstStyle/>
+          <a:p>
+            <a:pPr algn="ctr"/>
+            <a:endParaRPr kumimoji="1" lang="ja-JP" altLang="en-US"/>
+          </a:p>
+        </p:txBody>
+      </p:sp>
+      <p:sp>
+        <p:nvSpPr>
+          <p:cNvPr id="12" name="正方形/長方形 11">
+            <a:extLst>
+              <a:ext uri="{FF2B5EF4-FFF2-40B4-BE49-F238E27FC236}">
+                <a16:creationId xmlns:a16="http://schemas.microsoft.com/office/drawing/2014/main" id="{86FC2446-AC3E-35B5-F435-8335A89088E5}"/>
+              </a:ext>
+            </a:extLst>
+          </p:cNvPr>
+          <p:cNvSpPr/>
+          <p:nvPr/>
+        </p:nvSpPr>
+        <p:spPr>
+          <a:xfrm>
+            <a:off x="3885438" y="2054352"/>
+            <a:ext cx="1078992" cy="1920240"/>
+          </a:xfrm>
+          <a:prstGeom prst="rect">
+            <a:avLst/>
+          </a:prstGeom>
+          <a:solidFill>
+            <a:schemeClr val="bg2">
+              <a:lumMod val="60000"/>
+              <a:lumOff val="40000"/>
+            </a:schemeClr>
+          </a:solidFill>
+        </p:spPr>
+        <p:style>
+          <a:lnRef idx="2">
+            <a:schemeClr val="accent1">
+              <a:shade val="15000"/>
+            </a:schemeClr>
+          </a:lnRef>
+          <a:fillRef idx="1">
+            <a:schemeClr val="accent1"/>
+          </a:fillRef>
+          <a:effectRef idx="0">
+            <a:schemeClr val="accent1"/>
+          </a:effectRef>
+          <a:fontRef idx="minor">
+            <a:schemeClr val="lt1"/>
+          </a:fontRef>
+        </p:style>
+        <p:txBody>
+          <a:bodyPr rtlCol="0" anchor="ctr"/>
+          <a:lstStyle/>
+          <a:p>
+            <a:pPr algn="ctr"/>
+            <a:endParaRPr kumimoji="1" lang="ja-JP" altLang="en-US"/>
+          </a:p>
+        </p:txBody>
+      </p:sp>
+      <p:sp>
+        <p:nvSpPr>
+          <p:cNvPr id="14" name="正方形/長方形 13">
+            <a:extLst>
+              <a:ext uri="{FF2B5EF4-FFF2-40B4-BE49-F238E27FC236}">
+                <a16:creationId xmlns:a16="http://schemas.microsoft.com/office/drawing/2014/main" id="{045FDE0A-1B5E-5E05-1208-7BA8BD57B68F}"/>
+              </a:ext>
+            </a:extLst>
+          </p:cNvPr>
+          <p:cNvSpPr/>
+          <p:nvPr/>
+        </p:nvSpPr>
+        <p:spPr>
+          <a:xfrm>
+            <a:off x="5750052" y="2045208"/>
+            <a:ext cx="1078992" cy="1920240"/>
+          </a:xfrm>
+          <a:prstGeom prst="rect">
+            <a:avLst/>
+          </a:prstGeom>
+          <a:solidFill>
+            <a:schemeClr val="tx1">
+              <a:lumMod val="75000"/>
+            </a:schemeClr>
+          </a:solidFill>
+        </p:spPr>
+        <p:style>
+          <a:lnRef idx="2">
+            <a:schemeClr val="accent1">
+              <a:shade val="15000"/>
+            </a:schemeClr>
+          </a:lnRef>
+          <a:fillRef idx="1">
+            <a:schemeClr val="accent1"/>
+          </a:fillRef>
+          <a:effectRef idx="0">
+            <a:schemeClr val="accent1"/>
+          </a:effectRef>
+          <a:fontRef idx="minor">
+            <a:schemeClr val="lt1"/>
+          </a:fontRef>
+        </p:style>
+        <p:txBody>
+          <a:bodyPr rtlCol="0" anchor="ctr"/>
+          <a:lstStyle/>
+          <a:p>
+            <a:pPr algn="ctr"/>
+            <a:endParaRPr kumimoji="1" lang="ja-JP" altLang="en-US"/>
+          </a:p>
+        </p:txBody>
+      </p:sp>
+      <p:sp>
+        <p:nvSpPr>
+          <p:cNvPr id="16" name="正方形/長方形 15">
+            <a:extLst>
+              <a:ext uri="{FF2B5EF4-FFF2-40B4-BE49-F238E27FC236}">
+                <a16:creationId xmlns:a16="http://schemas.microsoft.com/office/drawing/2014/main" id="{93869010-6539-11AA-402A-9E8989EB186C}"/>
+              </a:ext>
+            </a:extLst>
+          </p:cNvPr>
+          <p:cNvSpPr/>
+          <p:nvPr/>
+        </p:nvSpPr>
+        <p:spPr>
+          <a:xfrm>
+            <a:off x="7587234" y="2045208"/>
+            <a:ext cx="1078992" cy="1920240"/>
+          </a:xfrm>
+          <a:prstGeom prst="rect">
+            <a:avLst/>
+          </a:prstGeom>
+          <a:solidFill>
+            <a:schemeClr val="tx1">
+              <a:lumMod val="50000"/>
+            </a:schemeClr>
+          </a:solidFill>
+        </p:spPr>
+        <p:style>
+          <a:lnRef idx="2">
+            <a:schemeClr val="accent1">
+              <a:shade val="15000"/>
+            </a:schemeClr>
+          </a:lnRef>
+          <a:fillRef idx="1">
+            <a:schemeClr val="accent1"/>
+          </a:fillRef>
+          <a:effectRef idx="0">
+            <a:schemeClr val="accent1"/>
+          </a:effectRef>
+          <a:fontRef idx="minor">
+            <a:schemeClr val="lt1"/>
+          </a:fontRef>
+        </p:style>
+        <p:txBody>
+          <a:bodyPr rtlCol="0" anchor="ctr"/>
+          <a:lstStyle/>
+          <a:p>
+            <a:pPr algn="ctr"/>
+            <a:endParaRPr kumimoji="1" lang="ja-JP" altLang="en-US"/>
+          </a:p>
+        </p:txBody>
+      </p:sp>
+      <p:sp>
+        <p:nvSpPr>
+          <p:cNvPr id="18" name="正方形/長方形 17">
+            <a:extLst>
+              <a:ext uri="{FF2B5EF4-FFF2-40B4-BE49-F238E27FC236}">
+                <a16:creationId xmlns:a16="http://schemas.microsoft.com/office/drawing/2014/main" id="{D1CEB488-1A22-B841-8372-E5DE266F2307}"/>
+              </a:ext>
+            </a:extLst>
+          </p:cNvPr>
+          <p:cNvSpPr/>
+          <p:nvPr/>
+        </p:nvSpPr>
+        <p:spPr>
+          <a:xfrm>
+            <a:off x="9424416" y="2014728"/>
+            <a:ext cx="1078992" cy="1920240"/>
+          </a:xfrm>
+          <a:prstGeom prst="rect">
+            <a:avLst/>
+          </a:prstGeom>
+          <a:solidFill>
+            <a:schemeClr val="bg1">
+              <a:lumMod val="75000"/>
+            </a:schemeClr>
+          </a:solidFill>
+        </p:spPr>
+        <p:style>
+          <a:lnRef idx="2">
+            <a:schemeClr val="accent1">
+              <a:shade val="15000"/>
+            </a:schemeClr>
+          </a:lnRef>
+          <a:fillRef idx="1">
+            <a:schemeClr val="accent1"/>
+          </a:fillRef>
+          <a:effectRef idx="0">
+            <a:schemeClr val="accent1"/>
+          </a:effectRef>
+          <a:fontRef idx="minor">
+            <a:schemeClr val="lt1"/>
+          </a:fontRef>
+        </p:style>
+        <p:txBody>
+          <a:bodyPr rtlCol="0" anchor="ctr"/>
+          <a:lstStyle/>
+          <a:p>
+            <a:pPr algn="ctr"/>
+            <a:endParaRPr kumimoji="1" lang="ja-JP" altLang="en-US"/>
+          </a:p>
+        </p:txBody>
+      </p:sp>
+      <p:sp>
+        <p:nvSpPr>
+          <p:cNvPr id="19" name="フローチャート: 結合子 18">
+            <a:extLst>
+              <a:ext uri="{FF2B5EF4-FFF2-40B4-BE49-F238E27FC236}">
+                <a16:creationId xmlns:a16="http://schemas.microsoft.com/office/drawing/2014/main" id="{5D5AD0C7-639D-C9AC-231B-D0AE65E07B4D}"/>
+              </a:ext>
+            </a:extLst>
+          </p:cNvPr>
+          <p:cNvSpPr/>
+          <p:nvPr/>
+        </p:nvSpPr>
+        <p:spPr>
+          <a:xfrm>
+            <a:off x="10112502" y="2926080"/>
+            <a:ext cx="173736" cy="158496"/>
+          </a:xfrm>
+          <a:prstGeom prst="flowChartConnector">
+            <a:avLst/>
+          </a:prstGeom>
+        </p:spPr>
+        <p:style>
+          <a:lnRef idx="2">
+            <a:schemeClr val="accent1">
+              <a:shade val="15000"/>
+            </a:schemeClr>
+          </a:lnRef>
+          <a:fillRef idx="1">
+            <a:schemeClr val="accent1"/>
+          </a:fillRef>
+          <a:effectRef idx="0">
+            <a:schemeClr val="accent1"/>
+          </a:effectRef>
+          <a:fontRef idx="minor">
+            <a:schemeClr val="lt1"/>
+          </a:fontRef>
+        </p:style>
+        <p:txBody>
+          <a:bodyPr rtlCol="0" anchor="ctr"/>
+          <a:lstStyle/>
+          <a:p>
+            <a:pPr algn="ctr"/>
+            <a:endParaRPr kumimoji="1" lang="ja-JP" altLang="en-US"/>
+          </a:p>
+        </p:txBody>
+      </p:sp>
+      <p:sp>
+        <p:nvSpPr>
+          <p:cNvPr id="31" name="フローチャート: 結合子 30">
+            <a:extLst>
+              <a:ext uri="{FF2B5EF4-FFF2-40B4-BE49-F238E27FC236}">
+                <a16:creationId xmlns:a16="http://schemas.microsoft.com/office/drawing/2014/main" id="{187A2745-89EF-4D23-823A-33B2865C4DA6}"/>
+              </a:ext>
+            </a:extLst>
+          </p:cNvPr>
+          <p:cNvSpPr/>
+          <p:nvPr/>
+        </p:nvSpPr>
+        <p:spPr>
+          <a:xfrm>
+            <a:off x="8354568" y="2930652"/>
+            <a:ext cx="173736" cy="158496"/>
+          </a:xfrm>
+          <a:prstGeom prst="flowChartConnector">
+            <a:avLst/>
+          </a:prstGeom>
+        </p:spPr>
+        <p:style>
+          <a:lnRef idx="2">
+            <a:schemeClr val="accent1">
+              <a:shade val="15000"/>
+            </a:schemeClr>
+          </a:lnRef>
+          <a:fillRef idx="1">
+            <a:schemeClr val="accent1"/>
+          </a:fillRef>
+          <a:effectRef idx="0">
+            <a:schemeClr val="accent1"/>
+          </a:effectRef>
+          <a:fontRef idx="minor">
+            <a:schemeClr val="lt1"/>
+          </a:fontRef>
+        </p:style>
+        <p:txBody>
+          <a:bodyPr rtlCol="0" anchor="ctr"/>
+          <a:lstStyle/>
+          <a:p>
+            <a:pPr algn="ctr"/>
+            <a:endParaRPr kumimoji="1" lang="ja-JP" altLang="en-US"/>
+          </a:p>
+        </p:txBody>
+      </p:sp>
+      <p:sp>
+        <p:nvSpPr>
+          <p:cNvPr id="33" name="フローチャート: 結合子 32">
+            <a:extLst>
+              <a:ext uri="{FF2B5EF4-FFF2-40B4-BE49-F238E27FC236}">
+                <a16:creationId xmlns:a16="http://schemas.microsoft.com/office/drawing/2014/main" id="{E3CB6116-2B47-F324-EDEC-14E23365DB77}"/>
+              </a:ext>
+            </a:extLst>
+          </p:cNvPr>
+          <p:cNvSpPr/>
+          <p:nvPr/>
+        </p:nvSpPr>
+        <p:spPr>
+          <a:xfrm>
+            <a:off x="6541008" y="2851404"/>
+            <a:ext cx="173736" cy="158496"/>
+          </a:xfrm>
+          <a:prstGeom prst="flowChartConnector">
+            <a:avLst/>
+          </a:prstGeom>
+        </p:spPr>
+        <p:style>
+          <a:lnRef idx="2">
+            <a:schemeClr val="accent1">
+              <a:shade val="15000"/>
+            </a:schemeClr>
+          </a:lnRef>
+          <a:fillRef idx="1">
+            <a:schemeClr val="accent1"/>
+          </a:fillRef>
+          <a:effectRef idx="0">
+            <a:schemeClr val="accent1"/>
+          </a:effectRef>
+          <a:fontRef idx="minor">
+            <a:schemeClr val="lt1"/>
+          </a:fontRef>
+        </p:style>
+        <p:txBody>
+          <a:bodyPr rtlCol="0" anchor="ctr"/>
+          <a:lstStyle/>
+          <a:p>
+            <a:pPr algn="ctr"/>
+            <a:endParaRPr kumimoji="1" lang="ja-JP" altLang="en-US"/>
+          </a:p>
+        </p:txBody>
+      </p:sp>
+      <p:sp>
+        <p:nvSpPr>
+          <p:cNvPr id="35" name="フローチャート: 結合子 34">
+            <a:extLst>
+              <a:ext uri="{FF2B5EF4-FFF2-40B4-BE49-F238E27FC236}">
+                <a16:creationId xmlns:a16="http://schemas.microsoft.com/office/drawing/2014/main" id="{0EC99A99-4DAC-0728-15EE-DD3A760437C0}"/>
+              </a:ext>
+            </a:extLst>
+          </p:cNvPr>
+          <p:cNvSpPr/>
+          <p:nvPr/>
+        </p:nvSpPr>
+        <p:spPr>
+          <a:xfrm>
+            <a:off x="4664202" y="2883783"/>
+            <a:ext cx="173736" cy="158496"/>
+          </a:xfrm>
+          <a:prstGeom prst="flowChartConnector">
+            <a:avLst/>
+          </a:prstGeom>
+        </p:spPr>
+        <p:style>
+          <a:lnRef idx="2">
+            <a:schemeClr val="accent1">
+              <a:shade val="15000"/>
+            </a:schemeClr>
+          </a:lnRef>
+          <a:fillRef idx="1">
+            <a:schemeClr val="accent1"/>
+          </a:fillRef>
+          <a:effectRef idx="0">
+            <a:schemeClr val="accent1"/>
+          </a:effectRef>
+          <a:fontRef idx="minor">
+            <a:schemeClr val="lt1"/>
+          </a:fontRef>
+        </p:style>
+        <p:txBody>
+          <a:bodyPr rtlCol="0" anchor="ctr"/>
+          <a:lstStyle/>
+          <a:p>
+            <a:pPr algn="ctr"/>
+            <a:endParaRPr kumimoji="1" lang="ja-JP" altLang="en-US"/>
+          </a:p>
+        </p:txBody>
+      </p:sp>
+      <p:sp>
+        <p:nvSpPr>
+          <p:cNvPr id="37" name="フローチャート: 結合子 36">
+            <a:extLst>
+              <a:ext uri="{FF2B5EF4-FFF2-40B4-BE49-F238E27FC236}">
+                <a16:creationId xmlns:a16="http://schemas.microsoft.com/office/drawing/2014/main" id="{44A3374D-198B-544E-16A6-985D5A2C441F}"/>
+              </a:ext>
+            </a:extLst>
+          </p:cNvPr>
+          <p:cNvSpPr/>
+          <p:nvPr/>
+        </p:nvSpPr>
+        <p:spPr>
+          <a:xfrm>
+            <a:off x="2795016" y="2861322"/>
+            <a:ext cx="173736" cy="158496"/>
+          </a:xfrm>
+          <a:prstGeom prst="flowChartConnector">
+            <a:avLst/>
+          </a:prstGeom>
+        </p:spPr>
+        <p:style>
+          <a:lnRef idx="2">
+            <a:schemeClr val="accent1">
+              <a:shade val="15000"/>
+            </a:schemeClr>
+          </a:lnRef>
+          <a:fillRef idx="1">
+            <a:schemeClr val="accent1"/>
+          </a:fillRef>
+          <a:effectRef idx="0">
+            <a:schemeClr val="accent1"/>
+          </a:effectRef>
+          <a:fontRef idx="minor">
+            <a:schemeClr val="lt1"/>
+          </a:fontRef>
+        </p:style>
+        <p:txBody>
+          <a:bodyPr rtlCol="0" anchor="ctr"/>
+          <a:lstStyle/>
+          <a:p>
+            <a:pPr algn="ctr"/>
+            <a:endParaRPr kumimoji="1" lang="ja-JP" altLang="en-US"/>
           </a:p>
         </p:txBody>
       </p:sp>
@@ -3834,9 +6847,9 @@
 </file>
 
 <file path=ppt/theme/theme1.xml><?xml version="1.0" encoding="utf-8"?>
-<a:theme xmlns:a="http://schemas.openxmlformats.org/drawingml/2006/main" name="Office テーマ">
+<a:theme xmlns:a="http://schemas.openxmlformats.org/drawingml/2006/main" name="メッシュ">
   <a:themeElements>
-    <a:clrScheme name="Office">
+    <a:clrScheme name="メッシュ">
       <a:dk1>
         <a:sysClr val="windowText" lastClr="000000"/>
       </a:dk1>
@@ -3844,100 +6857,48 @@
         <a:sysClr val="window" lastClr="FFFFFF"/>
       </a:lt1>
       <a:dk2>
-        <a:srgbClr val="0E2841"/>
+        <a:srgbClr val="363D46"/>
       </a:dk2>
       <a:lt2>
-        <a:srgbClr val="E8E8E8"/>
+        <a:srgbClr val="EBEBEB"/>
       </a:lt2>
       <a:accent1>
-        <a:srgbClr val="156082"/>
+        <a:srgbClr val="6F6F6F"/>
       </a:accent1>
       <a:accent2>
-        <a:srgbClr val="E97132"/>
+        <a:srgbClr val="BFBFA5"/>
       </a:accent2>
       <a:accent3>
-        <a:srgbClr val="196B24"/>
+        <a:srgbClr val="DCD084"/>
       </a:accent3>
       <a:accent4>
-        <a:srgbClr val="0F9ED5"/>
+        <a:srgbClr val="E7BF5F"/>
       </a:accent4>
       <a:accent5>
-        <a:srgbClr val="A02B93"/>
+        <a:srgbClr val="E9A039"/>
       </a:accent5>
       <a:accent6>
-        <a:srgbClr val="4EA72E"/>
+        <a:srgbClr val="CF7133"/>
       </a:accent6>
       <a:hlink>
-        <a:srgbClr val="467886"/>
+        <a:srgbClr val="F28943"/>
       </a:hlink>
       <a:folHlink>
-        <a:srgbClr val="96607D"/>
+        <a:srgbClr val="F1B76C"/>
       </a:folHlink>
     </a:clrScheme>
-    <a:fontScheme name="Office">
+    <a:fontScheme name="メッシュ">
       <a:majorFont>
-        <a:latin typeface="游ゴシック Light" panose="02110004020202020204"/>
+        <a:latin typeface="Century Gothic" panose="020B0502020202020204"/>
         <a:ea typeface=""/>
         <a:cs typeface=""/>
-        <a:font script="Jpan" typeface="游ゴシック Light"/>
+        <a:font script="Jpan" typeface="ＭＳ ゴシック"/>
         <a:font script="Hang" typeface="맑은 고딕"/>
-        <a:font script="Hans" typeface="等线 Light"/>
+        <a:font script="Hans" typeface="宋体"/>
         <a:font script="Hant" typeface="新細明體"/>
-        <a:font script="Arab" typeface="Times New Roman"/>
-        <a:font script="Hebr" typeface="Times New Roman"/>
-        <a:font script="Thai" typeface="Angsana New"/>
-        <a:font script="Ethi" typeface="Nyala"/>
-        <a:font script="Beng" typeface="Vrinda"/>
-        <a:font script="Gujr" typeface="Shruti"/>
-        <a:font script="Khmr" typeface="MoolBoran"/>
-        <a:font script="Knda" typeface="Tunga"/>
-        <a:font script="Guru" typeface="Raavi"/>
-        <a:font script="Cans" typeface="Euphemia"/>
-        <a:font script="Cher" typeface="Plantagenet Cherokee"/>
-        <a:font script="Yiii" typeface="Microsoft Yi Baiti"/>
-        <a:font script="Tibt" typeface="Microsoft Himalaya"/>
-        <a:font script="Thaa" typeface="MV Boli"/>
-        <a:font script="Deva" typeface="Mangal"/>
-        <a:font script="Telu" typeface="Gautami"/>
-        <a:font script="Taml" typeface="Latha"/>
-        <a:font script="Syrc" typeface="Estrangelo Edessa"/>
-        <a:font script="Orya" typeface="Kalinga"/>
-        <a:font script="Mlym" typeface="Kartika"/>
-        <a:font script="Laoo" typeface="DokChampa"/>
-        <a:font script="Sinh" typeface="Iskoola Pota"/>
-        <a:font script="Mong" typeface="Mongolian Baiti"/>
-        <a:font script="Viet" typeface="Times New Roman"/>
-        <a:font script="Uigh" typeface="Microsoft Uighur"/>
-        <a:font script="Geor" typeface="Sylfaen"/>
-        <a:font script="Armn" typeface="Arial"/>
-        <a:font script="Bugi" typeface="Leelawadee UI"/>
-        <a:font script="Bopo" typeface="Microsoft JhengHei"/>
-        <a:font script="Java" typeface="Javanese Text"/>
-        <a:font script="Lisu" typeface="Segoe UI"/>
-        <a:font script="Mymr" typeface="Myanmar Text"/>
-        <a:font script="Nkoo" typeface="Ebrima"/>
-        <a:font script="Olck" typeface="Nirmala UI"/>
-        <a:font script="Osma" typeface="Ebrima"/>
-        <a:font script="Phag" typeface="Phagspa"/>
-        <a:font script="Syrn" typeface="Estrangelo Edessa"/>
-        <a:font script="Syrj" typeface="Estrangelo Edessa"/>
-        <a:font script="Syre" typeface="Estrangelo Edessa"/>
-        <a:font script="Sora" typeface="Nirmala UI"/>
-        <a:font script="Tale" typeface="Microsoft Tai Le"/>
-        <a:font script="Talu" typeface="Microsoft New Tai Lue"/>
-        <a:font script="Tfng" typeface="Ebrima"/>
-      </a:majorFont>
-      <a:minorFont>
-        <a:latin typeface="游ゴシック" panose="02110004020202020204"/>
-        <a:ea typeface=""/>
-        <a:cs typeface=""/>
-        <a:font script="Jpan" typeface="游ゴシック"/>
-        <a:font script="Hang" typeface="맑은 고딕"/>
-        <a:font script="Hans" typeface="等线"/>
-        <a:font script="Hant" typeface="新細明體"/>
-        <a:font script="Arab" typeface="Arial"/>
-        <a:font script="Hebr" typeface="Arial"/>
-        <a:font script="Thai" typeface="Cordia New"/>
+        <a:font script="Arab" typeface="Tahoma"/>
+        <a:font script="Hebr" typeface="Gisha"/>
+        <a:font script="Thai" typeface="DilleniaUPC"/>
         <a:font script="Ethi" typeface="Nyala"/>
         <a:font script="Beng" typeface="Vrinda"/>
         <a:font script="Gujr" typeface="Shruti"/>
@@ -3958,29 +6919,47 @@
         <a:font script="Laoo" typeface="DokChampa"/>
         <a:font script="Sinh" typeface="Iskoola Pota"/>
         <a:font script="Mong" typeface="Mongolian Baiti"/>
-        <a:font script="Viet" typeface="Arial"/>
+        <a:font script="Viet" typeface="Tahoma"/>
         <a:font script="Uigh" typeface="Microsoft Uighur"/>
         <a:font script="Geor" typeface="Sylfaen"/>
-        <a:font script="Armn" typeface="Arial"/>
-        <a:font script="Bugi" typeface="Leelawadee UI"/>
-        <a:font script="Bopo" typeface="Microsoft JhengHei"/>
-        <a:font script="Java" typeface="Javanese Text"/>
-        <a:font script="Lisu" typeface="Segoe UI"/>
-        <a:font script="Mymr" typeface="Myanmar Text"/>
-        <a:font script="Nkoo" typeface="Ebrima"/>
-        <a:font script="Olck" typeface="Nirmala UI"/>
-        <a:font script="Osma" typeface="Ebrima"/>
-        <a:font script="Phag" typeface="Phagspa"/>
-        <a:font script="Syrn" typeface="Estrangelo Edessa"/>
-        <a:font script="Syrj" typeface="Estrangelo Edessa"/>
-        <a:font script="Syre" typeface="Estrangelo Edessa"/>
-        <a:font script="Sora" typeface="Nirmala UI"/>
-        <a:font script="Tale" typeface="Microsoft Tai Le"/>
-        <a:font script="Talu" typeface="Microsoft New Tai Lue"/>
-        <a:font script="Tfng" typeface="Ebrima"/>
+      </a:majorFont>
+      <a:minorFont>
+        <a:latin typeface="Century Gothic" panose="020B0502020202020204"/>
+        <a:ea typeface=""/>
+        <a:cs typeface=""/>
+        <a:font script="Jpan" typeface="ＭＳ ゴシック"/>
+        <a:font script="Hang" typeface="맑은 고딕"/>
+        <a:font script="Hans" typeface="宋体"/>
+        <a:font script="Hant" typeface="新細明體"/>
+        <a:font script="Arab" typeface="Tahoma"/>
+        <a:font script="Hebr" typeface="Gisha"/>
+        <a:font script="Thai" typeface="DilleniaUPC"/>
+        <a:font script="Ethi" typeface="Nyala"/>
+        <a:font script="Beng" typeface="Vrinda"/>
+        <a:font script="Gujr" typeface="Shruti"/>
+        <a:font script="Khmr" typeface="DaunPenh"/>
+        <a:font script="Knda" typeface="Tunga"/>
+        <a:font script="Guru" typeface="Raavi"/>
+        <a:font script="Cans" typeface="Euphemia"/>
+        <a:font script="Cher" typeface="Plantagenet Cherokee"/>
+        <a:font script="Yiii" typeface="Microsoft Yi Baiti"/>
+        <a:font script="Tibt" typeface="Microsoft Himalaya"/>
+        <a:font script="Thaa" typeface="MV Boli"/>
+        <a:font script="Deva" typeface="Mangal"/>
+        <a:font script="Telu" typeface="Gautami"/>
+        <a:font script="Taml" typeface="Latha"/>
+        <a:font script="Syrc" typeface="Estrangelo Edessa"/>
+        <a:font script="Orya" typeface="Kalinga"/>
+        <a:font script="Mlym" typeface="Kartika"/>
+        <a:font script="Laoo" typeface="DokChampa"/>
+        <a:font script="Sinh" typeface="Iskoola Pota"/>
+        <a:font script="Mong" typeface="Mongolian Baiti"/>
+        <a:font script="Viet" typeface="Verdana"/>
+        <a:font script="Uigh" typeface="Microsoft Uighur"/>
+        <a:font script="Geor" typeface="Sylfaen"/>
       </a:minorFont>
     </a:fontScheme>
-    <a:fmtScheme name="Office">
+    <a:fmtScheme name="メッシュ">
       <a:fillStyleLst>
         <a:solidFill>
           <a:schemeClr val="phClr"/>
@@ -3989,23 +6968,13 @@
           <a:gsLst>
             <a:gs pos="0">
               <a:schemeClr val="phClr">
+                <a:tint val="60000"/>
                 <a:lumMod val="110000"/>
-                <a:satMod val="105000"/>
-                <a:tint val="67000"/>
-              </a:schemeClr>
-            </a:gs>
-            <a:gs pos="50000">
-              <a:schemeClr val="phClr">
-                <a:lumMod val="105000"/>
-                <a:satMod val="103000"/>
-                <a:tint val="73000"/>
               </a:schemeClr>
             </a:gs>
             <a:gs pos="100000">
               <a:schemeClr val="phClr">
-                <a:lumMod val="105000"/>
-                <a:satMod val="109000"/>
-                <a:tint val="81000"/>
+                <a:tint val="82000"/>
               </a:schemeClr>
             </a:gs>
           </a:gsLst>
@@ -4015,23 +6984,14 @@
           <a:gsLst>
             <a:gs pos="0">
               <a:schemeClr val="phClr">
-                <a:satMod val="103000"/>
-                <a:lumMod val="102000"/>
-                <a:tint val="94000"/>
-              </a:schemeClr>
-            </a:gs>
-            <a:gs pos="50000">
-              <a:schemeClr val="phClr">
-                <a:satMod val="110000"/>
-                <a:lumMod val="100000"/>
-                <a:shade val="100000"/>
+                <a:tint val="96000"/>
+                <a:lumMod val="104000"/>
               </a:schemeClr>
             </a:gs>
             <a:gs pos="100000">
               <a:schemeClr val="phClr">
-                <a:lumMod val="99000"/>
-                <a:satMod val="120000"/>
-                <a:shade val="78000"/>
+                <a:shade val="84000"/>
+                <a:lumMod val="84000"/>
               </a:schemeClr>
             </a:gs>
           </a:gsLst>
@@ -4039,26 +6999,23 @@
         </a:gradFill>
       </a:fillStyleLst>
       <a:lnStyleLst>
-        <a:ln w="12700" cap="flat" cmpd="sng" algn="ctr">
+        <a:ln w="9525" cap="rnd" cmpd="sng" algn="ctr">
           <a:solidFill>
             <a:schemeClr val="phClr"/>
           </a:solidFill>
           <a:prstDash val="solid"/>
-          <a:miter lim="800000"/>
         </a:ln>
-        <a:ln w="19050" cap="flat" cmpd="sng" algn="ctr">
+        <a:ln w="19050" cap="rnd" cmpd="sng" algn="ctr">
           <a:solidFill>
             <a:schemeClr val="phClr"/>
           </a:solidFill>
           <a:prstDash val="solid"/>
-          <a:miter lim="800000"/>
         </a:ln>
-        <a:ln w="25400" cap="flat" cmpd="sng" algn="ctr">
+        <a:ln w="25400" cap="rnd" cmpd="sng" algn="ctr">
           <a:solidFill>
             <a:schemeClr val="phClr"/>
           </a:solidFill>
           <a:prstDash val="solid"/>
-          <a:miter lim="800000"/>
         </a:ln>
       </a:lnStyleLst>
       <a:effectStyleLst>
@@ -4066,83 +7023,80 @@
           <a:effectLst/>
         </a:effectStyle>
         <a:effectStyle>
-          <a:effectLst/>
+          <a:effectLst>
+            <a:innerShdw blurRad="50800" dist="25400" dir="13500000">
+              <a:srgbClr val="000000">
+                <a:alpha val="55000"/>
+              </a:srgbClr>
+            </a:innerShdw>
+          </a:effectLst>
         </a:effectStyle>
         <a:effectStyle>
           <a:effectLst>
-            <a:outerShdw blurRad="57150" dist="19050" dir="5400000" algn="ctr" rotWithShape="0">
+            <a:outerShdw blurRad="50800" dist="38100" dir="5400000" rotWithShape="0">
               <a:srgbClr val="000000">
-                <a:alpha val="63000"/>
+                <a:alpha val="60000"/>
               </a:srgbClr>
             </a:outerShdw>
           </a:effectLst>
+          <a:scene3d>
+            <a:camera prst="orthographicFront">
+              <a:rot lat="0" lon="0" rev="0"/>
+            </a:camera>
+            <a:lightRig rig="threePt" dir="tl"/>
+          </a:scene3d>
+          <a:sp3d>
+            <a:bevelT w="25400" h="25400" prst="slope"/>
+          </a:sp3d>
         </a:effectStyle>
       </a:effectStyleLst>
       <a:bgFillStyleLst>
         <a:solidFill>
           <a:schemeClr val="phClr"/>
         </a:solidFill>
-        <a:solidFill>
-          <a:schemeClr val="phClr">
-            <a:tint val="95000"/>
-            <a:satMod val="170000"/>
-          </a:schemeClr>
-        </a:solidFill>
         <a:gradFill rotWithShape="1">
           <a:gsLst>
             <a:gs pos="0">
               <a:schemeClr val="phClr">
-                <a:tint val="93000"/>
-                <a:satMod val="150000"/>
-                <a:shade val="98000"/>
-                <a:lumMod val="102000"/>
-              </a:schemeClr>
-            </a:gs>
-            <a:gs pos="50000">
-              <a:schemeClr val="phClr">
-                <a:tint val="98000"/>
-                <a:satMod val="130000"/>
-                <a:shade val="90000"/>
-                <a:lumMod val="103000"/>
+                <a:tint val="90000"/>
+                <a:lumMod val="110000"/>
               </a:schemeClr>
             </a:gs>
             <a:gs pos="100000">
               <a:schemeClr val="phClr">
-                <a:shade val="63000"/>
-                <a:satMod val="120000"/>
+                <a:shade val="64000"/>
+                <a:lumMod val="98000"/>
               </a:schemeClr>
             </a:gs>
           </a:gsLst>
           <a:lin ang="5400000" scaled="0"/>
         </a:gradFill>
+        <a:blipFill rotWithShape="1">
+          <a:blip xmlns:r="http://schemas.openxmlformats.org/officeDocument/2006/relationships" r:embed="rId1">
+            <a:duotone>
+              <a:schemeClr val="phClr">
+                <a:shade val="28000"/>
+                <a:satMod val="94000"/>
+                <a:lumMod val="20000"/>
+              </a:schemeClr>
+              <a:schemeClr val="phClr">
+                <a:tint val="94000"/>
+                <a:shade val="84000"/>
+                <a:satMod val="148000"/>
+                <a:lumMod val="114000"/>
+              </a:schemeClr>
+            </a:duotone>
+          </a:blip>
+          <a:stretch/>
+        </a:blipFill>
       </a:bgFillStyleLst>
     </a:fmtScheme>
   </a:themeElements>
-  <a:objectDefaults>
-    <a:lnDef>
-      <a:spPr/>
-      <a:bodyPr/>
-      <a:lstStyle/>
-      <a:style>
-        <a:lnRef idx="2">
-          <a:schemeClr val="accent1"/>
-        </a:lnRef>
-        <a:fillRef idx="0">
-          <a:schemeClr val="accent1"/>
-        </a:fillRef>
-        <a:effectRef idx="1">
-          <a:schemeClr val="accent1"/>
-        </a:effectRef>
-        <a:fontRef idx="minor">
-          <a:schemeClr val="tx1"/>
-        </a:fontRef>
-      </a:style>
-    </a:lnDef>
-  </a:objectDefaults>
+  <a:objectDefaults/>
   <a:extraClrSchemeLst/>
   <a:extLst>
     <a:ext uri="{05A4C25C-085E-4340-85A3-A5531E510DB2}">
-      <thm15:themeFamily xmlns:thm15="http://schemas.microsoft.com/office/thememl/2012/main" name="Office Theme" id="{2E142A2C-CD16-42D6-873A-C26D2A0506FA}" vid="{1BDDFF52-6CD6-40A5-AB3C-68EB2F1E4D0A}"/>
+      <thm15:themeFamily xmlns:thm15="http://schemas.microsoft.com/office/thememl/2012/main" name="Mesh" id="{789EC3FE-34FD-429C-9918-760025E6C145}" vid="{B8BE45C0-8141-4D58-8C71-A009BC26FBBB}"/>
     </a:ext>
   </a:extLst>
 </a:theme>

--- a/materials/スタート画面.pptx
+++ b/materials/スタート画面.pptx
@@ -125,12 +125,12 @@
   <pc:docChgLst>
     <pc:chgData name="春樹 寺谷" userId="273275a70e5237a3" providerId="LiveId" clId="{A7346177-5A59-47E4-BD9A-CD90ECDD0E43}"/>
     <pc:docChg chg="undo custSel modSld">
-      <pc:chgData name="春樹 寺谷" userId="273275a70e5237a3" providerId="LiveId" clId="{A7346177-5A59-47E4-BD9A-CD90ECDD0E43}" dt="2026-07-06T05:54:49.027" v="84" actId="20577"/>
+      <pc:chgData name="春樹 寺谷" userId="273275a70e5237a3" providerId="LiveId" clId="{A7346177-5A59-47E4-BD9A-CD90ECDD0E43}" dt="2026-07-06T06:30:52.327" v="85" actId="1076"/>
       <pc:docMkLst>
         <pc:docMk/>
       </pc:docMkLst>
       <pc:sldChg chg="addSp delSp modSp mod">
-        <pc:chgData name="春樹 寺谷" userId="273275a70e5237a3" providerId="LiveId" clId="{A7346177-5A59-47E4-BD9A-CD90ECDD0E43}" dt="2026-07-06T05:54:49.027" v="84" actId="20577"/>
+        <pc:chgData name="春樹 寺谷" userId="273275a70e5237a3" providerId="LiveId" clId="{A7346177-5A59-47E4-BD9A-CD90ECDD0E43}" dt="2026-07-06T06:30:52.327" v="85" actId="1076"/>
         <pc:sldMkLst>
           <pc:docMk/>
           <pc:sldMk cId="1116214111" sldId="257"/>
@@ -168,7 +168,7 @@
           </ac:spMkLst>
         </pc:spChg>
         <pc:spChg chg="mod">
-          <ac:chgData name="春樹 寺谷" userId="273275a70e5237a3" providerId="LiveId" clId="{A7346177-5A59-47E4-BD9A-CD90ECDD0E43}" dt="2026-07-06T05:54:49.027" v="84" actId="20577"/>
+          <ac:chgData name="春樹 寺谷" userId="273275a70e5237a3" providerId="LiveId" clId="{A7346177-5A59-47E4-BD9A-CD90ECDD0E43}" dt="2026-07-06T06:30:52.327" v="85" actId="1076"/>
           <ac:spMkLst>
             <pc:docMk/>
             <pc:sldMk cId="1116214111" sldId="257"/>
@@ -6313,7 +6313,7 @@
         </p:nvSpPr>
         <p:spPr>
           <a:xfrm>
-            <a:off x="5434584" y="4659642"/>
+            <a:off x="5349240" y="5004816"/>
             <a:ext cx="1880616" cy="1200329"/>
           </a:xfrm>
           <a:prstGeom prst="rect">

--- a/materials/スタート画面.pptx
+++ b/materials/スタート画面.pptx
@@ -125,18 +125,18 @@
   <pc:docChgLst>
     <pc:chgData name="春樹 寺谷" userId="273275a70e5237a3" providerId="LiveId" clId="{A7346177-5A59-47E4-BD9A-CD90ECDD0E43}"/>
     <pc:docChg chg="undo custSel modSld">
-      <pc:chgData name="春樹 寺谷" userId="273275a70e5237a3" providerId="LiveId" clId="{A7346177-5A59-47E4-BD9A-CD90ECDD0E43}" dt="2026-07-06T06:30:52.327" v="85" actId="1076"/>
+      <pc:chgData name="春樹 寺谷" userId="273275a70e5237a3" providerId="LiveId" clId="{A7346177-5A59-47E4-BD9A-CD90ECDD0E43}" dt="2026-07-06T07:10:22.976" v="87" actId="1076"/>
       <pc:docMkLst>
         <pc:docMk/>
       </pc:docMkLst>
       <pc:sldChg chg="addSp delSp modSp mod">
-        <pc:chgData name="春樹 寺谷" userId="273275a70e5237a3" providerId="LiveId" clId="{A7346177-5A59-47E4-BD9A-CD90ECDD0E43}" dt="2026-07-06T06:30:52.327" v="85" actId="1076"/>
+        <pc:chgData name="春樹 寺谷" userId="273275a70e5237a3" providerId="LiveId" clId="{A7346177-5A59-47E4-BD9A-CD90ECDD0E43}" dt="2026-07-06T07:10:22.976" v="87" actId="1076"/>
         <pc:sldMkLst>
           <pc:docMk/>
           <pc:sldMk cId="1116214111" sldId="257"/>
         </pc:sldMkLst>
         <pc:spChg chg="mod">
-          <ac:chgData name="春樹 寺谷" userId="273275a70e5237a3" providerId="LiveId" clId="{A7346177-5A59-47E4-BD9A-CD90ECDD0E43}" dt="2026-07-06T05:46:23.097" v="6" actId="1076"/>
+          <ac:chgData name="春樹 寺谷" userId="273275a70e5237a3" providerId="LiveId" clId="{A7346177-5A59-47E4-BD9A-CD90ECDD0E43}" dt="2026-07-06T07:10:22.976" v="87" actId="1076"/>
           <ac:spMkLst>
             <pc:docMk/>
             <pc:sldMk cId="1116214111" sldId="257"/>
@@ -6214,7 +6214,7 @@
         </p:nvSpPr>
         <p:spPr>
           <a:xfrm>
-            <a:off x="4751070" y="493776"/>
+            <a:off x="4677918" y="568664"/>
             <a:ext cx="2836164" cy="707886"/>
           </a:xfrm>
           <a:prstGeom prst="rect">
